--- a/docs/LF/slides/LF_2026/DeepCausality_TAC_2026.pptx
+++ b/docs/LF/slides/LF_2026/DeepCausality_TAC_2026.pptx
@@ -4,24 +4,27 @@
   <p:sldMasterIdLst>
     <p:sldMasterId id="2147483648" r:id="rId1"/>
   </p:sldMasterIdLst>
+  <p:notesMasterIdLst>
+    <p:notesMasterId r:id="rId17"/>
+  </p:notesMasterIdLst>
   <p:sldIdLst>
-    <p:sldId id="256" r:id="rId7"/>
-    <p:sldId id="257" r:id="rId9"/>
-    <p:sldId id="258" r:id="rId10"/>
-    <p:sldId id="259" r:id="rId11"/>
-    <p:sldId id="260" r:id="rId12"/>
-    <p:sldId id="261" r:id="rId13"/>
-    <p:sldId id="262" r:id="rId14"/>
-    <p:sldId id="263" r:id="rId15"/>
-    <p:sldId id="264" r:id="rId16"/>
-    <p:sldId id="265" r:id="rId17"/>
-    <p:sldId id="266" r:id="rId18"/>
-    <p:sldId id="267" r:id="rId19"/>
-    <p:sldId id="268" r:id="rId20"/>
-    <p:sldId id="269" r:id="rId21"/>
-    <p:sldId id="270" r:id="rId22"/>
+    <p:sldId id="256" r:id="rId2"/>
+    <p:sldId id="257" r:id="rId3"/>
+    <p:sldId id="258" r:id="rId4"/>
+    <p:sldId id="259" r:id="rId5"/>
+    <p:sldId id="260" r:id="rId6"/>
+    <p:sldId id="261" r:id="rId7"/>
+    <p:sldId id="262" r:id="rId8"/>
+    <p:sldId id="263" r:id="rId9"/>
+    <p:sldId id="264" r:id="rId10"/>
+    <p:sldId id="265" r:id="rId11"/>
+    <p:sldId id="266" r:id="rId12"/>
+    <p:sldId id="267" r:id="rId13"/>
+    <p:sldId id="268" r:id="rId14"/>
+    <p:sldId id="269" r:id="rId15"/>
+    <p:sldId id="270" r:id="rId16"/>
   </p:sldIdLst>
-  <p:sldSz cx="12191969" cy="6858000" type="screen4x3"/>
+  <p:sldSz cx="12192000" cy="6858000"/>
   <p:notesSz cx="6858000" cy="9144000"/>
   <p:defaultTextStyle>
     <a:defPPr>
@@ -118,11 +121,27 @@
       </a:defRPr>
     </a:lvl9pPr>
   </p:defaultTextStyle>
+  <p:extLst>
+    <p:ext uri="{EFAFB233-063F-42B5-8137-9DF3F51BA10A}">
+      <p15:sldGuideLst xmlns:p15="http://schemas.microsoft.com/office/powerpoint/2012/main">
+        <p15:guide id="1" orient="horz" pos="2160">
+          <p15:clr>
+            <a:srgbClr val="A4A3A4"/>
+          </p15:clr>
+        </p15:guide>
+        <p15:guide id="2" pos="2880">
+          <p15:clr>
+            <a:srgbClr val="A4A3A4"/>
+          </p15:clr>
+        </p15:guide>
+      </p15:sldGuideLst>
+    </p:ext>
+  </p:extLst>
 </p:presentation>
 </file>
 
 <file path=ppt/notesMasters/notesMaster1.xml><?xml version="1.0" encoding="utf-8"?>
-<p:notesMaster xmlns:a="http://schemas.openxmlformats.org/drawingml/2006/main" xmlns:p="http://schemas.openxmlformats.org/presentationml/2006/main" xmlns:r="http://schemas.openxmlformats.org/officeDocument/2006/relationships">
+<p:notesMaster xmlns:a="http://schemas.openxmlformats.org/drawingml/2006/main" xmlns:r="http://schemas.openxmlformats.org/officeDocument/2006/relationships" xmlns:p="http://schemas.openxmlformats.org/presentationml/2006/main">
   <p:cSld>
     <p:bg>
       <p:bgRef idx="1001">
@@ -143,241 +162,16 @@
           <a:chExt cx="0" cy="0"/>
         </a:xfrm>
       </p:grpSpPr>
-      <p:sp>
-        <p:nvSpPr>
-          <p:cNvPr id="2" name="Header Placeholder 1"/>
-          <p:cNvSpPr>
-            <a:spLocks noGrp="1"/>
-          </p:cNvSpPr>
-          <p:nvPr>
-            <p:ph type="hdr" sz="quarter"/>
-          </p:nvPr>
-        </p:nvSpPr>
-        <p:spPr>
-          <a:xfrm>
-            <a:off x="0" y="0"/>
-            <a:ext cx="2971800" cy="457200"/>
-          </a:xfrm>
-          <a:prstGeom prst="rect">
-            <a:avLst/>
-          </a:prstGeom>
-        </p:spPr>
-        <p:txBody>
-          <a:bodyPr vert="horz" lIns="91440" tIns="45720" rIns="91440" bIns="45720" rtlCol="0"/>
-          <a:lstStyle>
-            <a:lvl1pPr algn="l">
-              <a:defRPr sz="1200"/>
-            </a:lvl1pPr>
-          </a:lstStyle>
-          <a:p>
-            <a:endParaRPr lang="en-US"/>
-          </a:p>
-        </p:txBody>
-      </p:sp>
-      <p:sp>
-        <p:nvSpPr>
-          <p:cNvPr id="3" name="Date Placeholder 2"/>
-          <p:cNvSpPr>
-            <a:spLocks noGrp="1"/>
-          </p:cNvSpPr>
-          <p:nvPr>
-            <p:ph type="dt" idx="1"/>
-          </p:nvPr>
-        </p:nvSpPr>
-        <p:spPr>
-          <a:xfrm>
-            <a:off x="3884613" y="0"/>
-            <a:ext cx="2971800" cy="457200"/>
-          </a:xfrm>
-          <a:prstGeom prst="rect">
-            <a:avLst/>
-          </a:prstGeom>
-        </p:spPr>
-        <p:txBody>
-          <a:bodyPr vert="horz" lIns="91440" tIns="45720" rIns="91440" bIns="45720" rtlCol="0"/>
-          <a:lstStyle>
-            <a:lvl1pPr algn="r">
-              <a:defRPr sz="1200"/>
-            </a:lvl1pPr>
-          </a:lstStyle>
-          <a:p>
-            <a:fld id="{0F89C1C7-3DCD-1040-A9CF-14679D8B5DDD}" type="datetimeFigureOut">
-              <a:rPr lang="en-US" smtClean="0"/>
-              <a:t>10/17/16</a:t>
-            </a:fld>
-            <a:endParaRPr lang="en-US"/>
-          </a:p>
-        </p:txBody>
-      </p:sp>
-      <p:sp>
-        <p:nvSpPr>
-          <p:cNvPr id="4" name="Slide Image Placeholder 3"/>
-          <p:cNvSpPr>
-            <a:spLocks noGrp="1" noRot="1" noChangeAspect="1"/>
-          </p:cNvSpPr>
-          <p:nvPr>
-            <p:ph type="sldImg" idx="2"/>
-          </p:nvPr>
-        </p:nvSpPr>
-        <p:spPr>
-          <a:xfrm>
-            <a:off x="1143000" y="685800"/>
-            <a:ext cx="4572000" cy="3429000"/>
-          </a:xfrm>
-          <a:prstGeom prst="rect">
-            <a:avLst/>
-          </a:prstGeom>
-          <a:noFill/>
-          <a:ln w="12700">
-            <a:solidFill>
-              <a:prstClr val="black"/>
-            </a:solidFill>
-          </a:ln>
-        </p:spPr>
-        <p:txBody>
-          <a:bodyPr vert="horz" lIns="91440" tIns="45720" rIns="91440" bIns="45720" rtlCol="0" anchor="ctr"/>
-          <a:lstStyle/>
-          <a:p>
-            <a:endParaRPr lang="en-US"/>
-          </a:p>
-        </p:txBody>
-      </p:sp>
-      <p:sp>
-        <p:nvSpPr>
-          <p:cNvPr id="5" name="Notes Placeholder 4"/>
-          <p:cNvSpPr>
-            <a:spLocks noGrp="1"/>
-          </p:cNvSpPr>
-          <p:nvPr>
-            <p:ph type="body" sz="quarter" idx="3"/>
-          </p:nvPr>
-        </p:nvSpPr>
-        <p:spPr>
-          <a:xfrm>
-            <a:off x="685800" y="4343400"/>
-            <a:ext cx="5486400" cy="4114800"/>
-          </a:xfrm>
-          <a:prstGeom prst="rect">
-            <a:avLst/>
-          </a:prstGeom>
-        </p:spPr>
-        <p:txBody>
-          <a:bodyPr vert="horz" lIns="91440" tIns="45720" rIns="91440" bIns="45720" rtlCol="0"/>
-          <a:lstStyle/>
-          <a:p>
-            <a:pPr lvl="0"/>
-            <a:r>
-              <a:rPr lang="en-US" smtClean="0"/>
-              <a:t>Click to edit Master text styles</a:t>
-            </a:r>
-          </a:p>
-          <a:p>
-            <a:pPr lvl="1"/>
-            <a:r>
-              <a:rPr lang="en-US" smtClean="0"/>
-              <a:t>Second level</a:t>
-            </a:r>
-          </a:p>
-          <a:p>
-            <a:pPr lvl="2"/>
-            <a:r>
-              <a:rPr lang="en-US" smtClean="0"/>
-              <a:t>Third level</a:t>
-            </a:r>
-          </a:p>
-          <a:p>
-            <a:pPr lvl="3"/>
-            <a:r>
-              <a:rPr lang="en-US" smtClean="0"/>
-              <a:t>Fourth level</a:t>
-            </a:r>
-          </a:p>
-          <a:p>
-            <a:pPr lvl="4"/>
-            <a:r>
-              <a:rPr lang="en-US" smtClean="0"/>
-              <a:t>Fifth level</a:t>
-            </a:r>
-            <a:endParaRPr lang="en-US"/>
-          </a:p>
-        </p:txBody>
-      </p:sp>
-      <p:sp>
-        <p:nvSpPr>
-          <p:cNvPr id="6" name="Footer Placeholder 5"/>
-          <p:cNvSpPr>
-            <a:spLocks noGrp="1"/>
-          </p:cNvSpPr>
-          <p:nvPr>
-            <p:ph type="ftr" sz="quarter" idx="4"/>
-          </p:nvPr>
-        </p:nvSpPr>
-        <p:spPr>
-          <a:xfrm>
-            <a:off x="0" y="8685213"/>
-            <a:ext cx="2971800" cy="457200"/>
-          </a:xfrm>
-          <a:prstGeom prst="rect">
-            <a:avLst/>
-          </a:prstGeom>
-        </p:spPr>
-        <p:txBody>
-          <a:bodyPr vert="horz" lIns="91440" tIns="45720" rIns="91440" bIns="45720" rtlCol="0" anchor="b"/>
-          <a:lstStyle>
-            <a:lvl1pPr algn="l">
-              <a:defRPr sz="1200"/>
-            </a:lvl1pPr>
-          </a:lstStyle>
-          <a:p>
-            <a:endParaRPr lang="en-US"/>
-          </a:p>
-        </p:txBody>
-      </p:sp>
-      <p:sp>
-        <p:nvSpPr>
-          <p:cNvPr id="7" name="Slide Number Placeholder 6"/>
-          <p:cNvSpPr>
-            <a:spLocks noGrp="1"/>
-          </p:cNvSpPr>
-          <p:nvPr>
-            <p:ph type="sldNum" sz="quarter" idx="5"/>
-          </p:nvPr>
-        </p:nvSpPr>
-        <p:spPr>
-          <a:xfrm>
-            <a:off x="3884613" y="8685213"/>
-            <a:ext cx="2971800" cy="457200"/>
-          </a:xfrm>
-          <a:prstGeom prst="rect">
-            <a:avLst/>
-          </a:prstGeom>
-        </p:spPr>
-        <p:txBody>
-          <a:bodyPr vert="horz" lIns="91440" tIns="45720" rIns="91440" bIns="45720" rtlCol="0" anchor="b"/>
-          <a:lstStyle>
-            <a:lvl1pPr algn="r">
-              <a:defRPr sz="1200"/>
-            </a:lvl1pPr>
-          </a:lstStyle>
-          <a:p>
-            <a:fld id="{BB5E49A5-4136-284D-997B-48E1D791AD67}" type="slidenum">
-              <a:rPr lang="en-US" smtClean="0"/>
-              <a:t>‹#›</a:t>
-            </a:fld>
-            <a:endParaRPr lang="en-US"/>
-          </a:p>
-        </p:txBody>
-      </p:sp>
     </p:spTree>
     <p:extLst>
       <p:ext uri="{BB962C8B-B14F-4D97-AF65-F5344CB8AC3E}">
-        <p14:creationId xmlns:p14="http://schemas.microsoft.com/office/powerpoint/2010/main" val="2623252185"/>
+        <p14:creationId xmlns:p14="http://schemas.microsoft.com/office/powerpoint/2010/main" val="2574609336"/>
       </p:ext>
     </p:extLst>
   </p:cSld>
   <p:clrMap bg1="lt1" tx1="dk1" bg2="lt2" tx2="dk2" accent1="accent1" accent2="accent2" accent3="accent3" accent4="accent4" accent5="accent5" accent6="accent6" hlink="hlink" folHlink="folHlink"/>
   <p:notesStyle>
-    <a:lvl1pPr marL="0" algn="l" defTabSz="457200" rtl="0" eaLnBrk="1" latinLnBrk="0" hangingPunct="1">
+    <a:lvl1pPr marL="0" algn="l" defTabSz="914400" rtl="0" eaLnBrk="1" latinLnBrk="0" hangingPunct="1">
       <a:defRPr sz="1200" kern="1200">
         <a:solidFill>
           <a:schemeClr val="tx1"/>
@@ -387,7 +181,7 @@
         <a:cs typeface="+mn-cs"/>
       </a:defRPr>
     </a:lvl1pPr>
-    <a:lvl2pPr marL="457200" algn="l" defTabSz="457200" rtl="0" eaLnBrk="1" latinLnBrk="0" hangingPunct="1">
+    <a:lvl2pPr marL="457200" algn="l" defTabSz="914400" rtl="0" eaLnBrk="1" latinLnBrk="0" hangingPunct="1">
       <a:defRPr sz="1200" kern="1200">
         <a:solidFill>
           <a:schemeClr val="tx1"/>
@@ -397,7 +191,7 @@
         <a:cs typeface="+mn-cs"/>
       </a:defRPr>
     </a:lvl2pPr>
-    <a:lvl3pPr marL="914400" algn="l" defTabSz="457200" rtl="0" eaLnBrk="1" latinLnBrk="0" hangingPunct="1">
+    <a:lvl3pPr marL="914400" algn="l" defTabSz="914400" rtl="0" eaLnBrk="1" latinLnBrk="0" hangingPunct="1">
       <a:defRPr sz="1200" kern="1200">
         <a:solidFill>
           <a:schemeClr val="tx1"/>
@@ -407,7 +201,7 @@
         <a:cs typeface="+mn-cs"/>
       </a:defRPr>
     </a:lvl3pPr>
-    <a:lvl4pPr marL="1371600" algn="l" defTabSz="457200" rtl="0" eaLnBrk="1" latinLnBrk="0" hangingPunct="1">
+    <a:lvl4pPr marL="1371600" algn="l" defTabSz="914400" rtl="0" eaLnBrk="1" latinLnBrk="0" hangingPunct="1">
       <a:defRPr sz="1200" kern="1200">
         <a:solidFill>
           <a:schemeClr val="tx1"/>
@@ -417,7 +211,7 @@
         <a:cs typeface="+mn-cs"/>
       </a:defRPr>
     </a:lvl4pPr>
-    <a:lvl5pPr marL="1828800" algn="l" defTabSz="457200" rtl="0" eaLnBrk="1" latinLnBrk="0" hangingPunct="1">
+    <a:lvl5pPr marL="1828800" algn="l" defTabSz="914400" rtl="0" eaLnBrk="1" latinLnBrk="0" hangingPunct="1">
       <a:defRPr sz="1200" kern="1200">
         <a:solidFill>
           <a:schemeClr val="tx1"/>
@@ -427,7 +221,7 @@
         <a:cs typeface="+mn-cs"/>
       </a:defRPr>
     </a:lvl5pPr>
-    <a:lvl6pPr marL="2286000" algn="l" defTabSz="457200" rtl="0" eaLnBrk="1" latinLnBrk="0" hangingPunct="1">
+    <a:lvl6pPr marL="2286000" algn="l" defTabSz="914400" rtl="0" eaLnBrk="1" latinLnBrk="0" hangingPunct="1">
       <a:defRPr sz="1200" kern="1200">
         <a:solidFill>
           <a:schemeClr val="tx1"/>
@@ -437,7 +231,7 @@
         <a:cs typeface="+mn-cs"/>
       </a:defRPr>
     </a:lvl6pPr>
-    <a:lvl7pPr marL="2743200" algn="l" defTabSz="457200" rtl="0" eaLnBrk="1" latinLnBrk="0" hangingPunct="1">
+    <a:lvl7pPr marL="2743200" algn="l" defTabSz="914400" rtl="0" eaLnBrk="1" latinLnBrk="0" hangingPunct="1">
       <a:defRPr sz="1200" kern="1200">
         <a:solidFill>
           <a:schemeClr val="tx1"/>
@@ -447,7 +241,7 @@
         <a:cs typeface="+mn-cs"/>
       </a:defRPr>
     </a:lvl7pPr>
-    <a:lvl8pPr marL="3200400" algn="l" defTabSz="457200" rtl="0" eaLnBrk="1" latinLnBrk="0" hangingPunct="1">
+    <a:lvl8pPr marL="3200400" algn="l" defTabSz="914400" rtl="0" eaLnBrk="1" latinLnBrk="0" hangingPunct="1">
       <a:defRPr sz="1200" kern="1200">
         <a:solidFill>
           <a:schemeClr val="tx1"/>
@@ -457,7 +251,7 @@
         <a:cs typeface="+mn-cs"/>
       </a:defRPr>
     </a:lvl8pPr>
-    <a:lvl9pPr marL="3657600" algn="l" defTabSz="457200" rtl="0" eaLnBrk="1" latinLnBrk="0" hangingPunct="1">
+    <a:lvl9pPr marL="3657600" algn="l" defTabSz="914400" rtl="0" eaLnBrk="1" latinLnBrk="0" hangingPunct="1">
       <a:defRPr sz="1200" kern="1200">
         <a:solidFill>
           <a:schemeClr val="tx1"/>
@@ -472,7 +266,7 @@
 </file>
 
 <file path=ppt/notesSlides/notesSlide1.xml><?xml version="1.0" encoding="utf-8"?>
-<p:notes xmlns:a="http://schemas.openxmlformats.org/drawingml/2006/main" xmlns:p="http://schemas.openxmlformats.org/presentationml/2006/main" xmlns:r="http://schemas.openxmlformats.org/officeDocument/2006/relationships">
+<p:notes xmlns:a="http://schemas.openxmlformats.org/drawingml/2006/main" xmlns:r="http://schemas.openxmlformats.org/officeDocument/2006/relationships" xmlns:p="http://schemas.openxmlformats.org/presentationml/2006/main">
   <p:cSld>
     <p:spTree>
       <p:nvGrpSpPr>
@@ -492,7 +286,7 @@
         <p:nvSpPr>
           <p:cNvPr id="2" name="Slide Image Placeholder 1"/>
           <p:cNvSpPr>
-            <a:spLocks noGrp="1"/>
+            <a:spLocks noGrp="1" noRot="1" noChangeAspect="1"/>
           </p:cNvSpPr>
           <p:nvPr>
             <p:ph type="sldImg" idx="2"/>
@@ -507,7 +301,7 @@
             <a:spLocks noGrp="1"/>
           </p:cNvSpPr>
           <p:nvPr>
-            <p:ph type="body" idx="3" sz="quarter"/>
+            <p:ph type="body" sz="quarter" idx="3"/>
           </p:nvPr>
         </p:nvSpPr>
         <p:spPr/>
@@ -519,7 +313,9 @@
               <a:t>Good morning, and thank you for the slot.</a:t>
             </a:r>
           </a:p>
-          <a:p/>
+          <a:p>
+            <a:endParaRPr/>
+          </a:p>
           <a:p>
             <a:r>
               <a:t>I am Marvin Hansen, Director of the Center for Dynamic Causality, and I am here for</a:t>
@@ -530,7 +326,9 @@
               <a:t>DeepCausality — an LF AI &amp; Data Sandbox project since September 2023.</a:t>
             </a:r>
           </a:p>
-          <a:p/>
+          <a:p>
+            <a:endParaRPr/>
+          </a:p>
           <a:p>
             <a:r>
               <a:t>I presented here in 2023 with a proposal. I am back with a re-introduction, because</a:t>
@@ -546,7 +344,9 @@
               <a:t>has largely turned over in the meantime.</a:t>
             </a:r>
           </a:p>
-          <a:p/>
+          <a:p>
+            <a:endParaRPr/>
+          </a:p>
           <a:p>
             <a:r>
               <a:t>Twenty minutes, six parts. I will keep the mathematics to one slide and spend the time</a:t>
@@ -566,7 +366,7 @@
             <a:spLocks noGrp="1"/>
           </p:cNvSpPr>
           <p:nvPr>
-            <p:ph type="sldNum" idx="5" sz="quarter"/>
+            <p:ph type="sldNum" sz="quarter" idx="5"/>
           </p:nvPr>
         </p:nvSpPr>
         <p:spPr/>
@@ -580,7 +380,7 @@
 </file>
 
 <file path=ppt/notesSlides/notesSlide10.xml><?xml version="1.0" encoding="utf-8"?>
-<p:notes xmlns:a="http://schemas.openxmlformats.org/drawingml/2006/main" xmlns:p="http://schemas.openxmlformats.org/presentationml/2006/main" xmlns:r="http://schemas.openxmlformats.org/officeDocument/2006/relationships">
+<p:notes xmlns:a="http://schemas.openxmlformats.org/drawingml/2006/main" xmlns:r="http://schemas.openxmlformats.org/officeDocument/2006/relationships" xmlns:p="http://schemas.openxmlformats.org/presentationml/2006/main">
   <p:cSld>
     <p:spTree>
       <p:nvGrpSpPr>
@@ -600,7 +400,7 @@
         <p:nvSpPr>
           <p:cNvPr id="2" name="Slide Image Placeholder 1"/>
           <p:cNvSpPr>
-            <a:spLocks noGrp="1"/>
+            <a:spLocks noGrp="1" noRot="1" noChangeAspect="1"/>
           </p:cNvSpPr>
           <p:nvPr>
             <p:ph type="sldImg" idx="2"/>
@@ -615,7 +415,7 @@
             <a:spLocks noGrp="1"/>
           </p:cNvSpPr>
           <p:nvPr>
-            <p:ph type="body" idx="3" sz="quarter"/>
+            <p:ph type="body" sz="quarter" idx="3"/>
           </p:nvPr>
         </p:nvSpPr>
         <p:spPr/>
@@ -632,7 +432,9 @@
               <a:t>spacetime-agnostic.</a:t>
             </a:r>
           </a:p>
-          <a:p/>
+          <a:p>
+            <a:endParaRPr/>
+          </a:p>
           <a:p>
             <a:r>
               <a:t>A classical causal model factorizes a joint distribution over its graph. A quantum causal</a:t>
@@ -653,7 +455,9 @@
               <a:t>and the model is their product.</a:t>
             </a:r>
           </a:p>
-          <a:p/>
+          <a:p>
+            <a:endParaRPr/>
+          </a:p>
           <a:p>
             <a:r>
               <a:t>The interesting engineering is the first card. Not every product of operators is a legal</a:t>
@@ -684,7 +488,9 @@
               <a:t>failure names the exact offending pair and rolls the graph back.</a:t>
             </a:r>
           </a:p>
-          <a:p/>
+          <a:p>
+            <a:endParaRPr/>
+          </a:p>
           <a:p>
             <a:r>
               <a:t>Second card: the projection lattice carries the Verdict, with Born-rule read-out. So quantum</a:t>
@@ -695,7 +501,9 @@
               <a:t>logic is not sitting beside the causal engine; it is a verdict type inside it.</a:t>
             </a:r>
           </a:p>
-          <a:p/>
+          <a:p>
+            <a:endParaRPr/>
+          </a:p>
           <a:p>
             <a:r>
               <a:t>Third card, and this is a governance point as much as a technical one. There are two</a:t>
@@ -730,7 +538,7 @@
             <a:spLocks noGrp="1"/>
           </p:cNvSpPr>
           <p:nvPr>
-            <p:ph type="sldNum" idx="5" sz="quarter"/>
+            <p:ph type="sldNum" sz="quarter" idx="5"/>
           </p:nvPr>
         </p:nvSpPr>
         <p:spPr/>
@@ -744,7 +552,7 @@
 </file>
 
 <file path=ppt/notesSlides/notesSlide11.xml><?xml version="1.0" encoding="utf-8"?>
-<p:notes xmlns:a="http://schemas.openxmlformats.org/drawingml/2006/main" xmlns:p="http://schemas.openxmlformats.org/presentationml/2006/main" xmlns:r="http://schemas.openxmlformats.org/officeDocument/2006/relationships">
+<p:notes xmlns:a="http://schemas.openxmlformats.org/drawingml/2006/main" xmlns:r="http://schemas.openxmlformats.org/officeDocument/2006/relationships" xmlns:p="http://schemas.openxmlformats.org/presentationml/2006/main">
   <p:cSld>
     <p:spTree>
       <p:nvGrpSpPr>
@@ -764,7 +572,7 @@
         <p:nvSpPr>
           <p:cNvPr id="2" name="Slide Image Placeholder 1"/>
           <p:cNvSpPr>
-            <a:spLocks noGrp="1"/>
+            <a:spLocks noGrp="1" noRot="1" noChangeAspect="1"/>
           </p:cNvSpPr>
           <p:nvPr>
             <p:ph type="sldImg" idx="2"/>
@@ -779,7 +587,7 @@
             <a:spLocks noGrp="1"/>
           </p:cNvSpPr>
           <p:nvPr>
-            <p:ph type="body" idx="3" sz="quarter"/>
+            <p:ph type="body" sz="quarter" idx="3"/>
           </p:nvPr>
         </p:nvSpPr>
         <p:spPr/>
@@ -791,7 +599,9 @@
               <a:t>PLACEHOLDER — content to be written.</a:t>
             </a:r>
           </a:p>
-          <a:p/>
+          <a:p>
+            <a:endParaRPr/>
+          </a:p>
           <a:p>
             <a:r>
               <a:t>Suggested shape when you fill it in, so the slide matches the rest of the deck: one line on</a:t>
@@ -807,7 +617,9 @@
               <a:t>does that a correlational monitor cannot; and one measured number. Keep it to three claims.</a:t>
             </a:r>
           </a:p>
-          <a:p/>
+          <a:p>
+            <a:endParaRPr/>
+          </a:p>
           <a:p>
             <a:r>
               <a:t>Timing: budget roughly 90 seconds here, the longest single block in the deck. If it runs</a:t>
@@ -827,7 +639,7 @@
             <a:spLocks noGrp="1"/>
           </p:cNvSpPr>
           <p:nvPr>
-            <p:ph type="sldNum" idx="5" sz="quarter"/>
+            <p:ph type="sldNum" sz="quarter" idx="5"/>
           </p:nvPr>
         </p:nvSpPr>
         <p:spPr/>
@@ -841,7 +653,7 @@
 </file>
 
 <file path=ppt/notesSlides/notesSlide12.xml><?xml version="1.0" encoding="utf-8"?>
-<p:notes xmlns:a="http://schemas.openxmlformats.org/drawingml/2006/main" xmlns:p="http://schemas.openxmlformats.org/presentationml/2006/main" xmlns:r="http://schemas.openxmlformats.org/officeDocument/2006/relationships">
+<p:notes xmlns:a="http://schemas.openxmlformats.org/drawingml/2006/main" xmlns:r="http://schemas.openxmlformats.org/officeDocument/2006/relationships" xmlns:p="http://schemas.openxmlformats.org/presentationml/2006/main">
   <p:cSld>
     <p:spTree>
       <p:nvGrpSpPr>
@@ -861,7 +673,7 @@
         <p:nvSpPr>
           <p:cNvPr id="2" name="Slide Image Placeholder 1"/>
           <p:cNvSpPr>
-            <a:spLocks noGrp="1"/>
+            <a:spLocks noGrp="1" noRot="1" noChangeAspect="1"/>
           </p:cNvSpPr>
           <p:nvPr>
             <p:ph type="sldImg" idx="2"/>
@@ -876,7 +688,7 @@
             <a:spLocks noGrp="1"/>
           </p:cNvSpPr>
           <p:nvPr>
-            <p:ph type="body" idx="3" sz="quarter"/>
+            <p:ph type="body" sz="quarter" idx="3"/>
           </p:nvPr>
         </p:nvSpPr>
         <p:spPr/>
@@ -888,7 +700,9 @@
               <a:t>This is where I would spend your scepticism, so let me be specific.</a:t>
             </a:r>
           </a:p>
-          <a:p/>
+          <a:p>
+            <a:endParaRPr/>
+          </a:p>
           <a:p>
             <a:r>
               <a:t>183 theorems machine-checked in Lean 4 against Mathlib, on a pinned toolchain. Zero sorry —</a:t>
@@ -904,7 +718,9 @@
               <a:t>checking on the core carrier.</a:t>
             </a:r>
           </a:p>
-          <a:p/>
+          <a:p>
+            <a:endParaRPr/>
+          </a:p>
           <a:p>
             <a:r>
               <a:t>The bridge matters more than the count. There is no tool that turns a Lean proof into a Rust</a:t>
@@ -930,13 +746,17 @@
               <a:t>formalization efforts.</a:t>
             </a:r>
           </a:p>
-          <a:p/>
+          <a:p>
+            <a:endParaRPr/>
+          </a:p>
           <a:p>
             <a:r>
               <a:t>Now the right-hand panel, which is the part I actually want you to notice.</a:t>
             </a:r>
           </a:p>
-          <a:p/>
+          <a:p>
+            <a:endParaRPr/>
+          </a:p>
           <a:p>
             <a:r>
               <a:t>We publish the edges. The Float106 bit-exact error bounds are open — Lean proves the</a:t>
@@ -952,7 +772,9 @@
               <a:t>layer because Mathlib does not carry them.</a:t>
             </a:r>
           </a:p>
-          <a:p/>
+          <a:p>
+            <a:endParaRPr/>
+          </a:p>
           <a:p>
             <a:r>
               <a:t>And the third one: in the quantum layer, the unconditional partial-trace preservation property</a:t>
@@ -973,7 +795,9 @@
               <a:t>result rather than quietly narrowing the claim.</a:t>
             </a:r>
           </a:p>
-          <a:p/>
+          <a:p>
+            <a:endParaRPr/>
+          </a:p>
           <a:p>
             <a:r>
               <a:t>That is the standard I would like the project judged against.</a:t>
@@ -988,7 +812,7 @@
             <a:spLocks noGrp="1"/>
           </p:cNvSpPr>
           <p:nvPr>
-            <p:ph type="sldNum" idx="5" sz="quarter"/>
+            <p:ph type="sldNum" sz="quarter" idx="5"/>
           </p:nvPr>
         </p:nvSpPr>
         <p:spPr/>
@@ -1002,7 +826,7 @@
 </file>
 
 <file path=ppt/notesSlides/notesSlide13.xml><?xml version="1.0" encoding="utf-8"?>
-<p:notes xmlns:a="http://schemas.openxmlformats.org/drawingml/2006/main" xmlns:p="http://schemas.openxmlformats.org/presentationml/2006/main" xmlns:r="http://schemas.openxmlformats.org/officeDocument/2006/relationships">
+<p:notes xmlns:a="http://schemas.openxmlformats.org/drawingml/2006/main" xmlns:r="http://schemas.openxmlformats.org/officeDocument/2006/relationships" xmlns:p="http://schemas.openxmlformats.org/presentationml/2006/main">
   <p:cSld>
     <p:spTree>
       <p:nvGrpSpPr>
@@ -1022,7 +846,7 @@
         <p:nvSpPr>
           <p:cNvPr id="2" name="Slide Image Placeholder 1"/>
           <p:cNvSpPr>
-            <a:spLocks noGrp="1"/>
+            <a:spLocks noGrp="1" noRot="1" noChangeAspect="1"/>
           </p:cNvSpPr>
           <p:nvPr>
             <p:ph type="sldImg" idx="2"/>
@@ -1037,7 +861,7 @@
             <a:spLocks noGrp="1"/>
           </p:cNvSpPr>
           <p:nvPr>
-            <p:ph type="body" idx="3" sz="quarter"/>
+            <p:ph type="body" sz="quarter" idx="3"/>
           </p:nvPr>
         </p:nvSpPr>
         <p:spPr/>
@@ -1049,7 +873,9 @@
               <a:t>Quickly, because numbers are only context.</a:t>
             </a:r>
           </a:p>
-          <a:p/>
+          <a:p>
+            <a:endParaRPr/>
+          </a:p>
           <a:p>
             <a:r>
               <a:t>When I stood here in 2023, the repository held four crates, about twenty thousand lines, and</a:t>
@@ -1070,7 +896,9 @@
               <a:t>tests — so test density held while the codebase grew. That was deliberate.</a:t>
             </a:r>
           </a:p>
-          <a:p/>
+          <a:p>
+            <a:endParaRPr/>
+          </a:p>
           <a:p>
             <a:r>
               <a:t>A hundred and thirteen runnable examples across fourteen domains: avionics, physics, medicine,</a:t>
@@ -1091,7 +919,9 @@
               <a:t>cannot rot.</a:t>
             </a:r>
           </a:p>
-          <a:p/>
+          <a:p>
+            <a:endParaRPr/>
+          </a:p>
           <a:p>
             <a:r>
               <a:t>Twenty-three of twenty-nine crates have no external runtime dependency at all. The six that do</a:t>
@@ -1107,7 +937,9 @@
               <a:t>surface is a feature, not an accident.</a:t>
             </a:r>
           </a:p>
-          <a:p/>
+          <a:p>
+            <a:endParaRPr/>
+          </a:p>
           <a:p>
             <a:r>
               <a:t>And unsafe is forbidden repo-wide by a workspace lint. Three crates are exempt; each exemption</a:t>
@@ -1132,7 +964,7 @@
             <a:spLocks noGrp="1"/>
           </p:cNvSpPr>
           <p:nvPr>
-            <p:ph type="sldNum" idx="5" sz="quarter"/>
+            <p:ph type="sldNum" sz="quarter" idx="5"/>
           </p:nvPr>
         </p:nvSpPr>
         <p:spPr/>
@@ -1146,7 +978,7 @@
 </file>
 
 <file path=ppt/notesSlides/notesSlide14.xml><?xml version="1.0" encoding="utf-8"?>
-<p:notes xmlns:a="http://schemas.openxmlformats.org/drawingml/2006/main" xmlns:p="http://schemas.openxmlformats.org/presentationml/2006/main" xmlns:r="http://schemas.openxmlformats.org/officeDocument/2006/relationships">
+<p:notes xmlns:a="http://schemas.openxmlformats.org/drawingml/2006/main" xmlns:r="http://schemas.openxmlformats.org/officeDocument/2006/relationships" xmlns:p="http://schemas.openxmlformats.org/presentationml/2006/main">
   <p:cSld>
     <p:spTree>
       <p:nvGrpSpPr>
@@ -1166,7 +998,7 @@
         <p:nvSpPr>
           <p:cNvPr id="2" name="Slide Image Placeholder 1"/>
           <p:cNvSpPr>
-            <a:spLocks noGrp="1"/>
+            <a:spLocks noGrp="1" noRot="1" noChangeAspect="1"/>
           </p:cNvSpPr>
           <p:nvPr>
             <p:ph type="sldImg" idx="2"/>
@@ -1181,7 +1013,7 @@
             <a:spLocks noGrp="1"/>
           </p:cNvSpPr>
           <p:nvPr>
-            <p:ph type="body" idx="3" sz="quarter"/>
+            <p:ph type="body" sz="quarter" idx="3"/>
           </p:nvPr>
         </p:nvSpPr>
         <p:spPr/>
@@ -1193,7 +1025,9 @@
               <a:t>Briefly, on how the project is actually run.</a:t>
             </a:r>
           </a:p>
-          <a:p/>
+          <a:p>
+            <a:endParaRPr/>
+          </a:p>
           <a:p>
             <a:r>
               <a:t>Sandbox project at LF AI &amp; Data since September 2023. MIT licensed across every crate — no</a:t>
@@ -1214,7 +1048,9 @@
               <a:t>meaningful, and coverage and lint gates on every pull request.</a:t>
             </a:r>
           </a:p>
-          <a:p/>
+          <a:p>
+            <a:endParaRPr/>
+          </a:p>
           <a:p>
             <a:r>
               <a:t>The bar at the bottom is the part I would point at if you are assessing maturity. Releases are</a:t>
@@ -1235,7 +1071,9 @@
               <a:t>theorem id has lost its Rust witness, or the reverse — so the proof layer cannot quietly rot.</a:t>
             </a:r>
           </a:p>
-          <a:p/>
+          <a:p>
+            <a:endParaRPr/>
+          </a:p>
           <a:p>
             <a:r>
               <a:t>There is also a written policy for AI coding assistants in the repository, which is not yet</a:t>
@@ -1251,13 +1089,17 @@
               <a:t>in other projects.</a:t>
             </a:r>
           </a:p>
-          <a:p/>
+          <a:p>
+            <a:endParaRPr/>
+          </a:p>
           <a:p>
             <a:r>
               <a:t>Community runs through Discord, GitHub Discussions, and the LF mailing lists.</a:t>
             </a:r>
           </a:p>
-          <a:p/>
+          <a:p>
+            <a:endParaRPr/>
+          </a:p>
           <a:p>
             <a:r>
               <a:t>Two sponsors. JetBrains provides all-product licences to core maintainers, and has renewed</a:t>
@@ -1292,7 +1134,7 @@
             <a:spLocks noGrp="1"/>
           </p:cNvSpPr>
           <p:nvPr>
-            <p:ph type="sldNum" idx="5" sz="quarter"/>
+            <p:ph type="sldNum" sz="quarter" idx="5"/>
           </p:nvPr>
         </p:nvSpPr>
         <p:spPr/>
@@ -1306,7 +1148,7 @@
 </file>
 
 <file path=ppt/notesSlides/notesSlide15.xml><?xml version="1.0" encoding="utf-8"?>
-<p:notes xmlns:a="http://schemas.openxmlformats.org/drawingml/2006/main" xmlns:p="http://schemas.openxmlformats.org/presentationml/2006/main" xmlns:r="http://schemas.openxmlformats.org/officeDocument/2006/relationships">
+<p:notes xmlns:a="http://schemas.openxmlformats.org/drawingml/2006/main" xmlns:r="http://schemas.openxmlformats.org/officeDocument/2006/relationships" xmlns:p="http://schemas.openxmlformats.org/presentationml/2006/main">
   <p:cSld>
     <p:spTree>
       <p:nvGrpSpPr>
@@ -1326,7 +1168,7 @@
         <p:nvSpPr>
           <p:cNvPr id="2" name="Slide Image Placeholder 1"/>
           <p:cNvSpPr>
-            <a:spLocks noGrp="1"/>
+            <a:spLocks noGrp="1" noRot="1" noChangeAspect="1"/>
           </p:cNvSpPr>
           <p:nvPr>
             <p:ph type="sldImg" idx="2"/>
@@ -1341,7 +1183,7 @@
             <a:spLocks noGrp="1"/>
           </p:cNvSpPr>
           <p:nvPr>
-            <p:ph type="body" idx="3" sz="quarter"/>
+            <p:ph type="body" sz="quarter" idx="3"/>
           </p:nvPr>
         </p:nvSpPr>
         <p:spPr/>
@@ -1353,7 +1195,9 @@
               <a:t>Three places where help would compound, and then I will stop.</a:t>
             </a:r>
           </a:p>
-          <a:p/>
+          <a:p>
+            <a:endParaRPr/>
+          </a:p>
           <a:p>
             <a:r>
               <a:t>First, domain partners. The stack is strongest where a regulated domain needs an audit trail —</a:t>
@@ -1369,7 +1213,9 @@
               <a:t>teaches us more than another benchmark does.</a:t>
             </a:r>
           </a:p>
-          <a:p/>
+          <a:p>
+            <a:endParaRPr/>
+          </a:p>
           <a:p>
             <a:r>
               <a:t>Second, adjacent LF projects. The propagating effect is a natural seam for anything that already</a:t>
@@ -1390,7 +1236,9 @@
               <a:t>design document.</a:t>
             </a:r>
           </a:p>
-          <a:p/>
+          <a:p>
+            <a:endParaRPr/>
+          </a:p>
           <a:p>
             <a:r>
               <a:t>Third, reviewers and provers. The Lean layer publishes its open edges deliberately. Extending</a:t>
@@ -1411,7 +1259,9 @@
               <a:t>that.</a:t>
             </a:r>
           </a:p>
-          <a:p/>
+          <a:p>
+            <a:endParaRPr/>
+          </a:p>
           <a:p>
             <a:r>
               <a:t>Thank you. Happy to take questions, and happy to go deeper on any slide.</a:t>
@@ -1426,7 +1276,7 @@
             <a:spLocks noGrp="1"/>
           </p:cNvSpPr>
           <p:nvPr>
-            <p:ph type="sldNum" idx="5" sz="quarter"/>
+            <p:ph type="sldNum" sz="quarter" idx="5"/>
           </p:nvPr>
         </p:nvSpPr>
         <p:spPr/>
@@ -1440,7 +1290,7 @@
 </file>
 
 <file path=ppt/notesSlides/notesSlide2.xml><?xml version="1.0" encoding="utf-8"?>
-<p:notes xmlns:a="http://schemas.openxmlformats.org/drawingml/2006/main" xmlns:p="http://schemas.openxmlformats.org/presentationml/2006/main" xmlns:r="http://schemas.openxmlformats.org/officeDocument/2006/relationships">
+<p:notes xmlns:a="http://schemas.openxmlformats.org/drawingml/2006/main" xmlns:r="http://schemas.openxmlformats.org/officeDocument/2006/relationships" xmlns:p="http://schemas.openxmlformats.org/presentationml/2006/main">
   <p:cSld>
     <p:spTree>
       <p:nvGrpSpPr>
@@ -1460,7 +1310,7 @@
         <p:nvSpPr>
           <p:cNvPr id="2" name="Slide Image Placeholder 1"/>
           <p:cNvSpPr>
-            <a:spLocks noGrp="1"/>
+            <a:spLocks noGrp="1" noRot="1" noChangeAspect="1"/>
           </p:cNvSpPr>
           <p:nvPr>
             <p:ph type="sldImg" idx="2"/>
@@ -1475,7 +1325,7 @@
             <a:spLocks noGrp="1"/>
           </p:cNvSpPr>
           <p:nvPr>
-            <p:ph type="body" idx="3" sz="quarter"/>
+            <p:ph type="body" sz="quarter" idx="3"/>
           </p:nvPr>
         </p:nvSpPr>
         <p:spPr/>
@@ -1487,7 +1337,9 @@
               <a:t>Six parts.</a:t>
             </a:r>
           </a:p>
-          <a:p/>
+          <a:p>
+            <a:endParaRPr/>
+          </a:p>
           <a:p>
             <a:r>
               <a:t>First the premise — one slide on why we did not simply build another causal-graph</a:t>
@@ -1508,7 +1360,9 @@
               <a:t>production action.</a:t>
             </a:r>
           </a:p>
-          <a:p/>
+          <a:p>
+            <a:endParaRPr/>
+          </a:p>
           <a:p>
             <a:r>
               <a:t>Then two downstream projects built on that stack, which are in my view the proof that</a:t>
@@ -1519,13 +1373,17 @@
               <a:t>the substrate generalizes: counterfactual fluid dynamics, and quantum causal models.</a:t>
             </a:r>
           </a:p>
-          <a:p/>
+          <a:p>
+            <a:endParaRPr/>
+          </a:p>
           <a:p>
             <a:r>
               <a:t>Then a case study, and finally project health and where we could use help.</a:t>
             </a:r>
           </a:p>
-          <a:p/>
+          <a:p>
+            <a:endParaRPr/>
+          </a:p>
           <a:p>
             <a:r>
               <a:t>Roughly a minute per slide. Stop me at any point.</a:t>
@@ -1540,7 +1398,7 @@
             <a:spLocks noGrp="1"/>
           </p:cNvSpPr>
           <p:nvPr>
-            <p:ph type="sldNum" idx="5" sz="quarter"/>
+            <p:ph type="sldNum" sz="quarter" idx="5"/>
           </p:nvPr>
         </p:nvSpPr>
         <p:spPr/>
@@ -1554,7 +1412,7 @@
 </file>
 
 <file path=ppt/notesSlides/notesSlide3.xml><?xml version="1.0" encoding="utf-8"?>
-<p:notes xmlns:a="http://schemas.openxmlformats.org/drawingml/2006/main" xmlns:p="http://schemas.openxmlformats.org/presentationml/2006/main" xmlns:r="http://schemas.openxmlformats.org/officeDocument/2006/relationships">
+<p:notes xmlns:a="http://schemas.openxmlformats.org/drawingml/2006/main" xmlns:r="http://schemas.openxmlformats.org/officeDocument/2006/relationships" xmlns:p="http://schemas.openxmlformats.org/presentationml/2006/main">
   <p:cSld>
     <p:spTree>
       <p:nvGrpSpPr>
@@ -1574,7 +1432,7 @@
         <p:nvSpPr>
           <p:cNvPr id="2" name="Slide Image Placeholder 1"/>
           <p:cNvSpPr>
-            <a:spLocks noGrp="1"/>
+            <a:spLocks noGrp="1" noRot="1" noChangeAspect="1"/>
           </p:cNvSpPr>
           <p:nvPr>
             <p:ph type="sldImg" idx="2"/>
@@ -1589,7 +1447,7 @@
             <a:spLocks noGrp="1"/>
           </p:cNvSpPr>
           <p:nvPr>
-            <p:ph type="body" idx="3" sz="quarter"/>
+            <p:ph type="body" sz="quarter" idx="3"/>
           </p:nvPr>
         </p:nvSpPr>
         <p:spPr/>
@@ -1601,7 +1459,9 @@
               <a:t>This is the slide the project rests on, so I will spend a full minute here.</a:t>
             </a:r>
           </a:p>
-          <a:p/>
+          <a:p>
+            <a:endParaRPr/>
+          </a:p>
           <a:p>
             <a:r>
               <a:t>Classical computational causality traces its definition of cause back to Seneca — two</a:t>
@@ -1627,7 +1487,9 @@
               <a:t>time, and that the causal structure is enumerated up front.</a:t>
             </a:r>
           </a:p>
-          <a:p/>
+          <a:p>
+            <a:endParaRPr/>
+          </a:p>
           <a:p>
             <a:r>
               <a:t>That is not a flaw. It is a scope. And contemporary science has already moved outside</a:t>
@@ -1648,7 +1510,9 @@
               <a:t>changes its own causal rules mid-flight.</a:t>
             </a:r>
           </a:p>
-          <a:p/>
+          <a:p>
+            <a:endParaRPr/>
+          </a:p>
           <a:p>
             <a:r>
               <a:t>So we change the starting point. We root the project in Whitehead's process philosophy —</a:t>
@@ -1664,7 +1528,9 @@
               <a:t>a frame the model assumes.</a:t>
             </a:r>
           </a:p>
-          <a:p/>
+          <a:p>
+            <a:endParaRPr/>
+          </a:p>
           <a:p>
             <a:r>
               <a:t>The consequence is on the right: rules may evolve at runtime, structure may emerge, and</a:t>
@@ -1689,7 +1555,7 @@
             <a:spLocks noGrp="1"/>
           </p:cNvSpPr>
           <p:nvPr>
-            <p:ph type="sldNum" idx="5" sz="quarter"/>
+            <p:ph type="sldNum" sz="quarter" idx="5"/>
           </p:nvPr>
         </p:nvSpPr>
         <p:spPr/>
@@ -1703,7 +1569,7 @@
 </file>
 
 <file path=ppt/notesSlides/notesSlide4.xml><?xml version="1.0" encoding="utf-8"?>
-<p:notes xmlns:a="http://schemas.openxmlformats.org/drawingml/2006/main" xmlns:p="http://schemas.openxmlformats.org/presentationml/2006/main" xmlns:r="http://schemas.openxmlformats.org/officeDocument/2006/relationships">
+<p:notes xmlns:a="http://schemas.openxmlformats.org/drawingml/2006/main" xmlns:r="http://schemas.openxmlformats.org/officeDocument/2006/relationships" xmlns:p="http://schemas.openxmlformats.org/presentationml/2006/main">
   <p:cSld>
     <p:spTree>
       <p:nvGrpSpPr>
@@ -1723,7 +1589,7 @@
         <p:nvSpPr>
           <p:cNvPr id="2" name="Slide Image Placeholder 1"/>
           <p:cNvSpPr>
-            <a:spLocks noGrp="1"/>
+            <a:spLocks noGrp="1" noRot="1" noChangeAspect="1"/>
           </p:cNvSpPr>
           <p:nvPr>
             <p:ph type="sldImg" idx="2"/>
@@ -1738,7 +1604,7 @@
             <a:spLocks noGrp="1"/>
           </p:cNvSpPr>
           <p:nvPr>
-            <p:ph type="body" idx="3" sz="quarter"/>
+            <p:ph type="body" sz="quarter" idx="3"/>
           </p:nvPr>
         </p:nvSpPr>
         <p:spPr/>
@@ -1750,7 +1616,9 @@
               <a:t>Here is the whole premise in one line: m-two equals m-one bind f.</a:t>
             </a:r>
           </a:p>
-          <a:p/>
+          <a:p>
+            <a:endParaRPr/>
+          </a:p>
           <a:p>
             <a:r>
               <a:t>Read it as: dynamic causality is the spacetime-agnostic monadic process in which one</a:t>
@@ -1766,13 +1634,17 @@
               <a:t>monad.</a:t>
             </a:r>
           </a:p>
-          <a:p/>
+          <a:p>
+            <a:endParaRPr/>
+          </a:p>
           <a:p>
             <a:r>
               <a:t>Four things are packed in there.</a:t>
             </a:r>
           </a:p>
-          <a:p/>
+          <a:p>
+            <a:endParaRPr/>
+          </a:p>
           <a:p>
             <a:r>
               <a:t>Monadic process — the carrier is an arity-five record: value, state, context, error, and</a:t>
@@ -1793,7 +1665,9 @@
               <a:t>to log.</a:t>
             </a:r>
           </a:p>
-          <a:p/>
+          <a:p>
+            <a:endParaRPr/>
+          </a:p>
           <a:p>
             <a:r>
               <a:t>Functional dependency — each effect comes from the previous one by applying a causal</a:t>
@@ -1804,13 +1678,17 @@
               <a:t>function. Chain those and you get effect propagation.</a:t>
             </a:r>
           </a:p>
-          <a:p/>
+          <a:p>
+            <a:endParaRPr/>
+          </a:p>
           <a:p>
             <a:r>
               <a:t>Spacetime-agnostic — time and space are not in the relation. They are inputs.</a:t>
             </a:r>
           </a:p>
-          <a:p/>
+          <a:p>
+            <a:endParaRPr/>
+          </a:p>
           <a:p>
             <a:r>
               <a:t>And because they are not built in, anything time-like or space-like has to live somewhere</a:t>
@@ -1826,7 +1704,9 @@
               <a:t>Euclidean space, in Minkowski spacetime, or in a non-Euclidean context.</a:t>
             </a:r>
           </a:p>
-          <a:p/>
+          <a:p>
+            <a:endParaRPr/>
+          </a:p>
           <a:p>
             <a:r>
               <a:t>The intuition, if you want one: a ripple in a pond. One ripple is an effect, it</a:t>
@@ -1851,7 +1731,7 @@
             <a:spLocks noGrp="1"/>
           </p:cNvSpPr>
           <p:nvPr>
-            <p:ph type="sldNum" idx="5" sz="quarter"/>
+            <p:ph type="sldNum" sz="quarter" idx="5"/>
           </p:nvPr>
         </p:nvSpPr>
         <p:spPr/>
@@ -1865,7 +1745,7 @@
 </file>
 
 <file path=ppt/notesSlides/notesSlide5.xml><?xml version="1.0" encoding="utf-8"?>
-<p:notes xmlns:a="http://schemas.openxmlformats.org/drawingml/2006/main" xmlns:p="http://schemas.openxmlformats.org/presentationml/2006/main" xmlns:r="http://schemas.openxmlformats.org/officeDocument/2006/relationships">
+<p:notes xmlns:a="http://schemas.openxmlformats.org/drawingml/2006/main" xmlns:r="http://schemas.openxmlformats.org/officeDocument/2006/relationships" xmlns:p="http://schemas.openxmlformats.org/presentationml/2006/main">
   <p:cSld>
     <p:spTree>
       <p:nvGrpSpPr>
@@ -1885,7 +1765,7 @@
         <p:nvSpPr>
           <p:cNvPr id="2" name="Slide Image Placeholder 1"/>
           <p:cNvSpPr>
-            <a:spLocks noGrp="1"/>
+            <a:spLocks noGrp="1" noRot="1" noChangeAspect="1"/>
           </p:cNvSpPr>
           <p:nvPr>
             <p:ph type="sldImg" idx="2"/>
@@ -1900,7 +1780,7 @@
             <a:spLocks noGrp="1"/>
           </p:cNvSpPr>
           <p:nvPr>
-            <p:ph type="body" idx="3" sz="quarter"/>
+            <p:ph type="body" sz="quarter" idx="3"/>
           </p:nvPr>
         </p:nvSpPr>
         <p:spPr/>
@@ -1912,7 +1792,9 @@
               <a:t>Two consequences, and the second is the one I would defend hardest.</a:t>
             </a:r>
           </a:p>
-          <a:p/>
+          <a:p>
+            <a:endParaRPr/>
+          </a:p>
           <a:p>
             <a:r>
               <a:t>First: because the axiom sits low enough in the stack, we did not have to replace</a:t>
@@ -1938,7 +1820,9 @@
               <a:t>classical-causality examples folder, so you can read the code.</a:t>
             </a:r>
           </a:p>
-          <a:p/>
+          <a:p>
+            <a:endParaRPr/>
+          </a:p>
           <a:p>
             <a:r>
               <a:t>Second: it adds three modalities a fixed-structure framework cannot express. Dynamic —</a:t>
@@ -1954,7 +1838,9 @@
               <a:t>structure that was not enumerable at design time.</a:t>
             </a:r>
           </a:p>
-          <a:p/>
+          <a:p>
+            <a:endParaRPr/>
+          </a:p>
           <a:p>
             <a:r>
               <a:t>Now the honest objection: if structure can emerge at runtime, you cannot statically</a:t>
@@ -1965,7 +1851,9 @@
               <a:t>verify the reasoning any more. That is true, and we do not pretend otherwise.</a:t>
             </a:r>
           </a:p>
-          <a:p/>
+          <a:p>
+            <a:endParaRPr/>
+          </a:p>
           <a:p>
             <a:r>
               <a:t>Our answer is the line at the bottom. Reasoning is free to be emergent; actions are not.</a:t>
@@ -1995,7 +1883,7 @@
             <a:spLocks noGrp="1"/>
           </p:cNvSpPr>
           <p:nvPr>
-            <p:ph type="sldNum" idx="5" sz="quarter"/>
+            <p:ph type="sldNum" sz="quarter" idx="5"/>
           </p:nvPr>
         </p:nvSpPr>
         <p:spPr/>
@@ -2009,7 +1897,7 @@
 </file>
 
 <file path=ppt/notesSlides/notesSlide6.xml><?xml version="1.0" encoding="utf-8"?>
-<p:notes xmlns:a="http://schemas.openxmlformats.org/drawingml/2006/main" xmlns:p="http://schemas.openxmlformats.org/presentationml/2006/main" xmlns:r="http://schemas.openxmlformats.org/officeDocument/2006/relationships">
+<p:notes xmlns:a="http://schemas.openxmlformats.org/drawingml/2006/main" xmlns:r="http://schemas.openxmlformats.org/officeDocument/2006/relationships" xmlns:p="http://schemas.openxmlformats.org/presentationml/2006/main">
   <p:cSld>
     <p:spTree>
       <p:nvGrpSpPr>
@@ -2029,7 +1917,7 @@
         <p:nvSpPr>
           <p:cNvPr id="2" name="Slide Image Placeholder 1"/>
           <p:cNvSpPr>
-            <a:spLocks noGrp="1"/>
+            <a:spLocks noGrp="1" noRot="1" noChangeAspect="1"/>
           </p:cNvSpPr>
           <p:nvPr>
             <p:ph type="sldImg" idx="2"/>
@@ -2044,7 +1932,7 @@
             <a:spLocks noGrp="1"/>
           </p:cNvSpPr>
           <p:nvPr>
-            <p:ph type="body" idx="3" sz="quarter"/>
+            <p:ph type="body" sz="quarter" idx="3"/>
           </p:nvPr>
         </p:nvSpPr>
         <p:spPr/>
@@ -2056,7 +1944,9 @@
               <a:t>Three primitives operationalize the axiom, plus an optional fourth for safety.</a:t>
             </a:r>
           </a:p>
-          <a:p/>
+          <a:p>
+            <a:endParaRPr/>
+          </a:p>
           <a:p>
             <a:r>
               <a:t>On the left, two reasoning primitives. The Causaloid carries causal structure, and it is</a:t>
@@ -2082,7 +1972,9 @@
               <a:t>mid-chain.</a:t>
             </a:r>
           </a:p>
-          <a:p/>
+          <a:p>
+            <a:endParaRPr/>
+          </a:p>
           <a:p>
             <a:r>
               <a:t>The important part is the middle. Both emit the same carrier. So you can take a</a:t>
@@ -2103,7 +1995,9 @@
               <a:t>problem moves. You do not pick a framework and then glue.</a:t>
             </a:r>
           </a:p>
-          <a:p/>
+          <a:p>
+            <a:endParaRPr/>
+          </a:p>
           <a:p>
             <a:r>
               <a:t>The Causal State Machine is the bridge to the outside world. Its active state space is</a:t>
@@ -2119,7 +2013,9 @@
               <a:t>how it avoids the classical finite-state-machine limitation.</a:t>
             </a:r>
           </a:p>
-          <a:p/>
+          <a:p>
+            <a:endParaRPr/>
+          </a:p>
           <a:p>
             <a:r>
               <a:t>Then the Effect Ethos. Every action the CSM proposes gets intercepted and evaluated</a:t>
@@ -2145,7 +2041,9 @@
               <a:t>produced it. That is what an auditor reads afterwards.</a:t>
             </a:r>
           </a:p>
-          <a:p/>
+          <a:p>
+            <a:endParaRPr/>
+          </a:p>
           <a:p>
             <a:r>
               <a:t>Underneath everything: the Context. Because spacetime is not built into the relation, it</a:t>
@@ -2170,7 +2068,7 @@
             <a:spLocks noGrp="1"/>
           </p:cNvSpPr>
           <p:nvPr>
-            <p:ph type="sldNum" idx="5" sz="quarter"/>
+            <p:ph type="sldNum" sz="quarter" idx="5"/>
           </p:nvPr>
         </p:nvSpPr>
         <p:spPr/>
@@ -2184,7 +2082,7 @@
 </file>
 
 <file path=ppt/notesSlides/notesSlide7.xml><?xml version="1.0" encoding="utf-8"?>
-<p:notes xmlns:a="http://schemas.openxmlformats.org/drawingml/2006/main" xmlns:p="http://schemas.openxmlformats.org/presentationml/2006/main" xmlns:r="http://schemas.openxmlformats.org/officeDocument/2006/relationships">
+<p:notes xmlns:a="http://schemas.openxmlformats.org/drawingml/2006/main" xmlns:r="http://schemas.openxmlformats.org/officeDocument/2006/relationships" xmlns:p="http://schemas.openxmlformats.org/presentationml/2006/main">
   <p:cSld>
     <p:spTree>
       <p:nvGrpSpPr>
@@ -2204,7 +2102,7 @@
         <p:nvSpPr>
           <p:cNvPr id="2" name="Slide Image Placeholder 1"/>
           <p:cNvSpPr>
-            <a:spLocks noGrp="1"/>
+            <a:spLocks noGrp="1" noRot="1" noChangeAspect="1"/>
           </p:cNvSpPr>
           <p:nvPr>
             <p:ph type="sldImg" idx="2"/>
@@ -2219,7 +2117,7 @@
             <a:spLocks noGrp="1"/>
           </p:cNvSpPr>
           <p:nvPr>
-            <p:ph type="body" idx="3" sz="quarter"/>
+            <p:ph type="body" sz="quarter" idx="3"/>
           </p:nvPr>
         </p:nvSpPr>
         <p:spPr/>
@@ -2231,7 +2129,9 @@
               <a:t>One slide on the mathematics, as promised, then straight back to the product.</a:t>
             </a:r>
           </a:p>
-          <a:p/>
+          <a:p>
+            <a:endParaRPr/>
+          </a:p>
           <a:p>
             <a:r>
               <a:t>Most scientific computing stacks make you bridge silos. One library for tensors, another</a:t>
@@ -2247,7 +2147,9 @@
               <a:t>on adapters than on the problem.</a:t>
             </a:r>
           </a:p>
-          <a:p/>
+          <a:p>
+            <a:endParaRPr/>
+          </a:p>
           <a:p>
             <a:r>
               <a:t>Here every layer implements the same categorical surface. A tensor is a functor. A</a:t>
@@ -2273,7 +2175,9 @@
               <a:t>boxing and no virtual calls.</a:t>
             </a:r>
           </a:p>
-          <a:p/>
+          <a:p>
+            <a:endParaRPr/>
+          </a:p>
           <a:p>
             <a:r>
               <a:t>Two payoffs. First, a single bind chain can step from general relativity through geometric</a:t>
@@ -2284,7 +2188,9 @@
               <a:t>algebra onto topology and finish in causal logic. The GRMHD example does exactly that.</a:t>
             </a:r>
           </a:p>
-          <a:p/>
+          <a:p>
+            <a:endParaRPr/>
+          </a:p>
           <a:p>
             <a:r>
               <a:t>Second, precision becomes one type alias for the entire pipeline. Change one line and the</a:t>
@@ -2300,7 +2206,9 @@
               <a:t>times faster than IEEE binary128.</a:t>
             </a:r>
           </a:p>
-          <a:p/>
+          <a:p>
+            <a:endParaRPr/>
+          </a:p>
           <a:p>
             <a:r>
               <a:t>That is the mathematics. Moving on.</a:t>
@@ -2315,7 +2223,7 @@
             <a:spLocks noGrp="1"/>
           </p:cNvSpPr>
           <p:nvPr>
-            <p:ph type="sldNum" idx="5" sz="quarter"/>
+            <p:ph type="sldNum" sz="quarter" idx="5"/>
           </p:nvPr>
         </p:nvSpPr>
         <p:spPr/>
@@ -2329,7 +2237,7 @@
 </file>
 
 <file path=ppt/notesSlides/notesSlide8.xml><?xml version="1.0" encoding="utf-8"?>
-<p:notes xmlns:a="http://schemas.openxmlformats.org/drawingml/2006/main" xmlns:p="http://schemas.openxmlformats.org/presentationml/2006/main" xmlns:r="http://schemas.openxmlformats.org/officeDocument/2006/relationships">
+<p:notes xmlns:a="http://schemas.openxmlformats.org/drawingml/2006/main" xmlns:r="http://schemas.openxmlformats.org/officeDocument/2006/relationships" xmlns:p="http://schemas.openxmlformats.org/presentationml/2006/main">
   <p:cSld>
     <p:spTree>
       <p:nvGrpSpPr>
@@ -2349,7 +2257,7 @@
         <p:nvSpPr>
           <p:cNvPr id="2" name="Slide Image Placeholder 1"/>
           <p:cNvSpPr>
-            <a:spLocks noGrp="1"/>
+            <a:spLocks noGrp="1" noRot="1" noChangeAspect="1"/>
           </p:cNvSpPr>
           <p:nvPr>
             <p:ph type="sldImg" idx="2"/>
@@ -2364,7 +2272,7 @@
             <a:spLocks noGrp="1"/>
           </p:cNvSpPr>
           <p:nvPr>
-            <p:ph type="body" idx="3" sz="quarter"/>
+            <p:ph type="body" sz="quarter" idx="3"/>
           </p:nvPr>
         </p:nvSpPr>
         <p:spPr/>
@@ -2376,7 +2284,9 @@
               <a:t>This is the slide I would ask you to remember.</a:t>
             </a:r>
           </a:p>
-          <a:p/>
+          <a:p>
+            <a:endParaRPr/>
+          </a:p>
           <a:p>
             <a:r>
               <a:t>Read it top to bottom. Discover: the Causal Discovery Language is a typestate builder DSL</a:t>
@@ -2397,25 +2307,33 @@
               <a:t>ranks the root cause of a regime shift.</a:t>
             </a:r>
           </a:p>
-          <a:p/>
+          <a:p>
+            <a:endParaRPr/>
+          </a:p>
           <a:p>
             <a:r>
               <a:t>Model: that structure becomes a Causaloid with an explicit Context.</a:t>
             </a:r>
           </a:p>
-          <a:p/>
+          <a:p>
+            <a:endParaRPr/>
+          </a:p>
           <a:p>
             <a:r>
               <a:t>Act: the Causal State Machine turns a verdict into a proposed action.</a:t>
             </a:r>
           </a:p>
-          <a:p/>
+          <a:p>
+            <a:endParaRPr/>
+          </a:p>
           <a:p>
             <a:r>
               <a:t>Govern: the Effect Ethos decides whether that action is permissible.</a:t>
             </a:r>
           </a:p>
-          <a:p/>
+          <a:p>
+            <a:endParaRPr/>
+          </a:p>
           <a:p>
             <a:r>
               <a:t>Run: the whole thing is thread-safe by construction, so deployment is embedding the model</a:t>
@@ -2426,7 +2344,9 @@
               <a:t>in an ordinary async request handler.</a:t>
             </a:r>
           </a:p>
-          <a:p/>
+          <a:p>
+            <a:endParaRPr/>
+          </a:p>
           <a:p>
             <a:r>
               <a:t>Two things make this one stack rather than five tools with a pipeline between them. First,</a:t>
@@ -2452,7 +2372,9 @@
               <a:t>step.</a:t>
             </a:r>
           </a:p>
-          <a:p/>
+          <a:p>
+            <a:endParaRPr/>
+          </a:p>
           <a:p>
             <a:r>
               <a:t>And you are not obliged to use all of it. You can enter at any layer and leave at any layer.</a:t>
@@ -2472,7 +2394,7 @@
             <a:spLocks noGrp="1"/>
           </p:cNvSpPr>
           <p:nvPr>
-            <p:ph type="sldNum" idx="5" sz="quarter"/>
+            <p:ph type="sldNum" sz="quarter" idx="5"/>
           </p:nvPr>
         </p:nvSpPr>
         <p:spPr/>
@@ -2486,7 +2408,7 @@
 </file>
 
 <file path=ppt/notesSlides/notesSlide9.xml><?xml version="1.0" encoding="utf-8"?>
-<p:notes xmlns:a="http://schemas.openxmlformats.org/drawingml/2006/main" xmlns:p="http://schemas.openxmlformats.org/presentationml/2006/main" xmlns:r="http://schemas.openxmlformats.org/officeDocument/2006/relationships">
+<p:notes xmlns:a="http://schemas.openxmlformats.org/drawingml/2006/main" xmlns:r="http://schemas.openxmlformats.org/officeDocument/2006/relationships" xmlns:p="http://schemas.openxmlformats.org/presentationml/2006/main">
   <p:cSld>
     <p:spTree>
       <p:nvGrpSpPr>
@@ -2506,7 +2428,7 @@
         <p:nvSpPr>
           <p:cNvPr id="2" name="Slide Image Placeholder 1"/>
           <p:cNvSpPr>
-            <a:spLocks noGrp="1"/>
+            <a:spLocks noGrp="1" noRot="1" noChangeAspect="1"/>
           </p:cNvSpPr>
           <p:nvPr>
             <p:ph type="sldImg" idx="2"/>
@@ -2521,7 +2443,7 @@
             <a:spLocks noGrp="1"/>
           </p:cNvSpPr>
           <p:nvPr>
-            <p:ph type="body" idx="3" sz="quarter"/>
+            <p:ph type="body" sz="quarter" idx="3"/>
           </p:nvPr>
         </p:nvSpPr>
         <p:spPr/>
@@ -2538,7 +2460,9 @@
               <a:t>generalizes beyond toy causality.</a:t>
             </a:r>
           </a:p>
-          <a:p/>
+          <a:p>
+            <a:endParaRPr/>
+          </a:p>
           <a:p>
             <a:r>
               <a:t>The first is counterfactual fluid dynamics. It shipped to crates.io this August and has its</a:t>
@@ -2549,7 +2473,9 @@
               <a:t>own documentation site.</a:t>
             </a:r>
           </a:p>
-          <a:p/>
+          <a:p>
+            <a:endParaRPr/>
+          </a:p>
           <a:p>
             <a:r>
               <a:t>Three things it does. It couples disciplines — compressible flow, plasma chemistry,</a:t>
@@ -2580,7 +2506,9 @@
               <a:t>a scored verdict.</a:t>
             </a:r>
           </a:p>
-          <a:p/>
+          <a:p>
+            <a:endParaRPr/>
+          </a:p>
           <a:p>
             <a:r>
               <a:t>On the right is why I am comfortable saying that out loud. Sod shock tube to an L1 of 0.027</a:t>
@@ -2606,7 +2534,9 @@
               <a:t>departs a frozen-drag prediction by 139 metres per second.</a:t>
             </a:r>
           </a:p>
-          <a:p/>
+          <a:p>
+            <a:endParaRPr/>
+          </a:p>
           <a:p>
             <a:r>
               <a:t>The framing at the bottom: Teschner's survey of the six biggest unsolved problems in CFD,</a:t>
@@ -2617,7 +2547,9 @@
               <a:t>drawn from NASA's CFD Vision 2030 study. Four of the six informed this design.</a:t>
             </a:r>
           </a:p>
-          <a:p/>
+          <a:p>
+            <a:endParaRPr/>
+          </a:p>
           <a:p>
             <a:r>
               <a:t>One thing I want to flag for this council specifically: the roadmap page also lists non-goals</a:t>
@@ -2642,7 +2574,7 @@
             <a:spLocks noGrp="1"/>
           </p:cNvSpPr>
           <p:nvPr>
-            <p:ph type="sldNum" idx="5" sz="quarter"/>
+            <p:ph type="sldNum" sz="quarter" idx="5"/>
           </p:nvPr>
         </p:nvSpPr>
         <p:spPr/>
@@ -2693,10 +2625,9 @@
           <a:lstStyle/>
           <a:p>
             <a:r>
-              <a:rPr lang="en-US" smtClean="0"/>
+              <a:rPr lang="en-US"/>
               <a:t>Click to edit Master title style</a:t>
             </a:r>
-            <a:endParaRPr lang="en-US"/>
           </a:p>
         </p:txBody>
       </p:sp>
@@ -2812,10 +2743,9 @@
           </a:lstStyle>
           <a:p>
             <a:r>
-              <a:rPr lang="en-US" smtClean="0"/>
+              <a:rPr lang="en-US"/>
               <a:t>Click to edit Master subtitle style</a:t>
             </a:r>
-            <a:endParaRPr lang="en-US"/>
           </a:p>
         </p:txBody>
       </p:sp>
@@ -2836,7 +2766,7 @@
           <a:p>
             <a:fld id="{5BCAD085-E8A6-8845-BD4E-CB4CCA059FC4}" type="datetimeFigureOut">
               <a:rPr lang="en-US" smtClean="0"/>
-              <a:t>1/27/13</a:t>
+              <a:t>8/25/26</a:t>
             </a:fld>
             <a:endParaRPr lang="en-US"/>
           </a:p>
@@ -2930,10 +2860,9 @@
           <a:lstStyle/>
           <a:p>
             <a:r>
-              <a:rPr lang="en-US" smtClean="0"/>
+              <a:rPr lang="en-US"/>
               <a:t>Click to edit Master title style</a:t>
             </a:r>
-            <a:endParaRPr lang="en-US"/>
           </a:p>
         </p:txBody>
       </p:sp>
@@ -2954,38 +2883,37 @@
           <a:p>
             <a:pPr lvl="0"/>
             <a:r>
-              <a:rPr lang="en-US" smtClean="0"/>
+              <a:rPr lang="en-US"/>
               <a:t>Click to edit Master text styles</a:t>
             </a:r>
           </a:p>
           <a:p>
             <a:pPr lvl="1"/>
             <a:r>
-              <a:rPr lang="en-US" smtClean="0"/>
+              <a:rPr lang="en-US"/>
               <a:t>Second level</a:t>
             </a:r>
           </a:p>
           <a:p>
             <a:pPr lvl="2"/>
             <a:r>
-              <a:rPr lang="en-US" smtClean="0"/>
+              <a:rPr lang="en-US"/>
               <a:t>Third level</a:t>
             </a:r>
           </a:p>
           <a:p>
             <a:pPr lvl="3"/>
             <a:r>
-              <a:rPr lang="en-US" smtClean="0"/>
+              <a:rPr lang="en-US"/>
               <a:t>Fourth level</a:t>
             </a:r>
           </a:p>
           <a:p>
             <a:pPr lvl="4"/>
             <a:r>
-              <a:rPr lang="en-US" smtClean="0"/>
+              <a:rPr lang="en-US"/>
               <a:t>Fifth level</a:t>
             </a:r>
-            <a:endParaRPr lang="en-US"/>
           </a:p>
         </p:txBody>
       </p:sp>
@@ -3006,7 +2934,7 @@
           <a:p>
             <a:fld id="{5BCAD085-E8A6-8845-BD4E-CB4CCA059FC4}" type="datetimeFigureOut">
               <a:rPr lang="en-US" smtClean="0"/>
-              <a:t>1/27/13</a:t>
+              <a:t>8/25/26</a:t>
             </a:fld>
             <a:endParaRPr lang="en-US"/>
           </a:p>
@@ -3105,10 +3033,9 @@
           <a:lstStyle/>
           <a:p>
             <a:r>
-              <a:rPr lang="en-US" smtClean="0"/>
+              <a:rPr lang="en-US"/>
               <a:t>Click to edit Master title style</a:t>
             </a:r>
-            <a:endParaRPr lang="en-US"/>
           </a:p>
         </p:txBody>
       </p:sp>
@@ -3134,38 +3061,37 @@
           <a:p>
             <a:pPr lvl="0"/>
             <a:r>
-              <a:rPr lang="en-US" smtClean="0"/>
+              <a:rPr lang="en-US"/>
               <a:t>Click to edit Master text styles</a:t>
             </a:r>
           </a:p>
           <a:p>
             <a:pPr lvl="1"/>
             <a:r>
-              <a:rPr lang="en-US" smtClean="0"/>
+              <a:rPr lang="en-US"/>
               <a:t>Second level</a:t>
             </a:r>
           </a:p>
           <a:p>
             <a:pPr lvl="2"/>
             <a:r>
-              <a:rPr lang="en-US" smtClean="0"/>
+              <a:rPr lang="en-US"/>
               <a:t>Third level</a:t>
             </a:r>
           </a:p>
           <a:p>
             <a:pPr lvl="3"/>
             <a:r>
-              <a:rPr lang="en-US" smtClean="0"/>
+              <a:rPr lang="en-US"/>
               <a:t>Fourth level</a:t>
             </a:r>
           </a:p>
           <a:p>
             <a:pPr lvl="4"/>
             <a:r>
-              <a:rPr lang="en-US" smtClean="0"/>
+              <a:rPr lang="en-US"/>
               <a:t>Fifth level</a:t>
             </a:r>
-            <a:endParaRPr lang="en-US"/>
           </a:p>
         </p:txBody>
       </p:sp>
@@ -3186,7 +3112,7 @@
           <a:p>
             <a:fld id="{5BCAD085-E8A6-8845-BD4E-CB4CCA059FC4}" type="datetimeFigureOut">
               <a:rPr lang="en-US" smtClean="0"/>
-              <a:t>1/27/13</a:t>
+              <a:t>8/25/26</a:t>
             </a:fld>
             <a:endParaRPr lang="en-US"/>
           </a:p>
@@ -3280,10 +3206,9 @@
           <a:lstStyle/>
           <a:p>
             <a:r>
-              <a:rPr lang="en-US" smtClean="0"/>
+              <a:rPr lang="en-US"/>
               <a:t>Click to edit Master title style</a:t>
             </a:r>
-            <a:endParaRPr lang="en-US"/>
           </a:p>
         </p:txBody>
       </p:sp>
@@ -3304,38 +3229,37 @@
           <a:p>
             <a:pPr lvl="0"/>
             <a:r>
-              <a:rPr lang="en-US" smtClean="0"/>
+              <a:rPr lang="en-US"/>
               <a:t>Click to edit Master text styles</a:t>
             </a:r>
           </a:p>
           <a:p>
             <a:pPr lvl="1"/>
             <a:r>
-              <a:rPr lang="en-US" smtClean="0"/>
+              <a:rPr lang="en-US"/>
               <a:t>Second level</a:t>
             </a:r>
           </a:p>
           <a:p>
             <a:pPr lvl="2"/>
             <a:r>
-              <a:rPr lang="en-US" smtClean="0"/>
+              <a:rPr lang="en-US"/>
               <a:t>Third level</a:t>
             </a:r>
           </a:p>
           <a:p>
             <a:pPr lvl="3"/>
             <a:r>
-              <a:rPr lang="en-US" smtClean="0"/>
+              <a:rPr lang="en-US"/>
               <a:t>Fourth level</a:t>
             </a:r>
           </a:p>
           <a:p>
             <a:pPr lvl="4"/>
             <a:r>
-              <a:rPr lang="en-US" smtClean="0"/>
+              <a:rPr lang="en-US"/>
               <a:t>Fifth level</a:t>
             </a:r>
-            <a:endParaRPr lang="en-US"/>
           </a:p>
         </p:txBody>
       </p:sp>
@@ -3356,7 +3280,7 @@
           <a:p>
             <a:fld id="{5BCAD085-E8A6-8845-BD4E-CB4CCA059FC4}" type="datetimeFigureOut">
               <a:rPr lang="en-US" smtClean="0"/>
-              <a:t>1/27/13</a:t>
+              <a:t>8/25/26</a:t>
             </a:fld>
             <a:endParaRPr lang="en-US"/>
           </a:p>
@@ -3459,10 +3383,9 @@
           </a:lstStyle>
           <a:p>
             <a:r>
-              <a:rPr lang="en-US" smtClean="0"/>
+              <a:rPr lang="en-US"/>
               <a:t>Click to edit Master title style</a:t>
             </a:r>
-            <a:endParaRPr lang="en-US"/>
           </a:p>
         </p:txBody>
       </p:sp>
@@ -3579,7 +3502,7 @@
           <a:p>
             <a:pPr lvl="0"/>
             <a:r>
-              <a:rPr lang="en-US" smtClean="0"/>
+              <a:rPr lang="en-US"/>
               <a:t>Click to edit Master text styles</a:t>
             </a:r>
           </a:p>
@@ -3602,7 +3525,7 @@
           <a:p>
             <a:fld id="{5BCAD085-E8A6-8845-BD4E-CB4CCA059FC4}" type="datetimeFigureOut">
               <a:rPr lang="en-US" smtClean="0"/>
-              <a:t>1/27/13</a:t>
+              <a:t>8/25/26</a:t>
             </a:fld>
             <a:endParaRPr lang="en-US"/>
           </a:p>
@@ -3696,10 +3619,9 @@
           <a:lstStyle/>
           <a:p>
             <a:r>
-              <a:rPr lang="en-US" smtClean="0"/>
+              <a:rPr lang="en-US"/>
               <a:t>Click to edit Master title style</a:t>
             </a:r>
-            <a:endParaRPr lang="en-US"/>
           </a:p>
         </p:txBody>
       </p:sp>
@@ -3753,38 +3675,37 @@
           <a:p>
             <a:pPr lvl="0"/>
             <a:r>
-              <a:rPr lang="en-US" smtClean="0"/>
+              <a:rPr lang="en-US"/>
               <a:t>Click to edit Master text styles</a:t>
             </a:r>
           </a:p>
           <a:p>
             <a:pPr lvl="1"/>
             <a:r>
-              <a:rPr lang="en-US" smtClean="0"/>
+              <a:rPr lang="en-US"/>
               <a:t>Second level</a:t>
             </a:r>
           </a:p>
           <a:p>
             <a:pPr lvl="2"/>
             <a:r>
-              <a:rPr lang="en-US" smtClean="0"/>
+              <a:rPr lang="en-US"/>
               <a:t>Third level</a:t>
             </a:r>
           </a:p>
           <a:p>
             <a:pPr lvl="3"/>
             <a:r>
-              <a:rPr lang="en-US" smtClean="0"/>
+              <a:rPr lang="en-US"/>
               <a:t>Fourth level</a:t>
             </a:r>
           </a:p>
           <a:p>
             <a:pPr lvl="4"/>
             <a:r>
-              <a:rPr lang="en-US" smtClean="0"/>
+              <a:rPr lang="en-US"/>
               <a:t>Fifth level</a:t>
             </a:r>
-            <a:endParaRPr lang="en-US"/>
           </a:p>
         </p:txBody>
       </p:sp>
@@ -3838,38 +3759,37 @@
           <a:p>
             <a:pPr lvl="0"/>
             <a:r>
-              <a:rPr lang="en-US" smtClean="0"/>
+              <a:rPr lang="en-US"/>
               <a:t>Click to edit Master text styles</a:t>
             </a:r>
           </a:p>
           <a:p>
             <a:pPr lvl="1"/>
             <a:r>
-              <a:rPr lang="en-US" smtClean="0"/>
+              <a:rPr lang="en-US"/>
               <a:t>Second level</a:t>
             </a:r>
           </a:p>
           <a:p>
             <a:pPr lvl="2"/>
             <a:r>
-              <a:rPr lang="en-US" smtClean="0"/>
+              <a:rPr lang="en-US"/>
               <a:t>Third level</a:t>
             </a:r>
           </a:p>
           <a:p>
             <a:pPr lvl="3"/>
             <a:r>
-              <a:rPr lang="en-US" smtClean="0"/>
+              <a:rPr lang="en-US"/>
               <a:t>Fourth level</a:t>
             </a:r>
           </a:p>
           <a:p>
             <a:pPr lvl="4"/>
             <a:r>
-              <a:rPr lang="en-US" smtClean="0"/>
+              <a:rPr lang="en-US"/>
               <a:t>Fifth level</a:t>
             </a:r>
-            <a:endParaRPr lang="en-US"/>
           </a:p>
         </p:txBody>
       </p:sp>
@@ -3890,7 +3810,7 @@
           <a:p>
             <a:fld id="{5BCAD085-E8A6-8845-BD4E-CB4CCA059FC4}" type="datetimeFigureOut">
               <a:rPr lang="en-US" smtClean="0"/>
-              <a:t>1/27/13</a:t>
+              <a:t>8/25/26</a:t>
             </a:fld>
             <a:endParaRPr lang="en-US"/>
           </a:p>
@@ -3988,10 +3908,9 @@
           </a:lstStyle>
           <a:p>
             <a:r>
-              <a:rPr lang="en-US" smtClean="0"/>
+              <a:rPr lang="en-US"/>
               <a:t>Click to edit Master title style</a:t>
             </a:r>
-            <a:endParaRPr lang="en-US"/>
           </a:p>
         </p:txBody>
       </p:sp>
@@ -4054,7 +3973,7 @@
           <a:p>
             <a:pPr lvl="0"/>
             <a:r>
-              <a:rPr lang="en-US" smtClean="0"/>
+              <a:rPr lang="en-US"/>
               <a:t>Click to edit Master text styles</a:t>
             </a:r>
           </a:p>
@@ -4110,38 +4029,37 @@
           <a:p>
             <a:pPr lvl="0"/>
             <a:r>
-              <a:rPr lang="en-US" smtClean="0"/>
+              <a:rPr lang="en-US"/>
               <a:t>Click to edit Master text styles</a:t>
             </a:r>
           </a:p>
           <a:p>
             <a:pPr lvl="1"/>
             <a:r>
-              <a:rPr lang="en-US" smtClean="0"/>
+              <a:rPr lang="en-US"/>
               <a:t>Second level</a:t>
             </a:r>
           </a:p>
           <a:p>
             <a:pPr lvl="2"/>
             <a:r>
-              <a:rPr lang="en-US" smtClean="0"/>
+              <a:rPr lang="en-US"/>
               <a:t>Third level</a:t>
             </a:r>
           </a:p>
           <a:p>
             <a:pPr lvl="3"/>
             <a:r>
-              <a:rPr lang="en-US" smtClean="0"/>
+              <a:rPr lang="en-US"/>
               <a:t>Fourth level</a:t>
             </a:r>
           </a:p>
           <a:p>
             <a:pPr lvl="4"/>
             <a:r>
-              <a:rPr lang="en-US" smtClean="0"/>
+              <a:rPr lang="en-US"/>
               <a:t>Fifth level</a:t>
             </a:r>
-            <a:endParaRPr lang="en-US"/>
           </a:p>
         </p:txBody>
       </p:sp>
@@ -4204,7 +4122,7 @@
           <a:p>
             <a:pPr lvl="0"/>
             <a:r>
-              <a:rPr lang="en-US" smtClean="0"/>
+              <a:rPr lang="en-US"/>
               <a:t>Click to edit Master text styles</a:t>
             </a:r>
           </a:p>
@@ -4260,38 +4178,37 @@
           <a:p>
             <a:pPr lvl="0"/>
             <a:r>
-              <a:rPr lang="en-US" smtClean="0"/>
+              <a:rPr lang="en-US"/>
               <a:t>Click to edit Master text styles</a:t>
             </a:r>
           </a:p>
           <a:p>
             <a:pPr lvl="1"/>
             <a:r>
-              <a:rPr lang="en-US" smtClean="0"/>
+              <a:rPr lang="en-US"/>
               <a:t>Second level</a:t>
             </a:r>
           </a:p>
           <a:p>
             <a:pPr lvl="2"/>
             <a:r>
-              <a:rPr lang="en-US" smtClean="0"/>
+              <a:rPr lang="en-US"/>
               <a:t>Third level</a:t>
             </a:r>
           </a:p>
           <a:p>
             <a:pPr lvl="3"/>
             <a:r>
-              <a:rPr lang="en-US" smtClean="0"/>
+              <a:rPr lang="en-US"/>
               <a:t>Fourth level</a:t>
             </a:r>
           </a:p>
           <a:p>
             <a:pPr lvl="4"/>
             <a:r>
-              <a:rPr lang="en-US" smtClean="0"/>
+              <a:rPr lang="en-US"/>
               <a:t>Fifth level</a:t>
             </a:r>
-            <a:endParaRPr lang="en-US"/>
           </a:p>
         </p:txBody>
       </p:sp>
@@ -4312,7 +4229,7 @@
           <a:p>
             <a:fld id="{5BCAD085-E8A6-8845-BD4E-CB4CCA059FC4}" type="datetimeFigureOut">
               <a:rPr lang="en-US" smtClean="0"/>
-              <a:t>1/27/13</a:t>
+              <a:t>8/25/26</a:t>
             </a:fld>
             <a:endParaRPr lang="en-US"/>
           </a:p>
@@ -4406,10 +4323,9 @@
           <a:lstStyle/>
           <a:p>
             <a:r>
-              <a:rPr lang="en-US" smtClean="0"/>
+              <a:rPr lang="en-US"/>
               <a:t>Click to edit Master title style</a:t>
             </a:r>
-            <a:endParaRPr lang="en-US"/>
           </a:p>
         </p:txBody>
       </p:sp>
@@ -4430,7 +4346,7 @@
           <a:p>
             <a:fld id="{5BCAD085-E8A6-8845-BD4E-CB4CCA059FC4}" type="datetimeFigureOut">
               <a:rPr lang="en-US" smtClean="0"/>
-              <a:t>1/27/13</a:t>
+              <a:t>8/25/26</a:t>
             </a:fld>
             <a:endParaRPr lang="en-US"/>
           </a:p>
@@ -4525,7 +4441,7 @@
           <a:p>
             <a:fld id="{5BCAD085-E8A6-8845-BD4E-CB4CCA059FC4}" type="datetimeFigureOut">
               <a:rPr lang="en-US" smtClean="0"/>
-              <a:t>1/27/13</a:t>
+              <a:t>8/25/26</a:t>
             </a:fld>
             <a:endParaRPr lang="en-US"/>
           </a:p>
@@ -4628,10 +4544,9 @@
           </a:lstStyle>
           <a:p>
             <a:r>
-              <a:rPr lang="en-US" smtClean="0"/>
+              <a:rPr lang="en-US"/>
               <a:t>Click to edit Master title style</a:t>
             </a:r>
-            <a:endParaRPr lang="en-US"/>
           </a:p>
         </p:txBody>
       </p:sp>
@@ -4685,38 +4600,37 @@
           <a:p>
             <a:pPr lvl="0"/>
             <a:r>
-              <a:rPr lang="en-US" smtClean="0"/>
+              <a:rPr lang="en-US"/>
               <a:t>Click to edit Master text styles</a:t>
             </a:r>
           </a:p>
           <a:p>
             <a:pPr lvl="1"/>
             <a:r>
-              <a:rPr lang="en-US" smtClean="0"/>
+              <a:rPr lang="en-US"/>
               <a:t>Second level</a:t>
             </a:r>
           </a:p>
           <a:p>
             <a:pPr lvl="2"/>
             <a:r>
-              <a:rPr lang="en-US" smtClean="0"/>
+              <a:rPr lang="en-US"/>
               <a:t>Third level</a:t>
             </a:r>
           </a:p>
           <a:p>
             <a:pPr lvl="3"/>
             <a:r>
-              <a:rPr lang="en-US" smtClean="0"/>
+              <a:rPr lang="en-US"/>
               <a:t>Fourth level</a:t>
             </a:r>
           </a:p>
           <a:p>
             <a:pPr lvl="4"/>
             <a:r>
-              <a:rPr lang="en-US" smtClean="0"/>
+              <a:rPr lang="en-US"/>
               <a:t>Fifth level</a:t>
             </a:r>
-            <a:endParaRPr lang="en-US"/>
           </a:p>
         </p:txBody>
       </p:sp>
@@ -4779,7 +4693,7 @@
           <a:p>
             <a:pPr lvl="0"/>
             <a:r>
-              <a:rPr lang="en-US" smtClean="0"/>
+              <a:rPr lang="en-US"/>
               <a:t>Click to edit Master text styles</a:t>
             </a:r>
           </a:p>
@@ -4802,7 +4716,7 @@
           <a:p>
             <a:fld id="{5BCAD085-E8A6-8845-BD4E-CB4CCA059FC4}" type="datetimeFigureOut">
               <a:rPr lang="en-US" smtClean="0"/>
-              <a:t>1/27/13</a:t>
+              <a:t>8/25/26</a:t>
             </a:fld>
             <a:endParaRPr lang="en-US"/>
           </a:p>
@@ -4905,10 +4819,9 @@
           </a:lstStyle>
           <a:p>
             <a:r>
-              <a:rPr lang="en-US" smtClean="0"/>
+              <a:rPr lang="en-US"/>
               <a:t>Click to edit Master title style</a:t>
             </a:r>
-            <a:endParaRPr lang="en-US"/>
           </a:p>
         </p:txBody>
       </p:sp>
@@ -5032,7 +4945,7 @@
           <a:p>
             <a:pPr lvl="0"/>
             <a:r>
-              <a:rPr lang="en-US" smtClean="0"/>
+              <a:rPr lang="en-US"/>
               <a:t>Click to edit Master text styles</a:t>
             </a:r>
           </a:p>
@@ -5055,7 +4968,7 @@
           <a:p>
             <a:fld id="{5BCAD085-E8A6-8845-BD4E-CB4CCA059FC4}" type="datetimeFigureOut">
               <a:rPr lang="en-US" smtClean="0"/>
-              <a:t>1/27/13</a:t>
+              <a:t>8/25/26</a:t>
             </a:fld>
             <a:endParaRPr lang="en-US"/>
           </a:p>
@@ -5164,10 +5077,9 @@
           <a:lstStyle/>
           <a:p>
             <a:r>
-              <a:rPr lang="en-US" smtClean="0"/>
+              <a:rPr lang="en-US"/>
               <a:t>Click to edit Master title style</a:t>
             </a:r>
-            <a:endParaRPr lang="en-US"/>
           </a:p>
         </p:txBody>
       </p:sp>
@@ -5198,38 +5110,37 @@
           <a:p>
             <a:pPr lvl="0"/>
             <a:r>
-              <a:rPr lang="en-US" smtClean="0"/>
+              <a:rPr lang="en-US"/>
               <a:t>Click to edit Master text styles</a:t>
             </a:r>
           </a:p>
           <a:p>
             <a:pPr lvl="1"/>
             <a:r>
-              <a:rPr lang="en-US" smtClean="0"/>
+              <a:rPr lang="en-US"/>
               <a:t>Second level</a:t>
             </a:r>
           </a:p>
           <a:p>
             <a:pPr lvl="2"/>
             <a:r>
-              <a:rPr lang="en-US" smtClean="0"/>
+              <a:rPr lang="en-US"/>
               <a:t>Third level</a:t>
             </a:r>
           </a:p>
           <a:p>
             <a:pPr lvl="3"/>
             <a:r>
-              <a:rPr lang="en-US" smtClean="0"/>
+              <a:rPr lang="en-US"/>
               <a:t>Fourth level</a:t>
             </a:r>
           </a:p>
           <a:p>
             <a:pPr lvl="4"/>
             <a:r>
-              <a:rPr lang="en-US" smtClean="0"/>
+              <a:rPr lang="en-US"/>
               <a:t>Fifth level</a:t>
             </a:r>
-            <a:endParaRPr lang="en-US"/>
           </a:p>
         </p:txBody>
       </p:sp>
@@ -5268,7 +5179,7 @@
           <a:p>
             <a:fld id="{5BCAD085-E8A6-8845-BD4E-CB4CCA059FC4}" type="datetimeFigureOut">
               <a:rPr lang="en-US" smtClean="0"/>
-              <a:t>1/27/13</a:t>
+              <a:t>8/25/26</a:t>
             </a:fld>
             <a:endParaRPr lang="en-US"/>
           </a:p>
@@ -5627,7 +5538,7 @@
 </file>
 
 <file path=ppt/slides/slide1.xml><?xml version="1.0" encoding="utf-8"?>
-<p:sld xmlns:a="http://schemas.openxmlformats.org/drawingml/2006/main" xmlns:p="http://schemas.openxmlformats.org/presentationml/2006/main" xmlns:r="http://schemas.openxmlformats.org/officeDocument/2006/relationships">
+<p:sld xmlns:a="http://schemas.openxmlformats.org/drawingml/2006/main" xmlns:r="http://schemas.openxmlformats.org/officeDocument/2006/relationships" xmlns:p="http://schemas.openxmlformats.org/presentationml/2006/main">
   <p:cSld>
     <p:bg>
       <p:bgPr>
@@ -5643,7 +5554,14 @@
         <p:cNvGrpSpPr/>
         <p:nvPr/>
       </p:nvGrpSpPr>
-      <p:grpSpPr/>
+      <p:grpSpPr>
+        <a:xfrm>
+          <a:off x="0" y="0"/>
+          <a:ext cx="0" cy="0"/>
+          <a:chOff x="0" y="0"/>
+          <a:chExt cx="0" cy="0"/>
+        </a:xfrm>
+      </p:grpSpPr>
       <p:sp>
         <p:nvSpPr>
           <p:cNvPr id="2" name="Rounded Rectangle 1"/>
@@ -5689,6 +5607,7 @@
           <a:lstStyle/>
           <a:p>
             <a:pPr algn="ctr"/>
+            <a:endParaRPr/>
           </a:p>
         </p:txBody>
       </p:sp>
@@ -5701,7 +5620,7 @@
           <p:nvPr/>
         </p:nvPicPr>
         <p:blipFill>
-          <a:blip r:embed="rId2"/>
+          <a:blip r:embed="rId3"/>
           <a:stretch>
             <a:fillRect/>
           </a:stretch>
@@ -6090,6 +6009,7 @@
           <a:lstStyle/>
           <a:p>
             <a:pPr algn="ctr"/>
+            <a:endParaRPr/>
           </a:p>
         </p:txBody>
       </p:sp>
@@ -6136,6 +6056,7 @@
           <a:lstStyle/>
           <a:p>
             <a:pPr algn="ctr"/>
+            <a:endParaRPr/>
           </a:p>
         </p:txBody>
       </p:sp>
@@ -6182,6 +6103,7 @@
           <a:lstStyle/>
           <a:p>
             <a:pPr algn="ctr"/>
+            <a:endParaRPr/>
           </a:p>
         </p:txBody>
       </p:sp>
@@ -6202,7 +6124,7 @@
           <a:noFill/>
         </p:spPr>
         <p:txBody>
-          <a:bodyPr wrap="none" lIns="0" rIns="0" tIns="0" bIns="0" anchor="t">
+          <a:bodyPr wrap="none" lIns="0" tIns="0" rIns="0" bIns="0" anchor="t">
             <a:noAutofit/>
           </a:bodyPr>
           <a:lstStyle/>
@@ -6219,7 +6141,7 @@
               </a:spcAft>
             </a:pPr>
             <a:r>
-              <a:rPr sz="2600" spc="-31">
+              <a:rPr sz="2600" spc="-31" dirty="0">
                 <a:solidFill>
                   <a:srgbClr val="E6EDF3"/>
                 </a:solidFill>
@@ -6247,7 +6169,7 @@
           <a:noFill/>
         </p:spPr>
         <p:txBody>
-          <a:bodyPr wrap="none" lIns="0" rIns="0" tIns="0" bIns="0" anchor="t">
+          <a:bodyPr wrap="none" lIns="0" tIns="0" rIns="0" bIns="0" anchor="t">
             <a:noAutofit/>
           </a:bodyPr>
           <a:lstStyle/>
@@ -6292,7 +6214,7 @@
           <a:noFill/>
         </p:spPr>
         <p:txBody>
-          <a:bodyPr wrap="none" lIns="0" rIns="0" tIns="0" bIns="0" anchor="t">
+          <a:bodyPr wrap="none" lIns="0" tIns="0" rIns="0" bIns="0" anchor="t">
             <a:noAutofit/>
           </a:bodyPr>
           <a:lstStyle/>
@@ -6329,66 +6251,21 @@
           <p:nvPr/>
         </p:nvPicPr>
         <p:blipFill>
-          <a:blip r:embed="rId3"/>
+          <a:blip r:embed="rId4"/>
           <a:stretch>
             <a:fillRect/>
           </a:stretch>
         </p:blipFill>
         <p:spPr>
           <a:xfrm>
-            <a:off x="10564337" y="5925312"/>
-            <a:ext cx="896112" cy="700310"/>
+            <a:off x="10227452" y="5649265"/>
+            <a:ext cx="1313239" cy="1026294"/>
           </a:xfrm>
           <a:prstGeom prst="rect">
             <a:avLst/>
           </a:prstGeom>
         </p:spPr>
       </p:pic>
-      <p:sp>
-        <p:nvSpPr>
-          <p:cNvPr id="20" name="TextBox 19"/>
-          <p:cNvSpPr txBox="1"/>
-          <p:nvPr/>
-        </p:nvSpPr>
-        <p:spPr>
-          <a:xfrm>
-            <a:off x="731520" y="6327648"/>
-            <a:ext cx="4754880" cy="166878"/>
-          </a:xfrm>
-          <a:prstGeom prst="rect">
-            <a:avLst/>
-          </a:prstGeom>
-          <a:noFill/>
-        </p:spPr>
-        <p:txBody>
-          <a:bodyPr wrap="none" lIns="0" rIns="0" tIns="0" bIns="0" anchor="t">
-            <a:noAutofit/>
-          </a:bodyPr>
-          <a:lstStyle/>
-          <a:p>
-            <a:pPr algn="l">
-              <a:lnSpc>
-                <a:spcPts val="1170"/>
-              </a:lnSpc>
-              <a:spcBef>
-                <a:spcPts val="0"/>
-              </a:spcBef>
-              <a:spcAft>
-                <a:spcPts val="0"/>
-              </a:spcAft>
-            </a:pPr>
-            <a:r>
-              <a:rPr sz="900" spc="54">
-                <a:solidFill>
-                  <a:srgbClr val="6B7682"/>
-                </a:solidFill>
-                <a:latin typeface="JetBrains Mono"/>
-              </a:rPr>
-              <a:t>LF AI &amp; Data Sandbox project since 2023</a:t>
-            </a:r>
-          </a:p>
-        </p:txBody>
-      </p:sp>
     </p:spTree>
   </p:cSld>
   <p:clrMapOvr>
@@ -6398,7 +6275,7 @@
 </file>
 
 <file path=ppt/slides/slide10.xml><?xml version="1.0" encoding="utf-8"?>
-<p:sld xmlns:a="http://schemas.openxmlformats.org/drawingml/2006/main" xmlns:p="http://schemas.openxmlformats.org/presentationml/2006/main" xmlns:r="http://schemas.openxmlformats.org/officeDocument/2006/relationships">
+<p:sld xmlns:a="http://schemas.openxmlformats.org/drawingml/2006/main" xmlns:r="http://schemas.openxmlformats.org/officeDocument/2006/relationships" xmlns:p="http://schemas.openxmlformats.org/presentationml/2006/main">
   <p:cSld>
     <p:bg>
       <p:bgPr>
@@ -6414,7 +6291,14 @@
         <p:cNvGrpSpPr/>
         <p:nvPr/>
       </p:nvGrpSpPr>
-      <p:grpSpPr/>
+      <p:grpSpPr>
+        <a:xfrm>
+          <a:off x="0" y="0"/>
+          <a:ext cx="0" cy="0"/>
+          <a:chOff x="0" y="0"/>
+          <a:chExt cx="0" cy="0"/>
+        </a:xfrm>
+      </p:grpSpPr>
       <p:sp>
         <p:nvSpPr>
           <p:cNvPr id="2" name="TextBox 1"/>
@@ -6432,7 +6316,7 @@
           <a:noFill/>
         </p:spPr>
         <p:txBody>
-          <a:bodyPr wrap="none" lIns="0" rIns="0" tIns="0" bIns="0" anchor="t">
+          <a:bodyPr wrap="none" lIns="0" tIns="0" rIns="0" bIns="0" anchor="t">
             <a:noAutofit/>
           </a:bodyPr>
           <a:lstStyle/>
@@ -6477,7 +6361,7 @@
           <a:noFill/>
         </p:spPr>
         <p:txBody>
-          <a:bodyPr wrap="none" lIns="0" rIns="0" tIns="0" bIns="0" anchor="t">
+          <a:bodyPr wrap="none" lIns="0" tIns="0" rIns="0" bIns="0" anchor="t">
             <a:noAutofit/>
           </a:bodyPr>
           <a:lstStyle/>
@@ -6522,7 +6406,7 @@
           <a:noFill/>
         </p:spPr>
         <p:txBody>
-          <a:bodyPr wrap="none" lIns="0" rIns="0" tIns="0" bIns="0" anchor="t">
+          <a:bodyPr wrap="none" lIns="0" tIns="0" rIns="0" bIns="0" anchor="t">
             <a:noAutofit/>
           </a:bodyPr>
           <a:lstStyle/>
@@ -6630,6 +6514,7 @@
           <a:lstStyle/>
           <a:p>
             <a:pPr algn="ctr"/>
+            <a:endParaRPr/>
           </a:p>
         </p:txBody>
       </p:sp>
@@ -6946,7 +6831,7 @@
           <a:noFill/>
         </p:spPr>
         <p:txBody>
-          <a:bodyPr wrap="none" lIns="0" rIns="0" tIns="0" bIns="0" anchor="t">
+          <a:bodyPr wrap="none" lIns="0" tIns="0" rIns="0" bIns="0" anchor="t">
             <a:noAutofit/>
           </a:bodyPr>
           <a:lstStyle/>
@@ -6991,7 +6876,7 @@
           <a:noFill/>
         </p:spPr>
         <p:txBody>
-          <a:bodyPr wrap="none" lIns="0" rIns="0" tIns="0" bIns="0" anchor="t">
+          <a:bodyPr wrap="none" lIns="0" tIns="0" rIns="0" bIns="0" anchor="t">
             <a:noAutofit/>
           </a:bodyPr>
           <a:lstStyle/>
@@ -7086,6 +6971,7 @@
           <a:lstStyle/>
           <a:p>
             <a:pPr algn="ctr"/>
+            <a:endParaRPr/>
           </a:p>
         </p:txBody>
       </p:sp>
@@ -7130,6 +7016,7 @@
           <a:lstStyle/>
           <a:p>
             <a:pPr algn="ctr"/>
+            <a:endParaRPr/>
           </a:p>
         </p:txBody>
       </p:sp>
@@ -7150,7 +7037,7 @@
           <a:noFill/>
         </p:spPr>
         <p:txBody>
-          <a:bodyPr wrap="none" lIns="0" rIns="0" tIns="0" bIns="0" anchor="t">
+          <a:bodyPr wrap="none" lIns="0" tIns="0" rIns="0" bIns="0" anchor="t">
             <a:noAutofit/>
           </a:bodyPr>
           <a:lstStyle/>
@@ -7195,7 +7082,7 @@
           <a:noFill/>
         </p:spPr>
         <p:txBody>
-          <a:bodyPr wrap="none" lIns="0" rIns="0" tIns="0" bIns="0" anchor="t">
+          <a:bodyPr wrap="none" lIns="0" tIns="0" rIns="0" bIns="0" anchor="t">
             <a:noAutofit/>
           </a:bodyPr>
           <a:lstStyle/>
@@ -7378,6 +7265,7 @@
           <a:lstStyle/>
           <a:p>
             <a:pPr algn="ctr"/>
+            <a:endParaRPr/>
           </a:p>
         </p:txBody>
       </p:sp>
@@ -7422,6 +7310,7 @@
           <a:lstStyle/>
           <a:p>
             <a:pPr algn="ctr"/>
+            <a:endParaRPr/>
           </a:p>
         </p:txBody>
       </p:sp>
@@ -7442,7 +7331,7 @@
           <a:noFill/>
         </p:spPr>
         <p:txBody>
-          <a:bodyPr wrap="none" lIns="0" rIns="0" tIns="0" bIns="0" anchor="t">
+          <a:bodyPr wrap="none" lIns="0" tIns="0" rIns="0" bIns="0" anchor="t">
             <a:noAutofit/>
           </a:bodyPr>
           <a:lstStyle/>
@@ -7487,7 +7376,7 @@
           <a:noFill/>
         </p:spPr>
         <p:txBody>
-          <a:bodyPr wrap="none" lIns="0" rIns="0" tIns="0" bIns="0" anchor="t">
+          <a:bodyPr wrap="none" lIns="0" tIns="0" rIns="0" bIns="0" anchor="t">
             <a:noAutofit/>
           </a:bodyPr>
           <a:lstStyle/>
@@ -7648,6 +7537,7 @@
           <a:lstStyle/>
           <a:p>
             <a:pPr algn="ctr"/>
+            <a:endParaRPr/>
           </a:p>
         </p:txBody>
       </p:sp>
@@ -7692,6 +7582,7 @@
           <a:lstStyle/>
           <a:p>
             <a:pPr algn="ctr"/>
+            <a:endParaRPr/>
           </a:p>
         </p:txBody>
       </p:sp>
@@ -7712,7 +7603,7 @@
           <a:noFill/>
         </p:spPr>
         <p:txBody>
-          <a:bodyPr wrap="none" lIns="0" rIns="0" tIns="0" bIns="0" anchor="t">
+          <a:bodyPr wrap="none" lIns="0" tIns="0" rIns="0" bIns="0" anchor="t">
             <a:noAutofit/>
           </a:bodyPr>
           <a:lstStyle/>
@@ -7757,7 +7648,7 @@
           <a:noFill/>
         </p:spPr>
         <p:txBody>
-          <a:bodyPr wrap="none" lIns="0" rIns="0" tIns="0" bIns="0" anchor="t">
+          <a:bodyPr wrap="none" lIns="0" tIns="0" rIns="0" bIns="0" anchor="t">
             <a:noAutofit/>
           </a:bodyPr>
           <a:lstStyle/>
@@ -7890,7 +7781,7 @@
           <a:noFill/>
         </p:spPr>
         <p:txBody>
-          <a:bodyPr wrap="none" lIns="0" rIns="0" tIns="0" bIns="0" anchor="t">
+          <a:bodyPr wrap="none" lIns="0" tIns="0" rIns="0" bIns="0" anchor="t">
             <a:noAutofit/>
           </a:bodyPr>
           <a:lstStyle/>
@@ -7992,7 +7883,7 @@
           <a:noFill/>
         </p:spPr>
         <p:txBody>
-          <a:bodyPr wrap="none" lIns="0" rIns="0" tIns="0" bIns="0" anchor="t">
+          <a:bodyPr wrap="none" lIns="0" tIns="0" rIns="0" bIns="0" anchor="t">
             <a:noAutofit/>
           </a:bodyPr>
           <a:lstStyle/>
@@ -8037,7 +7928,7 @@
           <a:noFill/>
         </p:spPr>
         <p:txBody>
-          <a:bodyPr wrap="none" lIns="0" rIns="0" tIns="0" bIns="0" anchor="t">
+          <a:bodyPr wrap="none" lIns="0" tIns="0" rIns="0" bIns="0" anchor="t">
             <a:noAutofit/>
           </a:bodyPr>
           <a:lstStyle/>
@@ -8074,7 +7965,7 @@
 </file>
 
 <file path=ppt/slides/slide11.xml><?xml version="1.0" encoding="utf-8"?>
-<p:sld xmlns:a="http://schemas.openxmlformats.org/drawingml/2006/main" xmlns:p="http://schemas.openxmlformats.org/presentationml/2006/main" xmlns:r="http://schemas.openxmlformats.org/officeDocument/2006/relationships">
+<p:sld xmlns:a="http://schemas.openxmlformats.org/drawingml/2006/main" xmlns:r="http://schemas.openxmlformats.org/officeDocument/2006/relationships" xmlns:p="http://schemas.openxmlformats.org/presentationml/2006/main">
   <p:cSld>
     <p:bg>
       <p:bgPr>
@@ -8090,7 +7981,14 @@
         <p:cNvGrpSpPr/>
         <p:nvPr/>
       </p:nvGrpSpPr>
-      <p:grpSpPr/>
+      <p:grpSpPr>
+        <a:xfrm>
+          <a:off x="0" y="0"/>
+          <a:ext cx="0" cy="0"/>
+          <a:chOff x="0" y="0"/>
+          <a:chExt cx="0" cy="0"/>
+        </a:xfrm>
+      </p:grpSpPr>
       <p:sp>
         <p:nvSpPr>
           <p:cNvPr id="2" name="TextBox 1"/>
@@ -8108,7 +8006,7 @@
           <a:noFill/>
         </p:spPr>
         <p:txBody>
-          <a:bodyPr wrap="none" lIns="0" rIns="0" tIns="0" bIns="0" anchor="t">
+          <a:bodyPr wrap="none" lIns="0" tIns="0" rIns="0" bIns="0" anchor="t">
             <a:noAutofit/>
           </a:bodyPr>
           <a:lstStyle/>
@@ -8153,7 +8051,7 @@
           <a:noFill/>
         </p:spPr>
         <p:txBody>
-          <a:bodyPr wrap="none" lIns="0" rIns="0" tIns="0" bIns="0" anchor="t">
+          <a:bodyPr wrap="none" lIns="0" tIns="0" rIns="0" bIns="0" anchor="t">
             <a:noAutofit/>
           </a:bodyPr>
           <a:lstStyle/>
@@ -8198,7 +8096,7 @@
           <a:noFill/>
         </p:spPr>
         <p:txBody>
-          <a:bodyPr wrap="none" lIns="0" rIns="0" tIns="0" bIns="0" anchor="t">
+          <a:bodyPr wrap="none" lIns="0" tIns="0" rIns="0" bIns="0" anchor="t">
             <a:noAutofit/>
           </a:bodyPr>
           <a:lstStyle/>
@@ -8306,6 +8204,7 @@
           <a:lstStyle/>
           <a:p>
             <a:pPr algn="ctr"/>
+            <a:endParaRPr/>
           </a:p>
         </p:txBody>
       </p:sp>
@@ -8622,7 +8521,7 @@
           <a:noFill/>
         </p:spPr>
         <p:txBody>
-          <a:bodyPr wrap="none" lIns="0" rIns="0" tIns="0" bIns="0" anchor="t">
+          <a:bodyPr wrap="none" lIns="0" tIns="0" rIns="0" bIns="0" anchor="t">
             <a:noAutofit/>
           </a:bodyPr>
           <a:lstStyle/>
@@ -8728,6 +8627,7 @@
           <a:lstStyle/>
           <a:p>
             <a:pPr algn="ctr"/>
+            <a:endParaRPr/>
           </a:p>
         </p:txBody>
       </p:sp>
@@ -8774,6 +8674,7 @@
           <a:lstStyle/>
           <a:p>
             <a:pPr algn="ctr"/>
+            <a:endParaRPr/>
           </a:p>
         </p:txBody>
       </p:sp>
@@ -8820,6 +8721,7 @@
           <a:lstStyle/>
           <a:p>
             <a:pPr algn="ctr"/>
+            <a:endParaRPr/>
           </a:p>
         </p:txBody>
       </p:sp>
@@ -8875,7 +8777,7 @@
           <a:noFill/>
         </p:spPr>
         <p:txBody>
-          <a:bodyPr wrap="none" lIns="0" rIns="0" tIns="0" bIns="0" anchor="t">
+          <a:bodyPr wrap="none" lIns="0" tIns="0" rIns="0" bIns="0" anchor="t">
             <a:noAutofit/>
           </a:bodyPr>
           <a:lstStyle/>
@@ -8920,7 +8822,7 @@
           <a:noFill/>
         </p:spPr>
         <p:txBody>
-          <a:bodyPr wrap="none" lIns="0" rIns="0" tIns="0" bIns="0" anchor="t">
+          <a:bodyPr wrap="none" lIns="0" tIns="0" rIns="0" bIns="0" anchor="t">
             <a:noAutofit/>
           </a:bodyPr>
           <a:lstStyle/>
@@ -8957,7 +8859,7 @@
 </file>
 
 <file path=ppt/slides/slide12.xml><?xml version="1.0" encoding="utf-8"?>
-<p:sld xmlns:a="http://schemas.openxmlformats.org/drawingml/2006/main" xmlns:p="http://schemas.openxmlformats.org/presentationml/2006/main" xmlns:r="http://schemas.openxmlformats.org/officeDocument/2006/relationships">
+<p:sld xmlns:a="http://schemas.openxmlformats.org/drawingml/2006/main" xmlns:r="http://schemas.openxmlformats.org/officeDocument/2006/relationships" xmlns:p="http://schemas.openxmlformats.org/presentationml/2006/main">
   <p:cSld>
     <p:bg>
       <p:bgPr>
@@ -8973,7 +8875,14 @@
         <p:cNvGrpSpPr/>
         <p:nvPr/>
       </p:nvGrpSpPr>
-      <p:grpSpPr/>
+      <p:grpSpPr>
+        <a:xfrm>
+          <a:off x="0" y="0"/>
+          <a:ext cx="0" cy="0"/>
+          <a:chOff x="0" y="0"/>
+          <a:chExt cx="0" cy="0"/>
+        </a:xfrm>
+      </p:grpSpPr>
       <p:sp>
         <p:nvSpPr>
           <p:cNvPr id="2" name="TextBox 1"/>
@@ -8991,7 +8900,7 @@
           <a:noFill/>
         </p:spPr>
         <p:txBody>
-          <a:bodyPr wrap="none" lIns="0" rIns="0" tIns="0" bIns="0" anchor="t">
+          <a:bodyPr wrap="none" lIns="0" tIns="0" rIns="0" bIns="0" anchor="t">
             <a:noAutofit/>
           </a:bodyPr>
           <a:lstStyle/>
@@ -9036,7 +8945,7 @@
           <a:noFill/>
         </p:spPr>
         <p:txBody>
-          <a:bodyPr wrap="none" lIns="0" rIns="0" tIns="0" bIns="0" anchor="t">
+          <a:bodyPr wrap="none" lIns="0" tIns="0" rIns="0" bIns="0" anchor="t">
             <a:noAutofit/>
           </a:bodyPr>
           <a:lstStyle/>
@@ -9081,7 +8990,7 @@
           <a:noFill/>
         </p:spPr>
         <p:txBody>
-          <a:bodyPr wrap="none" lIns="0" rIns="0" tIns="0" bIns="0" anchor="t">
+          <a:bodyPr wrap="none" lIns="0" tIns="0" rIns="0" bIns="0" anchor="t">
             <a:noAutofit/>
           </a:bodyPr>
           <a:lstStyle/>
@@ -9189,6 +9098,7 @@
           <a:lstStyle/>
           <a:p>
             <a:pPr algn="ctr"/>
+            <a:endParaRPr/>
           </a:p>
         </p:txBody>
       </p:sp>
@@ -9209,7 +9119,7 @@
           <a:noFill/>
         </p:spPr>
         <p:txBody>
-          <a:bodyPr wrap="none" lIns="0" rIns="0" tIns="0" bIns="0" anchor="t">
+          <a:bodyPr wrap="none" lIns="0" tIns="0" rIns="0" bIns="0" anchor="t">
             <a:noAutofit/>
           </a:bodyPr>
           <a:lstStyle/>
@@ -9254,7 +9164,7 @@
           <a:noFill/>
         </p:spPr>
         <p:txBody>
-          <a:bodyPr wrap="none" lIns="0" rIns="0" tIns="0" bIns="0" anchor="t">
+          <a:bodyPr wrap="none" lIns="0" tIns="0" rIns="0" bIns="0" anchor="t">
             <a:noAutofit/>
           </a:bodyPr>
           <a:lstStyle/>
@@ -9299,7 +9209,7 @@
           <a:noFill/>
         </p:spPr>
         <p:txBody>
-          <a:bodyPr wrap="none" lIns="0" rIns="0" tIns="0" bIns="0" anchor="t">
+          <a:bodyPr wrap="none" lIns="0" tIns="0" rIns="0" bIns="0" anchor="t">
             <a:noAutofit/>
           </a:bodyPr>
           <a:lstStyle/>
@@ -9372,6 +9282,7 @@
           <a:lstStyle/>
           <a:p>
             <a:pPr algn="ctr"/>
+            <a:endParaRPr/>
           </a:p>
         </p:txBody>
       </p:sp>
@@ -9392,7 +9303,7 @@
           <a:noFill/>
         </p:spPr>
         <p:txBody>
-          <a:bodyPr wrap="none" lIns="0" rIns="0" tIns="0" bIns="0" anchor="t">
+          <a:bodyPr wrap="none" lIns="0" tIns="0" rIns="0" bIns="0" anchor="t">
             <a:noAutofit/>
           </a:bodyPr>
           <a:lstStyle/>
@@ -9437,7 +9348,7 @@
           <a:noFill/>
         </p:spPr>
         <p:txBody>
-          <a:bodyPr wrap="none" lIns="0" rIns="0" tIns="0" bIns="0" anchor="t">
+          <a:bodyPr wrap="none" lIns="0" tIns="0" rIns="0" bIns="0" anchor="t">
             <a:noAutofit/>
           </a:bodyPr>
           <a:lstStyle/>
@@ -9482,7 +9393,7 @@
           <a:noFill/>
         </p:spPr>
         <p:txBody>
-          <a:bodyPr wrap="none" lIns="0" rIns="0" tIns="0" bIns="0" anchor="t">
+          <a:bodyPr wrap="none" lIns="0" tIns="0" rIns="0" bIns="0" anchor="t">
             <a:noAutofit/>
           </a:bodyPr>
           <a:lstStyle/>
@@ -9555,6 +9466,7 @@
           <a:lstStyle/>
           <a:p>
             <a:pPr algn="ctr"/>
+            <a:endParaRPr/>
           </a:p>
         </p:txBody>
       </p:sp>
@@ -9575,7 +9487,7 @@
           <a:noFill/>
         </p:spPr>
         <p:txBody>
-          <a:bodyPr wrap="none" lIns="0" rIns="0" tIns="0" bIns="0" anchor="t">
+          <a:bodyPr wrap="none" lIns="0" tIns="0" rIns="0" bIns="0" anchor="t">
             <a:noAutofit/>
           </a:bodyPr>
           <a:lstStyle/>
@@ -9620,7 +9532,7 @@
           <a:noFill/>
         </p:spPr>
         <p:txBody>
-          <a:bodyPr wrap="none" lIns="0" rIns="0" tIns="0" bIns="0" anchor="t">
+          <a:bodyPr wrap="none" lIns="0" tIns="0" rIns="0" bIns="0" anchor="t">
             <a:noAutofit/>
           </a:bodyPr>
           <a:lstStyle/>
@@ -9665,7 +9577,7 @@
           <a:noFill/>
         </p:spPr>
         <p:txBody>
-          <a:bodyPr wrap="none" lIns="0" rIns="0" tIns="0" bIns="0" anchor="t">
+          <a:bodyPr wrap="none" lIns="0" tIns="0" rIns="0" bIns="0" anchor="t">
             <a:noAutofit/>
           </a:bodyPr>
           <a:lstStyle/>
@@ -9760,6 +9672,7 @@
           <a:lstStyle/>
           <a:p>
             <a:pPr algn="ctr"/>
+            <a:endParaRPr/>
           </a:p>
         </p:txBody>
       </p:sp>
@@ -9780,7 +9693,7 @@
           <a:noFill/>
         </p:spPr>
         <p:txBody>
-          <a:bodyPr wrap="none" lIns="0" rIns="0" tIns="0" bIns="0" anchor="t">
+          <a:bodyPr wrap="none" lIns="0" tIns="0" rIns="0" bIns="0" anchor="t">
             <a:noAutofit/>
           </a:bodyPr>
           <a:lstStyle/>
@@ -9825,7 +9738,7 @@
           <a:noFill/>
         </p:spPr>
         <p:txBody>
-          <a:bodyPr wrap="none" lIns="0" rIns="0" tIns="0" bIns="0" anchor="t">
+          <a:bodyPr wrap="none" lIns="0" tIns="0" rIns="0" bIns="0" anchor="t">
             <a:noAutofit/>
           </a:bodyPr>
           <a:lstStyle/>
@@ -9927,7 +9840,7 @@
           <a:noFill/>
         </p:spPr>
         <p:txBody>
-          <a:bodyPr wrap="none" lIns="0" rIns="0" tIns="0" bIns="0" anchor="t">
+          <a:bodyPr wrap="none" lIns="0" tIns="0" rIns="0" bIns="0" anchor="t">
             <a:noAutofit/>
           </a:bodyPr>
           <a:lstStyle/>
@@ -10066,6 +9979,7 @@
           <a:lstStyle/>
           <a:p>
             <a:pPr algn="ctr"/>
+            <a:endParaRPr/>
           </a:p>
         </p:txBody>
       </p:sp>
@@ -10382,7 +10296,7 @@
           <a:noFill/>
         </p:spPr>
         <p:txBody>
-          <a:bodyPr wrap="none" lIns="0" rIns="0" tIns="0" bIns="0" anchor="t">
+          <a:bodyPr wrap="none" lIns="0" tIns="0" rIns="0" bIns="0" anchor="t">
             <a:noAutofit/>
           </a:bodyPr>
           <a:lstStyle/>
@@ -10451,6 +10365,7 @@
           <a:lstStyle/>
           <a:p>
             <a:pPr algn="ctr"/>
+            <a:endParaRPr/>
           </a:p>
         </p:txBody>
       </p:sp>
@@ -10471,7 +10386,7 @@
           <a:noFill/>
         </p:spPr>
         <p:txBody>
-          <a:bodyPr wrap="none" lIns="0" rIns="0" tIns="0" bIns="0" anchor="t">
+          <a:bodyPr wrap="none" lIns="0" tIns="0" rIns="0" bIns="0" anchor="t">
             <a:noAutofit/>
           </a:bodyPr>
           <a:lstStyle/>
@@ -10562,6 +10477,7 @@
           <a:lstStyle/>
           <a:p>
             <a:pPr algn="ctr"/>
+            <a:endParaRPr/>
           </a:p>
         </p:txBody>
       </p:sp>
@@ -10582,7 +10498,7 @@
           <a:noFill/>
         </p:spPr>
         <p:txBody>
-          <a:bodyPr wrap="none" lIns="0" rIns="0" tIns="0" bIns="0" anchor="t">
+          <a:bodyPr wrap="none" lIns="0" tIns="0" rIns="0" bIns="0" anchor="t">
             <a:noAutofit/>
           </a:bodyPr>
           <a:lstStyle/>
@@ -10673,6 +10589,7 @@
           <a:lstStyle/>
           <a:p>
             <a:pPr algn="ctr"/>
+            <a:endParaRPr/>
           </a:p>
         </p:txBody>
       </p:sp>
@@ -10693,7 +10610,7 @@
           <a:noFill/>
         </p:spPr>
         <p:txBody>
-          <a:bodyPr wrap="none" lIns="0" rIns="0" tIns="0" bIns="0" anchor="t">
+          <a:bodyPr wrap="none" lIns="0" tIns="0" rIns="0" bIns="0" anchor="t">
             <a:noAutofit/>
           </a:bodyPr>
           <a:lstStyle/>
@@ -10817,7 +10734,7 @@
           <a:noFill/>
         </p:spPr>
         <p:txBody>
-          <a:bodyPr wrap="none" lIns="0" rIns="0" tIns="0" bIns="0" anchor="t">
+          <a:bodyPr wrap="none" lIns="0" tIns="0" rIns="0" bIns="0" anchor="t">
             <a:noAutofit/>
           </a:bodyPr>
           <a:lstStyle/>
@@ -10862,7 +10779,7 @@
           <a:noFill/>
         </p:spPr>
         <p:txBody>
-          <a:bodyPr wrap="none" lIns="0" rIns="0" tIns="0" bIns="0" anchor="t">
+          <a:bodyPr wrap="none" lIns="0" tIns="0" rIns="0" bIns="0" anchor="t">
             <a:noAutofit/>
           </a:bodyPr>
           <a:lstStyle/>
@@ -10899,7 +10816,7 @@
 </file>
 
 <file path=ppt/slides/slide13.xml><?xml version="1.0" encoding="utf-8"?>
-<p:sld xmlns:a="http://schemas.openxmlformats.org/drawingml/2006/main" xmlns:p="http://schemas.openxmlformats.org/presentationml/2006/main" xmlns:r="http://schemas.openxmlformats.org/officeDocument/2006/relationships">
+<p:sld xmlns:a="http://schemas.openxmlformats.org/drawingml/2006/main" xmlns:r="http://schemas.openxmlformats.org/officeDocument/2006/relationships" xmlns:p="http://schemas.openxmlformats.org/presentationml/2006/main">
   <p:cSld>
     <p:bg>
       <p:bgPr>
@@ -10915,7 +10832,14 @@
         <p:cNvGrpSpPr/>
         <p:nvPr/>
       </p:nvGrpSpPr>
-      <p:grpSpPr/>
+      <p:grpSpPr>
+        <a:xfrm>
+          <a:off x="0" y="0"/>
+          <a:ext cx="0" cy="0"/>
+          <a:chOff x="0" y="0"/>
+          <a:chExt cx="0" cy="0"/>
+        </a:xfrm>
+      </p:grpSpPr>
       <p:sp>
         <p:nvSpPr>
           <p:cNvPr id="2" name="TextBox 1"/>
@@ -10933,7 +10857,7 @@
           <a:noFill/>
         </p:spPr>
         <p:txBody>
-          <a:bodyPr wrap="none" lIns="0" rIns="0" tIns="0" bIns="0" anchor="t">
+          <a:bodyPr wrap="none" lIns="0" tIns="0" rIns="0" bIns="0" anchor="t">
             <a:noAutofit/>
           </a:bodyPr>
           <a:lstStyle/>
@@ -10978,7 +10902,7 @@
           <a:noFill/>
         </p:spPr>
         <p:txBody>
-          <a:bodyPr wrap="none" lIns="0" rIns="0" tIns="0" bIns="0" anchor="t">
+          <a:bodyPr wrap="none" lIns="0" tIns="0" rIns="0" bIns="0" anchor="t">
             <a:noAutofit/>
           </a:bodyPr>
           <a:lstStyle/>
@@ -11023,7 +10947,7 @@
           <a:noFill/>
         </p:spPr>
         <p:txBody>
-          <a:bodyPr wrap="none" lIns="0" rIns="0" tIns="0" bIns="0" anchor="t">
+          <a:bodyPr wrap="none" lIns="0" tIns="0" rIns="0" bIns="0" anchor="t">
             <a:noAutofit/>
           </a:bodyPr>
           <a:lstStyle/>
@@ -11131,6 +11055,7 @@
           <a:lstStyle/>
           <a:p>
             <a:pPr algn="ctr"/>
+            <a:endParaRPr/>
           </a:p>
         </p:txBody>
       </p:sp>
@@ -11175,6 +11100,7 @@
           <a:lstStyle/>
           <a:p>
             <a:pPr algn="ctr"/>
+            <a:endParaRPr/>
           </a:p>
         </p:txBody>
       </p:sp>
@@ -11195,7 +11121,7 @@
           <a:noFill/>
         </p:spPr>
         <p:txBody>
-          <a:bodyPr wrap="none" lIns="0" rIns="0" tIns="0" bIns="0" anchor="t">
+          <a:bodyPr wrap="none" lIns="0" tIns="0" rIns="0" bIns="0" anchor="t">
             <a:noAutofit/>
           </a:bodyPr>
           <a:lstStyle/>
@@ -11240,7 +11166,7 @@
           <a:noFill/>
         </p:spPr>
         <p:txBody>
-          <a:bodyPr wrap="none" lIns="0" rIns="0" tIns="0" bIns="0" anchor="t">
+          <a:bodyPr wrap="none" lIns="0" tIns="0" rIns="0" bIns="0" anchor="t">
             <a:noAutofit/>
           </a:bodyPr>
           <a:lstStyle/>
@@ -11285,7 +11211,7 @@
           <a:noFill/>
         </p:spPr>
         <p:txBody>
-          <a:bodyPr wrap="none" lIns="0" rIns="0" tIns="0" bIns="0" anchor="t">
+          <a:bodyPr wrap="none" lIns="0" tIns="0" rIns="0" bIns="0" anchor="t">
             <a:noAutofit/>
           </a:bodyPr>
           <a:lstStyle/>
@@ -11358,6 +11284,7 @@
           <a:lstStyle/>
           <a:p>
             <a:pPr algn="ctr"/>
+            <a:endParaRPr/>
           </a:p>
         </p:txBody>
       </p:sp>
@@ -11402,6 +11329,7 @@
           <a:lstStyle/>
           <a:p>
             <a:pPr algn="ctr"/>
+            <a:endParaRPr/>
           </a:p>
         </p:txBody>
       </p:sp>
@@ -11422,7 +11350,7 @@
           <a:noFill/>
         </p:spPr>
         <p:txBody>
-          <a:bodyPr wrap="none" lIns="0" rIns="0" tIns="0" bIns="0" anchor="t">
+          <a:bodyPr wrap="none" lIns="0" tIns="0" rIns="0" bIns="0" anchor="t">
             <a:noAutofit/>
           </a:bodyPr>
           <a:lstStyle/>
@@ -11467,7 +11395,7 @@
           <a:noFill/>
         </p:spPr>
         <p:txBody>
-          <a:bodyPr wrap="none" lIns="0" rIns="0" tIns="0" bIns="0" anchor="t">
+          <a:bodyPr wrap="none" lIns="0" tIns="0" rIns="0" bIns="0" anchor="t">
             <a:noAutofit/>
           </a:bodyPr>
           <a:lstStyle/>
@@ -11512,7 +11440,7 @@
           <a:noFill/>
         </p:spPr>
         <p:txBody>
-          <a:bodyPr wrap="none" lIns="0" rIns="0" tIns="0" bIns="0" anchor="t">
+          <a:bodyPr wrap="none" lIns="0" tIns="0" rIns="0" bIns="0" anchor="t">
             <a:noAutofit/>
           </a:bodyPr>
           <a:lstStyle/>
@@ -11585,6 +11513,7 @@
           <a:lstStyle/>
           <a:p>
             <a:pPr algn="ctr"/>
+            <a:endParaRPr/>
           </a:p>
         </p:txBody>
       </p:sp>
@@ -11629,6 +11558,7 @@
           <a:lstStyle/>
           <a:p>
             <a:pPr algn="ctr"/>
+            <a:endParaRPr/>
           </a:p>
         </p:txBody>
       </p:sp>
@@ -11649,7 +11579,7 @@
           <a:noFill/>
         </p:spPr>
         <p:txBody>
-          <a:bodyPr wrap="none" lIns="0" rIns="0" tIns="0" bIns="0" anchor="t">
+          <a:bodyPr wrap="none" lIns="0" tIns="0" rIns="0" bIns="0" anchor="t">
             <a:noAutofit/>
           </a:bodyPr>
           <a:lstStyle/>
@@ -11694,7 +11624,7 @@
           <a:noFill/>
         </p:spPr>
         <p:txBody>
-          <a:bodyPr wrap="none" lIns="0" rIns="0" tIns="0" bIns="0" anchor="t">
+          <a:bodyPr wrap="none" lIns="0" tIns="0" rIns="0" bIns="0" anchor="t">
             <a:noAutofit/>
           </a:bodyPr>
           <a:lstStyle/>
@@ -11739,7 +11669,7 @@
           <a:noFill/>
         </p:spPr>
         <p:txBody>
-          <a:bodyPr wrap="none" lIns="0" rIns="0" tIns="0" bIns="0" anchor="t">
+          <a:bodyPr wrap="none" lIns="0" tIns="0" rIns="0" bIns="0" anchor="t">
             <a:noAutofit/>
           </a:bodyPr>
           <a:lstStyle/>
@@ -11812,6 +11742,7 @@
           <a:lstStyle/>
           <a:p>
             <a:pPr algn="ctr"/>
+            <a:endParaRPr/>
           </a:p>
         </p:txBody>
       </p:sp>
@@ -11856,6 +11787,7 @@
           <a:lstStyle/>
           <a:p>
             <a:pPr algn="ctr"/>
+            <a:endParaRPr/>
           </a:p>
         </p:txBody>
       </p:sp>
@@ -11876,7 +11808,7 @@
           <a:noFill/>
         </p:spPr>
         <p:txBody>
-          <a:bodyPr wrap="none" lIns="0" rIns="0" tIns="0" bIns="0" anchor="t">
+          <a:bodyPr wrap="none" lIns="0" tIns="0" rIns="0" bIns="0" anchor="t">
             <a:noAutofit/>
           </a:bodyPr>
           <a:lstStyle/>
@@ -11921,7 +11853,7 @@
           <a:noFill/>
         </p:spPr>
         <p:txBody>
-          <a:bodyPr wrap="none" lIns="0" rIns="0" tIns="0" bIns="0" anchor="t">
+          <a:bodyPr wrap="none" lIns="0" tIns="0" rIns="0" bIns="0" anchor="t">
             <a:noAutofit/>
           </a:bodyPr>
           <a:lstStyle/>
@@ -11966,7 +11898,7 @@
           <a:noFill/>
         </p:spPr>
         <p:txBody>
-          <a:bodyPr wrap="none" lIns="0" rIns="0" tIns="0" bIns="0" anchor="t">
+          <a:bodyPr wrap="none" lIns="0" tIns="0" rIns="0" bIns="0" anchor="t">
             <a:noAutofit/>
           </a:bodyPr>
           <a:lstStyle/>
@@ -12039,6 +11971,7 @@
           <a:lstStyle/>
           <a:p>
             <a:pPr algn="ctr"/>
+            <a:endParaRPr/>
           </a:p>
         </p:txBody>
       </p:sp>
@@ -12083,6 +12016,7 @@
           <a:lstStyle/>
           <a:p>
             <a:pPr algn="ctr"/>
+            <a:endParaRPr/>
           </a:p>
         </p:txBody>
       </p:sp>
@@ -12103,7 +12037,7 @@
           <a:noFill/>
         </p:spPr>
         <p:txBody>
-          <a:bodyPr wrap="none" lIns="0" rIns="0" tIns="0" bIns="0" anchor="t">
+          <a:bodyPr wrap="none" lIns="0" tIns="0" rIns="0" bIns="0" anchor="t">
             <a:noAutofit/>
           </a:bodyPr>
           <a:lstStyle/>
@@ -12148,7 +12082,7 @@
           <a:noFill/>
         </p:spPr>
         <p:txBody>
-          <a:bodyPr wrap="none" lIns="0" rIns="0" tIns="0" bIns="0" anchor="t">
+          <a:bodyPr wrap="none" lIns="0" tIns="0" rIns="0" bIns="0" anchor="t">
             <a:noAutofit/>
           </a:bodyPr>
           <a:lstStyle/>
@@ -12193,7 +12127,7 @@
           <a:noFill/>
         </p:spPr>
         <p:txBody>
-          <a:bodyPr wrap="none" lIns="0" rIns="0" tIns="0" bIns="0" anchor="t">
+          <a:bodyPr wrap="none" lIns="0" tIns="0" rIns="0" bIns="0" anchor="t">
             <a:noAutofit/>
           </a:bodyPr>
           <a:lstStyle/>
@@ -12266,6 +12200,7 @@
           <a:lstStyle/>
           <a:p>
             <a:pPr algn="ctr"/>
+            <a:endParaRPr/>
           </a:p>
         </p:txBody>
       </p:sp>
@@ -12310,6 +12245,7 @@
           <a:lstStyle/>
           <a:p>
             <a:pPr algn="ctr"/>
+            <a:endParaRPr/>
           </a:p>
         </p:txBody>
       </p:sp>
@@ -12330,7 +12266,7 @@
           <a:noFill/>
         </p:spPr>
         <p:txBody>
-          <a:bodyPr wrap="none" lIns="0" rIns="0" tIns="0" bIns="0" anchor="t">
+          <a:bodyPr wrap="none" lIns="0" tIns="0" rIns="0" bIns="0" anchor="t">
             <a:noAutofit/>
           </a:bodyPr>
           <a:lstStyle/>
@@ -12375,7 +12311,7 @@
           <a:noFill/>
         </p:spPr>
         <p:txBody>
-          <a:bodyPr wrap="none" lIns="0" rIns="0" tIns="0" bIns="0" anchor="t">
+          <a:bodyPr wrap="none" lIns="0" tIns="0" rIns="0" bIns="0" anchor="t">
             <a:noAutofit/>
           </a:bodyPr>
           <a:lstStyle/>
@@ -12420,7 +12356,7 @@
           <a:noFill/>
         </p:spPr>
         <p:txBody>
-          <a:bodyPr wrap="none" lIns="0" rIns="0" tIns="0" bIns="0" anchor="t">
+          <a:bodyPr wrap="none" lIns="0" tIns="0" rIns="0" bIns="0" anchor="t">
             <a:noAutofit/>
           </a:bodyPr>
           <a:lstStyle/>
@@ -12493,6 +12429,7 @@
           <a:lstStyle/>
           <a:p>
             <a:pPr algn="ctr"/>
+            <a:endParaRPr/>
           </a:p>
         </p:txBody>
       </p:sp>
@@ -12537,6 +12474,7 @@
           <a:lstStyle/>
           <a:p>
             <a:pPr algn="ctr"/>
+            <a:endParaRPr/>
           </a:p>
         </p:txBody>
       </p:sp>
@@ -12557,7 +12495,7 @@
           <a:noFill/>
         </p:spPr>
         <p:txBody>
-          <a:bodyPr wrap="none" lIns="0" rIns="0" tIns="0" bIns="0" anchor="t">
+          <a:bodyPr wrap="none" lIns="0" tIns="0" rIns="0" bIns="0" anchor="t">
             <a:noAutofit/>
           </a:bodyPr>
           <a:lstStyle/>
@@ -12602,7 +12540,7 @@
           <a:noFill/>
         </p:spPr>
         <p:txBody>
-          <a:bodyPr wrap="none" lIns="0" rIns="0" tIns="0" bIns="0" anchor="t">
+          <a:bodyPr wrap="none" lIns="0" tIns="0" rIns="0" bIns="0" anchor="t">
             <a:noAutofit/>
           </a:bodyPr>
           <a:lstStyle/>
@@ -12704,7 +12642,7 @@
           <a:noFill/>
         </p:spPr>
         <p:txBody>
-          <a:bodyPr wrap="none" lIns="0" rIns="0" tIns="0" bIns="0" anchor="t">
+          <a:bodyPr wrap="none" lIns="0" tIns="0" rIns="0" bIns="0" anchor="t">
             <a:noAutofit/>
           </a:bodyPr>
           <a:lstStyle/>
@@ -12749,7 +12687,7 @@
           <a:noFill/>
         </p:spPr>
         <p:txBody>
-          <a:bodyPr wrap="none" lIns="0" rIns="0" tIns="0" bIns="0" anchor="t">
+          <a:bodyPr wrap="none" lIns="0" tIns="0" rIns="0" bIns="0" anchor="t">
             <a:noAutofit/>
           </a:bodyPr>
           <a:lstStyle/>
@@ -12786,7 +12724,7 @@
 </file>
 
 <file path=ppt/slides/slide14.xml><?xml version="1.0" encoding="utf-8"?>
-<p:sld xmlns:a="http://schemas.openxmlformats.org/drawingml/2006/main" xmlns:p="http://schemas.openxmlformats.org/presentationml/2006/main" xmlns:r="http://schemas.openxmlformats.org/officeDocument/2006/relationships">
+<p:sld xmlns:a="http://schemas.openxmlformats.org/drawingml/2006/main" xmlns:r="http://schemas.openxmlformats.org/officeDocument/2006/relationships" xmlns:p="http://schemas.openxmlformats.org/presentationml/2006/main">
   <p:cSld>
     <p:bg>
       <p:bgPr>
@@ -12802,7 +12740,14 @@
         <p:cNvGrpSpPr/>
         <p:nvPr/>
       </p:nvGrpSpPr>
-      <p:grpSpPr/>
+      <p:grpSpPr>
+        <a:xfrm>
+          <a:off x="0" y="0"/>
+          <a:ext cx="0" cy="0"/>
+          <a:chOff x="0" y="0"/>
+          <a:chExt cx="0" cy="0"/>
+        </a:xfrm>
+      </p:grpSpPr>
       <p:sp>
         <p:nvSpPr>
           <p:cNvPr id="2" name="TextBox 1"/>
@@ -12820,7 +12765,7 @@
           <a:noFill/>
         </p:spPr>
         <p:txBody>
-          <a:bodyPr wrap="none" lIns="0" rIns="0" tIns="0" bIns="0" anchor="t">
+          <a:bodyPr wrap="none" lIns="0" tIns="0" rIns="0" bIns="0" anchor="t">
             <a:noAutofit/>
           </a:bodyPr>
           <a:lstStyle/>
@@ -12865,7 +12810,7 @@
           <a:noFill/>
         </p:spPr>
         <p:txBody>
-          <a:bodyPr wrap="none" lIns="0" rIns="0" tIns="0" bIns="0" anchor="t">
+          <a:bodyPr wrap="none" lIns="0" tIns="0" rIns="0" bIns="0" anchor="t">
             <a:noAutofit/>
           </a:bodyPr>
           <a:lstStyle/>
@@ -12973,6 +12918,7 @@
           <a:lstStyle/>
           <a:p>
             <a:pPr algn="ctr"/>
+            <a:endParaRPr/>
           </a:p>
         </p:txBody>
       </p:sp>
@@ -12993,7 +12939,7 @@
           <a:noFill/>
         </p:spPr>
         <p:txBody>
-          <a:bodyPr wrap="none" lIns="0" rIns="0" tIns="0" bIns="0" anchor="t">
+          <a:bodyPr wrap="none" lIns="0" tIns="0" rIns="0" bIns="0" anchor="t">
             <a:noAutofit/>
           </a:bodyPr>
           <a:lstStyle/>
@@ -13073,7 +13019,7 @@
           <a:noFill/>
         </p:spPr>
         <p:txBody>
-          <a:bodyPr wrap="none" lIns="0" rIns="0" tIns="0" bIns="0" anchor="t">
+          <a:bodyPr wrap="none" lIns="0" tIns="0" rIns="0" bIns="0" anchor="t">
             <a:noAutofit/>
           </a:bodyPr>
           <a:lstStyle/>
@@ -13118,7 +13064,7 @@
           <a:noFill/>
         </p:spPr>
         <p:txBody>
-          <a:bodyPr wrap="none" lIns="0" rIns="0" tIns="0" bIns="0" anchor="t">
+          <a:bodyPr wrap="none" lIns="0" tIns="0" rIns="0" bIns="0" anchor="t">
             <a:noAutofit/>
           </a:bodyPr>
           <a:lstStyle/>
@@ -13198,7 +13144,7 @@
           <a:noFill/>
         </p:spPr>
         <p:txBody>
-          <a:bodyPr wrap="none" lIns="0" rIns="0" tIns="0" bIns="0" anchor="t">
+          <a:bodyPr wrap="none" lIns="0" tIns="0" rIns="0" bIns="0" anchor="t">
             <a:noAutofit/>
           </a:bodyPr>
           <a:lstStyle/>
@@ -13243,7 +13189,7 @@
           <a:noFill/>
         </p:spPr>
         <p:txBody>
-          <a:bodyPr wrap="none" lIns="0" rIns="0" tIns="0" bIns="0" anchor="t">
+          <a:bodyPr wrap="none" lIns="0" tIns="0" rIns="0" bIns="0" anchor="t">
             <a:noAutofit/>
           </a:bodyPr>
           <a:lstStyle/>
@@ -13323,7 +13269,7 @@
           <a:noFill/>
         </p:spPr>
         <p:txBody>
-          <a:bodyPr wrap="none" lIns="0" rIns="0" tIns="0" bIns="0" anchor="t">
+          <a:bodyPr wrap="none" lIns="0" tIns="0" rIns="0" bIns="0" anchor="t">
             <a:noAutofit/>
           </a:bodyPr>
           <a:lstStyle/>
@@ -13368,7 +13314,7 @@
           <a:noFill/>
         </p:spPr>
         <p:txBody>
-          <a:bodyPr wrap="none" lIns="0" rIns="0" tIns="0" bIns="0" anchor="t">
+          <a:bodyPr wrap="none" lIns="0" tIns="0" rIns="0" bIns="0" anchor="t">
             <a:noAutofit/>
           </a:bodyPr>
           <a:lstStyle/>
@@ -13448,7 +13394,7 @@
           <a:noFill/>
         </p:spPr>
         <p:txBody>
-          <a:bodyPr wrap="none" lIns="0" rIns="0" tIns="0" bIns="0" anchor="t">
+          <a:bodyPr wrap="none" lIns="0" tIns="0" rIns="0" bIns="0" anchor="t">
             <a:noAutofit/>
           </a:bodyPr>
           <a:lstStyle/>
@@ -13493,7 +13439,7 @@
           <a:noFill/>
         </p:spPr>
         <p:txBody>
-          <a:bodyPr wrap="none" lIns="0" rIns="0" tIns="0" bIns="0" anchor="t">
+          <a:bodyPr wrap="none" lIns="0" tIns="0" rIns="0" bIns="0" anchor="t">
             <a:noAutofit/>
           </a:bodyPr>
           <a:lstStyle/>
@@ -13573,7 +13519,7 @@
           <a:noFill/>
         </p:spPr>
         <p:txBody>
-          <a:bodyPr wrap="none" lIns="0" rIns="0" tIns="0" bIns="0" anchor="t">
+          <a:bodyPr wrap="none" lIns="0" tIns="0" rIns="0" bIns="0" anchor="t">
             <a:noAutofit/>
           </a:bodyPr>
           <a:lstStyle/>
@@ -13618,7 +13564,7 @@
           <a:noFill/>
         </p:spPr>
         <p:txBody>
-          <a:bodyPr wrap="none" lIns="0" rIns="0" tIns="0" bIns="0" anchor="t">
+          <a:bodyPr wrap="none" lIns="0" tIns="0" rIns="0" bIns="0" anchor="t">
             <a:noAutofit/>
           </a:bodyPr>
           <a:lstStyle/>
@@ -13698,7 +13644,7 @@
           <a:noFill/>
         </p:spPr>
         <p:txBody>
-          <a:bodyPr wrap="none" lIns="0" rIns="0" tIns="0" bIns="0" anchor="t">
+          <a:bodyPr wrap="none" lIns="0" tIns="0" rIns="0" bIns="0" anchor="t">
             <a:noAutofit/>
           </a:bodyPr>
           <a:lstStyle/>
@@ -13743,7 +13689,7 @@
           <a:noFill/>
         </p:spPr>
         <p:txBody>
-          <a:bodyPr wrap="none" lIns="0" rIns="0" tIns="0" bIns="0" anchor="t">
+          <a:bodyPr wrap="none" lIns="0" tIns="0" rIns="0" bIns="0" anchor="t">
             <a:noAutofit/>
           </a:bodyPr>
           <a:lstStyle/>
@@ -13823,7 +13769,7 @@
           <a:noFill/>
         </p:spPr>
         <p:txBody>
-          <a:bodyPr wrap="none" lIns="0" rIns="0" tIns="0" bIns="0" anchor="t">
+          <a:bodyPr wrap="none" lIns="0" tIns="0" rIns="0" bIns="0" anchor="t">
             <a:noAutofit/>
           </a:bodyPr>
           <a:lstStyle/>
@@ -13868,7 +13814,7 @@
           <a:noFill/>
         </p:spPr>
         <p:txBody>
-          <a:bodyPr wrap="none" lIns="0" rIns="0" tIns="0" bIns="0" anchor="t">
+          <a:bodyPr wrap="none" lIns="0" tIns="0" rIns="0" bIns="0" anchor="t">
             <a:noAutofit/>
           </a:bodyPr>
           <a:lstStyle/>
@@ -13948,7 +13894,7 @@
           <a:noFill/>
         </p:spPr>
         <p:txBody>
-          <a:bodyPr wrap="none" lIns="0" rIns="0" tIns="0" bIns="0" anchor="t">
+          <a:bodyPr wrap="none" lIns="0" tIns="0" rIns="0" bIns="0" anchor="t">
             <a:noAutofit/>
           </a:bodyPr>
           <a:lstStyle/>
@@ -14021,6 +13967,7 @@
           <a:lstStyle/>
           <a:p>
             <a:pPr algn="ctr"/>
+            <a:endParaRPr/>
           </a:p>
         </p:txBody>
       </p:sp>
@@ -14041,7 +13988,7 @@
           <a:noFill/>
         </p:spPr>
         <p:txBody>
-          <a:bodyPr wrap="none" lIns="0" rIns="0" tIns="0" bIns="0" anchor="t">
+          <a:bodyPr wrap="none" lIns="0" tIns="0" rIns="0" bIns="0" anchor="t">
             <a:noAutofit/>
           </a:bodyPr>
           <a:lstStyle/>
@@ -14086,7 +14033,7 @@
           <a:noFill/>
         </p:spPr>
         <p:txBody>
-          <a:bodyPr wrap="none" lIns="0" rIns="0" tIns="0" bIns="0" anchor="t">
+          <a:bodyPr wrap="none" lIns="0" tIns="0" rIns="0" bIns="0" anchor="t">
             <a:noAutofit/>
           </a:bodyPr>
           <a:lstStyle/>
@@ -14131,7 +14078,7 @@
           <a:noFill/>
         </p:spPr>
         <p:txBody>
-          <a:bodyPr wrap="none" lIns="0" rIns="0" tIns="0" bIns="0" anchor="t">
+          <a:bodyPr wrap="none" lIns="0" tIns="0" rIns="0" bIns="0" anchor="t">
             <a:noAutofit/>
           </a:bodyPr>
           <a:lstStyle/>
@@ -14226,6 +14173,7 @@
           <a:lstStyle/>
           <a:p>
             <a:pPr algn="ctr"/>
+            <a:endParaRPr/>
           </a:p>
         </p:txBody>
       </p:sp>
@@ -14542,7 +14490,7 @@
           <a:noFill/>
         </p:spPr>
         <p:txBody>
-          <a:bodyPr wrap="none" lIns="0" rIns="0" tIns="0" bIns="0" anchor="t">
+          <a:bodyPr wrap="none" lIns="0" tIns="0" rIns="0" bIns="0" anchor="t">
             <a:noAutofit/>
           </a:bodyPr>
           <a:lstStyle/>
@@ -14573,142 +14521,6 @@
       <p:pic>
         <p:nvPicPr>
           <p:cNvPr id="44" name="Picture 43" descr="jetbrains.png"/>
-          <p:cNvPicPr>
-            <a:picLocks noChangeAspect="1"/>
-          </p:cNvPicPr>
-          <p:nvPr/>
-        </p:nvPicPr>
-        <p:blipFill>
-          <a:blip r:embed="rId2"/>
-          <a:stretch>
-            <a:fillRect/>
-          </a:stretch>
-        </p:blipFill>
-        <p:spPr>
-          <a:xfrm>
-            <a:off x="7924171" y="3855338"/>
-            <a:ext cx="658368" cy="659190"/>
-          </a:xfrm>
-          <a:prstGeom prst="rect">
-            <a:avLst/>
-          </a:prstGeom>
-        </p:spPr>
-      </p:pic>
-      <p:sp>
-        <p:nvSpPr>
-          <p:cNvPr id="45" name="TextBox 44"/>
-          <p:cNvSpPr txBox="1"/>
-          <p:nvPr/>
-        </p:nvSpPr>
-        <p:spPr>
-          <a:xfrm>
-            <a:off x="8939155" y="3886611"/>
-            <a:ext cx="2283549" cy="215138"/>
-          </a:xfrm>
-          <a:prstGeom prst="rect">
-            <a:avLst/>
-          </a:prstGeom>
-          <a:noFill/>
-        </p:spPr>
-        <p:txBody>
-          <a:bodyPr wrap="none" lIns="0" rIns="0" tIns="0" bIns="0" anchor="t">
-            <a:noAutofit/>
-          </a:bodyPr>
-          <a:lstStyle/>
-          <a:p>
-            <a:pPr algn="l">
-              <a:lnSpc>
-                <a:spcPts val="1550"/>
-              </a:lnSpc>
-              <a:spcBef>
-                <a:spcPts val="0"/>
-              </a:spcBef>
-              <a:spcAft>
-                <a:spcPts val="0"/>
-              </a:spcAft>
-            </a:pPr>
-            <a:r>
-              <a:rPr sz="1250" spc="-13">
-                <a:solidFill>
-                  <a:srgbClr val="E6EDF3"/>
-                </a:solidFill>
-                <a:latin typeface="Geist Medium"/>
-              </a:rPr>
-              <a:t>JetBrains</a:t>
-            </a:r>
-          </a:p>
-        </p:txBody>
-      </p:sp>
-      <p:sp>
-        <p:nvSpPr>
-          <p:cNvPr id="46" name="TextBox 45"/>
-          <p:cNvSpPr txBox="1"/>
-          <p:nvPr/>
-        </p:nvSpPr>
-        <p:spPr>
-          <a:xfrm>
-            <a:off x="8939155" y="4120037"/>
-            <a:ext cx="2283549" cy="381508"/>
-          </a:xfrm>
-          <a:prstGeom prst="rect">
-            <a:avLst/>
-          </a:prstGeom>
-          <a:noFill/>
-        </p:spPr>
-        <p:txBody>
-          <a:bodyPr wrap="none" lIns="0" rIns="0" tIns="0" bIns="0" anchor="t">
-            <a:noAutofit/>
-          </a:bodyPr>
-          <a:lstStyle/>
-          <a:p>
-            <a:pPr algn="l">
-              <a:lnSpc>
-                <a:spcPts val="1430"/>
-              </a:lnSpc>
-              <a:spcBef>
-                <a:spcPts val="0"/>
-              </a:spcBef>
-              <a:spcAft>
-                <a:spcPts val="0"/>
-              </a:spcAft>
-            </a:pPr>
-            <a:r>
-              <a:rPr sz="1100">
-                <a:solidFill>
-                  <a:srgbClr val="AAB3BD"/>
-                </a:solidFill>
-                <a:latin typeface="Geist"/>
-              </a:rPr>
-              <a:t>All-product licences for core</a:t>
-            </a:r>
-          </a:p>
-          <a:p>
-            <a:pPr algn="l">
-              <a:lnSpc>
-                <a:spcPts val="1430"/>
-              </a:lnSpc>
-              <a:spcBef>
-                <a:spcPts val="0"/>
-              </a:spcBef>
-              <a:spcAft>
-                <a:spcPts val="0"/>
-              </a:spcAft>
-            </a:pPr>
-            <a:r>
-              <a:rPr sz="1100">
-                <a:solidFill>
-                  <a:srgbClr val="AAB3BD"/>
-                </a:solidFill>
-                <a:latin typeface="Geist"/>
-              </a:rPr>
-              <a:t>maintainers</a:t>
-            </a:r>
-          </a:p>
-        </p:txBody>
-      </p:sp>
-      <p:pic>
-        <p:nvPicPr>
-          <p:cNvPr id="47" name="Picture 46" descr="center_emblem_cream.png"/>
           <p:cNvPicPr>
             <a:picLocks noChangeAspect="1"/>
           </p:cNvPicPr>
@@ -14722,6 +14534,142 @@
         </p:blipFill>
         <p:spPr>
           <a:xfrm>
+            <a:off x="7924171" y="3855338"/>
+            <a:ext cx="658368" cy="659190"/>
+          </a:xfrm>
+          <a:prstGeom prst="rect">
+            <a:avLst/>
+          </a:prstGeom>
+        </p:spPr>
+      </p:pic>
+      <p:sp>
+        <p:nvSpPr>
+          <p:cNvPr id="45" name="TextBox 44"/>
+          <p:cNvSpPr txBox="1"/>
+          <p:nvPr/>
+        </p:nvSpPr>
+        <p:spPr>
+          <a:xfrm>
+            <a:off x="8939155" y="3886611"/>
+            <a:ext cx="2283549" cy="215138"/>
+          </a:xfrm>
+          <a:prstGeom prst="rect">
+            <a:avLst/>
+          </a:prstGeom>
+          <a:noFill/>
+        </p:spPr>
+        <p:txBody>
+          <a:bodyPr wrap="none" lIns="0" tIns="0" rIns="0" bIns="0" anchor="t">
+            <a:noAutofit/>
+          </a:bodyPr>
+          <a:lstStyle/>
+          <a:p>
+            <a:pPr algn="l">
+              <a:lnSpc>
+                <a:spcPts val="1550"/>
+              </a:lnSpc>
+              <a:spcBef>
+                <a:spcPts val="0"/>
+              </a:spcBef>
+              <a:spcAft>
+                <a:spcPts val="0"/>
+              </a:spcAft>
+            </a:pPr>
+            <a:r>
+              <a:rPr sz="1250" spc="-13">
+                <a:solidFill>
+                  <a:srgbClr val="E6EDF3"/>
+                </a:solidFill>
+                <a:latin typeface="Geist Medium"/>
+              </a:rPr>
+              <a:t>JetBrains</a:t>
+            </a:r>
+          </a:p>
+        </p:txBody>
+      </p:sp>
+      <p:sp>
+        <p:nvSpPr>
+          <p:cNvPr id="46" name="TextBox 45"/>
+          <p:cNvSpPr txBox="1"/>
+          <p:nvPr/>
+        </p:nvSpPr>
+        <p:spPr>
+          <a:xfrm>
+            <a:off x="8939155" y="4120037"/>
+            <a:ext cx="2283549" cy="381508"/>
+          </a:xfrm>
+          <a:prstGeom prst="rect">
+            <a:avLst/>
+          </a:prstGeom>
+          <a:noFill/>
+        </p:spPr>
+        <p:txBody>
+          <a:bodyPr wrap="none" lIns="0" tIns="0" rIns="0" bIns="0" anchor="t">
+            <a:noAutofit/>
+          </a:bodyPr>
+          <a:lstStyle/>
+          <a:p>
+            <a:pPr algn="l">
+              <a:lnSpc>
+                <a:spcPts val="1430"/>
+              </a:lnSpc>
+              <a:spcBef>
+                <a:spcPts val="0"/>
+              </a:spcBef>
+              <a:spcAft>
+                <a:spcPts val="0"/>
+              </a:spcAft>
+            </a:pPr>
+            <a:r>
+              <a:rPr sz="1100">
+                <a:solidFill>
+                  <a:srgbClr val="AAB3BD"/>
+                </a:solidFill>
+                <a:latin typeface="Geist"/>
+              </a:rPr>
+              <a:t>All-product licences for core</a:t>
+            </a:r>
+          </a:p>
+          <a:p>
+            <a:pPr algn="l">
+              <a:lnSpc>
+                <a:spcPts val="1430"/>
+              </a:lnSpc>
+              <a:spcBef>
+                <a:spcPts val="0"/>
+              </a:spcBef>
+              <a:spcAft>
+                <a:spcPts val="0"/>
+              </a:spcAft>
+            </a:pPr>
+            <a:r>
+              <a:rPr sz="1100">
+                <a:solidFill>
+                  <a:srgbClr val="AAB3BD"/>
+                </a:solidFill>
+                <a:latin typeface="Geist"/>
+              </a:rPr>
+              <a:t>maintainers</a:t>
+            </a:r>
+          </a:p>
+        </p:txBody>
+      </p:sp>
+      <p:pic>
+        <p:nvPicPr>
+          <p:cNvPr id="47" name="Picture 46" descr="center_emblem_cream.png"/>
+          <p:cNvPicPr>
+            <a:picLocks noChangeAspect="1"/>
+          </p:cNvPicPr>
+          <p:nvPr/>
+        </p:nvPicPr>
+        <p:blipFill>
+          <a:blip r:embed="rId4"/>
+          <a:stretch>
+            <a:fillRect/>
+          </a:stretch>
+        </p:blipFill>
+        <p:spPr>
+          <a:xfrm>
             <a:off x="7860163" y="4807137"/>
             <a:ext cx="786384" cy="662410"/>
           </a:xfrm>
@@ -14747,7 +14695,7 @@
           <a:noFill/>
         </p:spPr>
         <p:txBody>
-          <a:bodyPr wrap="none" lIns="0" rIns="0" tIns="0" bIns="0" anchor="t">
+          <a:bodyPr wrap="none" lIns="0" tIns="0" rIns="0" bIns="0" anchor="t">
             <a:noAutofit/>
           </a:bodyPr>
           <a:lstStyle/>
@@ -14792,7 +14740,7 @@
           <a:noFill/>
         </p:spPr>
         <p:txBody>
-          <a:bodyPr wrap="none" lIns="0" rIns="0" tIns="0" bIns="0" anchor="t">
+          <a:bodyPr wrap="none" lIns="0" tIns="0" rIns="0" bIns="0" anchor="t">
             <a:noAutofit/>
           </a:bodyPr>
           <a:lstStyle/>
@@ -14872,7 +14820,7 @@
           <a:noFill/>
         </p:spPr>
         <p:txBody>
-          <a:bodyPr wrap="none" lIns="0" rIns="0" tIns="0" bIns="0" anchor="t">
+          <a:bodyPr wrap="none" lIns="0" tIns="0" rIns="0" bIns="0" anchor="t">
             <a:noAutofit/>
           </a:bodyPr>
           <a:lstStyle/>
@@ -14917,7 +14865,7 @@
           <a:noFill/>
         </p:spPr>
         <p:txBody>
-          <a:bodyPr wrap="none" lIns="0" rIns="0" tIns="0" bIns="0" anchor="t">
+          <a:bodyPr wrap="none" lIns="0" tIns="0" rIns="0" bIns="0" anchor="t">
             <a:noAutofit/>
           </a:bodyPr>
           <a:lstStyle/>
@@ -14954,7 +14902,7 @@
 </file>
 
 <file path=ppt/slides/slide15.xml><?xml version="1.0" encoding="utf-8"?>
-<p:sld xmlns:a="http://schemas.openxmlformats.org/drawingml/2006/main" xmlns:p="http://schemas.openxmlformats.org/presentationml/2006/main" xmlns:r="http://schemas.openxmlformats.org/officeDocument/2006/relationships">
+<p:sld xmlns:a="http://schemas.openxmlformats.org/drawingml/2006/main" xmlns:r="http://schemas.openxmlformats.org/officeDocument/2006/relationships" xmlns:p="http://schemas.openxmlformats.org/presentationml/2006/main">
   <p:cSld>
     <p:bg>
       <p:bgPr>
@@ -14970,7 +14918,14 @@
         <p:cNvGrpSpPr/>
         <p:nvPr/>
       </p:nvGrpSpPr>
-      <p:grpSpPr/>
+      <p:grpSpPr>
+        <a:xfrm>
+          <a:off x="0" y="0"/>
+          <a:ext cx="0" cy="0"/>
+          <a:chOff x="0" y="0"/>
+          <a:chExt cx="0" cy="0"/>
+        </a:xfrm>
+      </p:grpSpPr>
       <p:sp>
         <p:nvSpPr>
           <p:cNvPr id="2" name="TextBox 1"/>
@@ -14988,7 +14943,7 @@
           <a:noFill/>
         </p:spPr>
         <p:txBody>
-          <a:bodyPr wrap="none" lIns="0" rIns="0" tIns="0" bIns="0" anchor="t">
+          <a:bodyPr wrap="none" lIns="0" tIns="0" rIns="0" bIns="0" anchor="t">
             <a:noAutofit/>
           </a:bodyPr>
           <a:lstStyle/>
@@ -15033,7 +14988,7 @@
           <a:noFill/>
         </p:spPr>
         <p:txBody>
-          <a:bodyPr wrap="none" lIns="0" rIns="0" tIns="0" bIns="0" anchor="t">
+          <a:bodyPr wrap="none" lIns="0" tIns="0" rIns="0" bIns="0" anchor="t">
             <a:noAutofit/>
           </a:bodyPr>
           <a:lstStyle/>
@@ -15141,6 +15096,7 @@
           <a:lstStyle/>
           <a:p>
             <a:pPr algn="ctr"/>
+            <a:endParaRPr/>
           </a:p>
         </p:txBody>
       </p:sp>
@@ -15185,6 +15141,7 @@
           <a:lstStyle/>
           <a:p>
             <a:pPr algn="ctr"/>
+            <a:endParaRPr/>
           </a:p>
         </p:txBody>
       </p:sp>
@@ -15205,7 +15162,7 @@
           <a:noFill/>
         </p:spPr>
         <p:txBody>
-          <a:bodyPr wrap="none" lIns="0" rIns="0" tIns="0" bIns="0" anchor="t">
+          <a:bodyPr wrap="none" lIns="0" tIns="0" rIns="0" bIns="0" anchor="t">
             <a:noAutofit/>
           </a:bodyPr>
           <a:lstStyle/>
@@ -15250,7 +15207,7 @@
           <a:noFill/>
         </p:spPr>
         <p:txBody>
-          <a:bodyPr wrap="none" lIns="0" rIns="0" tIns="0" bIns="0" anchor="t">
+          <a:bodyPr wrap="none" lIns="0" tIns="0" rIns="0" bIns="0" anchor="t">
             <a:noAutofit/>
           </a:bodyPr>
           <a:lstStyle/>
@@ -15433,6 +15390,7 @@
           <a:lstStyle/>
           <a:p>
             <a:pPr algn="ctr"/>
+            <a:endParaRPr/>
           </a:p>
         </p:txBody>
       </p:sp>
@@ -15477,6 +15435,7 @@
           <a:lstStyle/>
           <a:p>
             <a:pPr algn="ctr"/>
+            <a:endParaRPr/>
           </a:p>
         </p:txBody>
       </p:sp>
@@ -15497,7 +15456,7 @@
           <a:noFill/>
         </p:spPr>
         <p:txBody>
-          <a:bodyPr wrap="none" lIns="0" rIns="0" tIns="0" bIns="0" anchor="t">
+          <a:bodyPr wrap="none" lIns="0" tIns="0" rIns="0" bIns="0" anchor="t">
             <a:noAutofit/>
           </a:bodyPr>
           <a:lstStyle/>
@@ -15542,7 +15501,7 @@
           <a:noFill/>
         </p:spPr>
         <p:txBody>
-          <a:bodyPr wrap="none" lIns="0" rIns="0" tIns="0" bIns="0" anchor="t">
+          <a:bodyPr wrap="none" lIns="0" tIns="0" rIns="0" bIns="0" anchor="t">
             <a:noAutofit/>
           </a:bodyPr>
           <a:lstStyle/>
@@ -15703,6 +15662,7 @@
           <a:lstStyle/>
           <a:p>
             <a:pPr algn="ctr"/>
+            <a:endParaRPr/>
           </a:p>
         </p:txBody>
       </p:sp>
@@ -15747,6 +15707,7 @@
           <a:lstStyle/>
           <a:p>
             <a:pPr algn="ctr"/>
+            <a:endParaRPr/>
           </a:p>
         </p:txBody>
       </p:sp>
@@ -15767,7 +15728,7 @@
           <a:noFill/>
         </p:spPr>
         <p:txBody>
-          <a:bodyPr wrap="none" lIns="0" rIns="0" tIns="0" bIns="0" anchor="t">
+          <a:bodyPr wrap="none" lIns="0" tIns="0" rIns="0" bIns="0" anchor="t">
             <a:noAutofit/>
           </a:bodyPr>
           <a:lstStyle/>
@@ -15812,7 +15773,7 @@
           <a:noFill/>
         </p:spPr>
         <p:txBody>
-          <a:bodyPr wrap="none" lIns="0" rIns="0" tIns="0" bIns="0" anchor="t">
+          <a:bodyPr wrap="none" lIns="0" tIns="0" rIns="0" bIns="0" anchor="t">
             <a:noAutofit/>
           </a:bodyPr>
           <a:lstStyle/>
@@ -15984,6 +15945,7 @@
           <a:lstStyle/>
           <a:p>
             <a:pPr algn="ctr"/>
+            <a:endParaRPr/>
           </a:p>
         </p:txBody>
       </p:sp>
@@ -16030,6 +15992,7 @@
           <a:lstStyle/>
           <a:p>
             <a:pPr algn="ctr"/>
+            <a:endParaRPr/>
           </a:p>
         </p:txBody>
       </p:sp>
@@ -16076,6 +16039,7 @@
           <a:lstStyle/>
           <a:p>
             <a:pPr algn="ctr"/>
+            <a:endParaRPr/>
           </a:p>
         </p:txBody>
       </p:sp>
@@ -16096,7 +16060,7 @@
           <a:noFill/>
         </p:spPr>
         <p:txBody>
-          <a:bodyPr wrap="none" lIns="0" rIns="0" tIns="0" bIns="0" anchor="t">
+          <a:bodyPr wrap="none" lIns="0" tIns="0" rIns="0" bIns="0" anchor="t">
             <a:noAutofit/>
           </a:bodyPr>
           <a:lstStyle/>
@@ -16141,7 +16105,7 @@
           <a:noFill/>
         </p:spPr>
         <p:txBody>
-          <a:bodyPr wrap="none" lIns="0" rIns="0" tIns="0" bIns="0" anchor="t">
+          <a:bodyPr wrap="none" lIns="0" tIns="0" rIns="0" bIns="0" anchor="t">
             <a:noAutofit/>
           </a:bodyPr>
           <a:lstStyle/>
@@ -16186,7 +16150,7 @@
           <a:noFill/>
         </p:spPr>
         <p:txBody>
-          <a:bodyPr wrap="none" lIns="0" rIns="0" tIns="0" bIns="0" anchor="t">
+          <a:bodyPr wrap="none" lIns="0" tIns="0" rIns="0" bIns="0" anchor="t">
             <a:noAutofit/>
           </a:bodyPr>
           <a:lstStyle/>
@@ -16266,7 +16230,7 @@
           <a:noFill/>
         </p:spPr>
         <p:txBody>
-          <a:bodyPr wrap="none" lIns="0" rIns="0" tIns="0" bIns="0" anchor="t">
+          <a:bodyPr wrap="none" lIns="0" tIns="0" rIns="0" bIns="0" anchor="t">
             <a:noAutofit/>
           </a:bodyPr>
           <a:lstStyle/>
@@ -16311,7 +16275,7 @@
           <a:noFill/>
         </p:spPr>
         <p:txBody>
-          <a:bodyPr wrap="none" lIns="0" rIns="0" tIns="0" bIns="0" anchor="t">
+          <a:bodyPr wrap="none" lIns="0" tIns="0" rIns="0" bIns="0" anchor="t">
             <a:noAutofit/>
           </a:bodyPr>
           <a:lstStyle/>
@@ -16348,7 +16312,7 @@
 </file>
 
 <file path=ppt/slides/slide2.xml><?xml version="1.0" encoding="utf-8"?>
-<p:sld xmlns:a="http://schemas.openxmlformats.org/drawingml/2006/main" xmlns:p="http://schemas.openxmlformats.org/presentationml/2006/main" xmlns:r="http://schemas.openxmlformats.org/officeDocument/2006/relationships">
+<p:sld xmlns:a="http://schemas.openxmlformats.org/drawingml/2006/main" xmlns:r="http://schemas.openxmlformats.org/officeDocument/2006/relationships" xmlns:p="http://schemas.openxmlformats.org/presentationml/2006/main">
   <p:cSld>
     <p:bg>
       <p:bgPr>
@@ -16364,7 +16328,14 @@
         <p:cNvGrpSpPr/>
         <p:nvPr/>
       </p:nvGrpSpPr>
-      <p:grpSpPr/>
+      <p:grpSpPr>
+        <a:xfrm>
+          <a:off x="0" y="0"/>
+          <a:ext cx="0" cy="0"/>
+          <a:chOff x="0" y="0"/>
+          <a:chExt cx="0" cy="0"/>
+        </a:xfrm>
+      </p:grpSpPr>
       <p:sp>
         <p:nvSpPr>
           <p:cNvPr id="2" name="TextBox 1"/>
@@ -16382,7 +16353,7 @@
           <a:noFill/>
         </p:spPr>
         <p:txBody>
-          <a:bodyPr wrap="none" lIns="0" rIns="0" tIns="0" bIns="0" anchor="t">
+          <a:bodyPr wrap="none" lIns="0" tIns="0" rIns="0" bIns="0" anchor="t">
             <a:noAutofit/>
           </a:bodyPr>
           <a:lstStyle/>
@@ -16427,7 +16398,7 @@
           <a:noFill/>
         </p:spPr>
         <p:txBody>
-          <a:bodyPr wrap="none" lIns="0" rIns="0" tIns="0" bIns="0" anchor="t">
+          <a:bodyPr wrap="none" lIns="0" tIns="0" rIns="0" bIns="0" anchor="t">
             <a:noAutofit/>
           </a:bodyPr>
           <a:lstStyle/>
@@ -16444,7 +16415,7 @@
               </a:spcAft>
             </a:pPr>
             <a:r>
-              <a:rPr sz="3000" spc="-36">
+              <a:rPr sz="3000" spc="-36" dirty="0">
                 <a:solidFill>
                   <a:srgbClr val="E6EDF3"/>
                 </a:solidFill>
@@ -16542,7 +16513,7 @@
           <a:noFill/>
         </p:spPr>
         <p:txBody>
-          <a:bodyPr wrap="none" lIns="0" rIns="0" tIns="0" bIns="0" anchor="t">
+          <a:bodyPr wrap="none" lIns="0" tIns="0" rIns="0" bIns="0" anchor="t">
             <a:noAutofit/>
           </a:bodyPr>
           <a:lstStyle/>
@@ -16587,7 +16558,7 @@
           <a:noFill/>
         </p:spPr>
         <p:txBody>
-          <a:bodyPr wrap="none" lIns="0" rIns="0" tIns="0" bIns="0" anchor="t">
+          <a:bodyPr wrap="none" lIns="0" tIns="0" rIns="0" bIns="0" anchor="t">
             <a:noAutofit/>
           </a:bodyPr>
           <a:lstStyle/>
@@ -16632,7 +16603,7 @@
           <a:noFill/>
         </p:spPr>
         <p:txBody>
-          <a:bodyPr wrap="none" lIns="0" rIns="0" tIns="0" bIns="0" anchor="t">
+          <a:bodyPr wrap="none" lIns="0" tIns="0" rIns="0" bIns="0" anchor="t">
             <a:noAutofit/>
           </a:bodyPr>
           <a:lstStyle/>
@@ -16712,7 +16683,7 @@
           <a:noFill/>
         </p:spPr>
         <p:txBody>
-          <a:bodyPr wrap="none" lIns="0" rIns="0" tIns="0" bIns="0" anchor="t">
+          <a:bodyPr wrap="none" lIns="0" tIns="0" rIns="0" bIns="0" anchor="t">
             <a:noAutofit/>
           </a:bodyPr>
           <a:lstStyle/>
@@ -16757,7 +16728,7 @@
           <a:noFill/>
         </p:spPr>
         <p:txBody>
-          <a:bodyPr wrap="none" lIns="0" rIns="0" tIns="0" bIns="0" anchor="t">
+          <a:bodyPr wrap="none" lIns="0" tIns="0" rIns="0" bIns="0" anchor="t">
             <a:noAutofit/>
           </a:bodyPr>
           <a:lstStyle/>
@@ -16802,7 +16773,7 @@
           <a:noFill/>
         </p:spPr>
         <p:txBody>
-          <a:bodyPr wrap="none" lIns="0" rIns="0" tIns="0" bIns="0" anchor="t">
+          <a:bodyPr wrap="none" lIns="0" tIns="0" rIns="0" bIns="0" anchor="t">
             <a:noAutofit/>
           </a:bodyPr>
           <a:lstStyle/>
@@ -16882,7 +16853,7 @@
           <a:noFill/>
         </p:spPr>
         <p:txBody>
-          <a:bodyPr wrap="none" lIns="0" rIns="0" tIns="0" bIns="0" anchor="t">
+          <a:bodyPr wrap="none" lIns="0" tIns="0" rIns="0" bIns="0" anchor="t">
             <a:noAutofit/>
           </a:bodyPr>
           <a:lstStyle/>
@@ -16927,7 +16898,7 @@
           <a:noFill/>
         </p:spPr>
         <p:txBody>
-          <a:bodyPr wrap="none" lIns="0" rIns="0" tIns="0" bIns="0" anchor="t">
+          <a:bodyPr wrap="none" lIns="0" tIns="0" rIns="0" bIns="0" anchor="t">
             <a:noAutofit/>
           </a:bodyPr>
           <a:lstStyle/>
@@ -16972,7 +16943,7 @@
           <a:noFill/>
         </p:spPr>
         <p:txBody>
-          <a:bodyPr wrap="none" lIns="0" rIns="0" tIns="0" bIns="0" anchor="t">
+          <a:bodyPr wrap="none" lIns="0" tIns="0" rIns="0" bIns="0" anchor="t">
             <a:noAutofit/>
           </a:bodyPr>
           <a:lstStyle/>
@@ -17052,7 +17023,7 @@
           <a:noFill/>
         </p:spPr>
         <p:txBody>
-          <a:bodyPr wrap="none" lIns="0" rIns="0" tIns="0" bIns="0" anchor="t">
+          <a:bodyPr wrap="none" lIns="0" tIns="0" rIns="0" bIns="0" anchor="t">
             <a:noAutofit/>
           </a:bodyPr>
           <a:lstStyle/>
@@ -17097,7 +17068,7 @@
           <a:noFill/>
         </p:spPr>
         <p:txBody>
-          <a:bodyPr wrap="none" lIns="0" rIns="0" tIns="0" bIns="0" anchor="t">
+          <a:bodyPr wrap="none" lIns="0" tIns="0" rIns="0" bIns="0" anchor="t">
             <a:noAutofit/>
           </a:bodyPr>
           <a:lstStyle/>
@@ -17114,7 +17085,7 @@
               </a:spcAft>
             </a:pPr>
             <a:r>
-              <a:rPr sz="1600" spc="-14">
+              <a:rPr sz="1600" spc="-14" dirty="0">
                 <a:solidFill>
                   <a:srgbClr val="E6EDF3"/>
                 </a:solidFill>
@@ -17142,7 +17113,7 @@
           <a:noFill/>
         </p:spPr>
         <p:txBody>
-          <a:bodyPr wrap="none" lIns="0" rIns="0" tIns="0" bIns="0" anchor="t">
+          <a:bodyPr wrap="none" lIns="0" tIns="0" rIns="0" bIns="0" anchor="t">
             <a:noAutofit/>
           </a:bodyPr>
           <a:lstStyle/>
@@ -17222,7 +17193,7 @@
           <a:noFill/>
         </p:spPr>
         <p:txBody>
-          <a:bodyPr wrap="none" lIns="0" rIns="0" tIns="0" bIns="0" anchor="t">
+          <a:bodyPr wrap="none" lIns="0" tIns="0" rIns="0" bIns="0" anchor="t">
             <a:noAutofit/>
           </a:bodyPr>
           <a:lstStyle/>
@@ -17267,7 +17238,7 @@
           <a:noFill/>
         </p:spPr>
         <p:txBody>
-          <a:bodyPr wrap="none" lIns="0" rIns="0" tIns="0" bIns="0" anchor="t">
+          <a:bodyPr wrap="none" lIns="0" tIns="0" rIns="0" bIns="0" anchor="t">
             <a:noAutofit/>
           </a:bodyPr>
           <a:lstStyle/>
@@ -17312,7 +17283,7 @@
           <a:noFill/>
         </p:spPr>
         <p:txBody>
-          <a:bodyPr wrap="none" lIns="0" rIns="0" tIns="0" bIns="0" anchor="t">
+          <a:bodyPr wrap="none" lIns="0" tIns="0" rIns="0" bIns="0" anchor="t">
             <a:noAutofit/>
           </a:bodyPr>
           <a:lstStyle/>
@@ -17392,7 +17363,7 @@
           <a:noFill/>
         </p:spPr>
         <p:txBody>
-          <a:bodyPr wrap="none" lIns="0" rIns="0" tIns="0" bIns="0" anchor="t">
+          <a:bodyPr wrap="none" lIns="0" tIns="0" rIns="0" bIns="0" anchor="t">
             <a:noAutofit/>
           </a:bodyPr>
           <a:lstStyle/>
@@ -17437,7 +17408,7 @@
           <a:noFill/>
         </p:spPr>
         <p:txBody>
-          <a:bodyPr wrap="none" lIns="0" rIns="0" tIns="0" bIns="0" anchor="t">
+          <a:bodyPr wrap="none" lIns="0" tIns="0" rIns="0" bIns="0" anchor="t">
             <a:noAutofit/>
           </a:bodyPr>
           <a:lstStyle/>
@@ -17482,7 +17453,7 @@
           <a:noFill/>
         </p:spPr>
         <p:txBody>
-          <a:bodyPr wrap="none" lIns="0" rIns="0" tIns="0" bIns="0" anchor="t">
+          <a:bodyPr wrap="none" lIns="0" tIns="0" rIns="0" bIns="0" anchor="t">
             <a:noAutofit/>
           </a:bodyPr>
           <a:lstStyle/>
@@ -17597,7 +17568,7 @@
           <a:noFill/>
         </p:spPr>
         <p:txBody>
-          <a:bodyPr wrap="none" lIns="0" rIns="0" tIns="0" bIns="0" anchor="t">
+          <a:bodyPr wrap="none" lIns="0" tIns="0" rIns="0" bIns="0" anchor="t">
             <a:noAutofit/>
           </a:bodyPr>
           <a:lstStyle/>
@@ -17642,7 +17613,7 @@
           <a:noFill/>
         </p:spPr>
         <p:txBody>
-          <a:bodyPr wrap="none" lIns="0" rIns="0" tIns="0" bIns="0" anchor="t">
+          <a:bodyPr wrap="none" lIns="0" tIns="0" rIns="0" bIns="0" anchor="t">
             <a:noAutofit/>
           </a:bodyPr>
           <a:lstStyle/>
@@ -17679,7 +17650,7 @@
 </file>
 
 <file path=ppt/slides/slide3.xml><?xml version="1.0" encoding="utf-8"?>
-<p:sld xmlns:a="http://schemas.openxmlformats.org/drawingml/2006/main" xmlns:p="http://schemas.openxmlformats.org/presentationml/2006/main" xmlns:r="http://schemas.openxmlformats.org/officeDocument/2006/relationships">
+<p:sld xmlns:a="http://schemas.openxmlformats.org/drawingml/2006/main" xmlns:r="http://schemas.openxmlformats.org/officeDocument/2006/relationships" xmlns:p="http://schemas.openxmlformats.org/presentationml/2006/main">
   <p:cSld>
     <p:bg>
       <p:bgPr>
@@ -17695,7 +17666,14 @@
         <p:cNvGrpSpPr/>
         <p:nvPr/>
       </p:nvGrpSpPr>
-      <p:grpSpPr/>
+      <p:grpSpPr>
+        <a:xfrm>
+          <a:off x="0" y="0"/>
+          <a:ext cx="0" cy="0"/>
+          <a:chOff x="0" y="0"/>
+          <a:chExt cx="0" cy="0"/>
+        </a:xfrm>
+      </p:grpSpPr>
       <p:sp>
         <p:nvSpPr>
           <p:cNvPr id="2" name="TextBox 1"/>
@@ -17713,7 +17691,7 @@
           <a:noFill/>
         </p:spPr>
         <p:txBody>
-          <a:bodyPr wrap="none" lIns="0" rIns="0" tIns="0" bIns="0" anchor="t">
+          <a:bodyPr wrap="none" lIns="0" tIns="0" rIns="0" bIns="0" anchor="t">
             <a:noAutofit/>
           </a:bodyPr>
           <a:lstStyle/>
@@ -17758,7 +17736,7 @@
           <a:noFill/>
         </p:spPr>
         <p:txBody>
-          <a:bodyPr wrap="none" lIns="0" rIns="0" tIns="0" bIns="0" anchor="t">
+          <a:bodyPr wrap="none" lIns="0" tIns="0" rIns="0" bIns="0" anchor="t">
             <a:noAutofit/>
           </a:bodyPr>
           <a:lstStyle/>
@@ -17803,7 +17781,7 @@
           <a:noFill/>
         </p:spPr>
         <p:txBody>
-          <a:bodyPr wrap="none" lIns="0" rIns="0" tIns="0" bIns="0" anchor="t">
+          <a:bodyPr wrap="none" lIns="0" tIns="0" rIns="0" bIns="0" anchor="t">
             <a:noAutofit/>
           </a:bodyPr>
           <a:lstStyle/>
@@ -17933,6 +17911,7 @@
           <a:lstStyle/>
           <a:p>
             <a:pPr algn="ctr"/>
+            <a:endParaRPr/>
           </a:p>
         </p:txBody>
       </p:sp>
@@ -17953,7 +17932,7 @@
           <a:noFill/>
         </p:spPr>
         <p:txBody>
-          <a:bodyPr wrap="none" lIns="0" rIns="0" tIns="0" bIns="0" anchor="t">
+          <a:bodyPr wrap="none" lIns="0" tIns="0" rIns="0" bIns="0" anchor="t">
             <a:noAutofit/>
           </a:bodyPr>
           <a:lstStyle/>
@@ -17998,7 +17977,7 @@
           <a:noFill/>
         </p:spPr>
         <p:txBody>
-          <a:bodyPr wrap="none" lIns="0" rIns="0" tIns="0" bIns="0" anchor="t">
+          <a:bodyPr wrap="none" lIns="0" tIns="0" rIns="0" bIns="0" anchor="t">
             <a:noAutofit/>
           </a:bodyPr>
           <a:lstStyle/>
@@ -18102,6 +18081,7 @@
           <a:lstStyle/>
           <a:p>
             <a:pPr algn="ctr"/>
+            <a:endParaRPr/>
           </a:p>
         </p:txBody>
       </p:sp>
@@ -18122,7 +18102,7 @@
           <a:noFill/>
         </p:spPr>
         <p:txBody>
-          <a:bodyPr wrap="none" lIns="0" rIns="0" tIns="0" bIns="0" anchor="t">
+          <a:bodyPr wrap="none" lIns="0" tIns="0" rIns="0" bIns="0" anchor="t">
             <a:noAutofit/>
           </a:bodyPr>
           <a:lstStyle/>
@@ -18191,6 +18171,7 @@
           <a:lstStyle/>
           <a:p>
             <a:pPr algn="ctr"/>
+            <a:endParaRPr/>
           </a:p>
         </p:txBody>
       </p:sp>
@@ -18211,7 +18192,7 @@
           <a:noFill/>
         </p:spPr>
         <p:txBody>
-          <a:bodyPr wrap="none" lIns="0" rIns="0" tIns="0" bIns="0" anchor="t">
+          <a:bodyPr wrap="none" lIns="0" tIns="0" rIns="0" bIns="0" anchor="t">
             <a:noAutofit/>
           </a:bodyPr>
           <a:lstStyle/>
@@ -18280,6 +18261,7 @@
           <a:lstStyle/>
           <a:p>
             <a:pPr algn="ctr"/>
+            <a:endParaRPr/>
           </a:p>
         </p:txBody>
       </p:sp>
@@ -18300,7 +18282,7 @@
           <a:noFill/>
         </p:spPr>
         <p:txBody>
-          <a:bodyPr wrap="none" lIns="0" rIns="0" tIns="0" bIns="0" anchor="t">
+          <a:bodyPr wrap="none" lIns="0" tIns="0" rIns="0" bIns="0" anchor="t">
             <a:noAutofit/>
           </a:bodyPr>
           <a:lstStyle/>
@@ -18391,6 +18373,7 @@
           <a:lstStyle/>
           <a:p>
             <a:pPr algn="ctr"/>
+            <a:endParaRPr/>
           </a:p>
         </p:txBody>
       </p:sp>
@@ -18411,7 +18394,7 @@
           <a:noFill/>
         </p:spPr>
         <p:txBody>
-          <a:bodyPr wrap="none" lIns="0" rIns="0" tIns="0" bIns="0" anchor="t">
+          <a:bodyPr wrap="none" lIns="0" tIns="0" rIns="0" bIns="0" anchor="t">
             <a:noAutofit/>
           </a:bodyPr>
           <a:lstStyle/>
@@ -18456,7 +18439,7 @@
           <a:noFill/>
         </p:spPr>
         <p:txBody>
-          <a:bodyPr wrap="none" lIns="0" rIns="0" tIns="0" bIns="0" anchor="t">
+          <a:bodyPr wrap="none" lIns="0" tIns="0" rIns="0" bIns="0" anchor="t">
             <a:noAutofit/>
           </a:bodyPr>
           <a:lstStyle/>
@@ -18529,6 +18512,7 @@
           <a:lstStyle/>
           <a:p>
             <a:pPr algn="ctr"/>
+            <a:endParaRPr/>
           </a:p>
         </p:txBody>
       </p:sp>
@@ -18845,7 +18829,7 @@
           <a:noFill/>
         </p:spPr>
         <p:txBody>
-          <a:bodyPr wrap="none" lIns="0" rIns="0" tIns="0" bIns="0" anchor="t">
+          <a:bodyPr wrap="none" lIns="0" tIns="0" rIns="0" bIns="0" anchor="t">
             <a:noAutofit/>
           </a:bodyPr>
           <a:lstStyle/>
@@ -18890,7 +18874,7 @@
           <a:noFill/>
         </p:spPr>
         <p:txBody>
-          <a:bodyPr wrap="none" lIns="0" rIns="0" tIns="0" bIns="0" anchor="t">
+          <a:bodyPr wrap="none" lIns="0" tIns="0" rIns="0" bIns="0" anchor="t">
             <a:noAutofit/>
           </a:bodyPr>
           <a:lstStyle/>
@@ -18994,6 +18978,7 @@
           <a:lstStyle/>
           <a:p>
             <a:pPr algn="ctr"/>
+            <a:endParaRPr/>
           </a:p>
         </p:txBody>
       </p:sp>
@@ -19014,7 +18999,7 @@
           <a:noFill/>
         </p:spPr>
         <p:txBody>
-          <a:bodyPr wrap="none" lIns="0" rIns="0" tIns="0" bIns="0" anchor="t">
+          <a:bodyPr wrap="none" lIns="0" tIns="0" rIns="0" bIns="0" anchor="t">
             <a:noAutofit/>
           </a:bodyPr>
           <a:lstStyle/>
@@ -19083,6 +19068,7 @@
           <a:lstStyle/>
           <a:p>
             <a:pPr algn="ctr"/>
+            <a:endParaRPr/>
           </a:p>
         </p:txBody>
       </p:sp>
@@ -19103,7 +19089,7 @@
           <a:noFill/>
         </p:spPr>
         <p:txBody>
-          <a:bodyPr wrap="none" lIns="0" rIns="0" tIns="0" bIns="0" anchor="t">
+          <a:bodyPr wrap="none" lIns="0" tIns="0" rIns="0" bIns="0" anchor="t">
             <a:noAutofit/>
           </a:bodyPr>
           <a:lstStyle/>
@@ -19172,6 +19158,7 @@
           <a:lstStyle/>
           <a:p>
             <a:pPr algn="ctr"/>
+            <a:endParaRPr/>
           </a:p>
         </p:txBody>
       </p:sp>
@@ -19192,7 +19179,7 @@
           <a:noFill/>
         </p:spPr>
         <p:txBody>
-          <a:bodyPr wrap="none" lIns="0" rIns="0" tIns="0" bIns="0" anchor="t">
+          <a:bodyPr wrap="none" lIns="0" tIns="0" rIns="0" bIns="0" anchor="t">
             <a:noAutofit/>
           </a:bodyPr>
           <a:lstStyle/>
@@ -19261,6 +19248,7 @@
           <a:lstStyle/>
           <a:p>
             <a:pPr algn="ctr"/>
+            <a:endParaRPr/>
           </a:p>
         </p:txBody>
       </p:sp>
@@ -19281,7 +19269,7 @@
           <a:noFill/>
         </p:spPr>
         <p:txBody>
-          <a:bodyPr wrap="none" lIns="0" rIns="0" tIns="0" bIns="0" anchor="t">
+          <a:bodyPr wrap="none" lIns="0" tIns="0" rIns="0" bIns="0" anchor="t">
             <a:noAutofit/>
           </a:bodyPr>
           <a:lstStyle/>
@@ -19326,7 +19314,7 @@
           <a:noFill/>
         </p:spPr>
         <p:txBody>
-          <a:bodyPr wrap="none" lIns="0" rIns="0" tIns="0" bIns="0" anchor="t">
+          <a:bodyPr wrap="none" lIns="0" tIns="0" rIns="0" bIns="0" anchor="t">
             <a:noAutofit/>
           </a:bodyPr>
           <a:lstStyle/>
@@ -19428,7 +19416,7 @@
           <a:noFill/>
         </p:spPr>
         <p:txBody>
-          <a:bodyPr wrap="none" lIns="0" rIns="0" tIns="0" bIns="0" anchor="t">
+          <a:bodyPr wrap="none" lIns="0" tIns="0" rIns="0" bIns="0" anchor="t">
             <a:noAutofit/>
           </a:bodyPr>
           <a:lstStyle/>
@@ -19473,7 +19461,7 @@
           <a:noFill/>
         </p:spPr>
         <p:txBody>
-          <a:bodyPr wrap="none" lIns="0" rIns="0" tIns="0" bIns="0" anchor="t">
+          <a:bodyPr wrap="none" lIns="0" tIns="0" rIns="0" bIns="0" anchor="t">
             <a:noAutofit/>
           </a:bodyPr>
           <a:lstStyle/>
@@ -19510,7 +19498,7 @@
 </file>
 
 <file path=ppt/slides/slide4.xml><?xml version="1.0" encoding="utf-8"?>
-<p:sld xmlns:a="http://schemas.openxmlformats.org/drawingml/2006/main" xmlns:p="http://schemas.openxmlformats.org/presentationml/2006/main" xmlns:r="http://schemas.openxmlformats.org/officeDocument/2006/relationships">
+<p:sld xmlns:a="http://schemas.openxmlformats.org/drawingml/2006/main" xmlns:r="http://schemas.openxmlformats.org/officeDocument/2006/relationships" xmlns:p="http://schemas.openxmlformats.org/presentationml/2006/main">
   <p:cSld>
     <p:bg>
       <p:bgPr>
@@ -19526,7 +19514,14 @@
         <p:cNvGrpSpPr/>
         <p:nvPr/>
       </p:nvGrpSpPr>
-      <p:grpSpPr/>
+      <p:grpSpPr>
+        <a:xfrm>
+          <a:off x="0" y="0"/>
+          <a:ext cx="0" cy="0"/>
+          <a:chOff x="0" y="0"/>
+          <a:chExt cx="0" cy="0"/>
+        </a:xfrm>
+      </p:grpSpPr>
       <p:sp>
         <p:nvSpPr>
           <p:cNvPr id="2" name="TextBox 1"/>
@@ -19544,7 +19539,7 @@
           <a:noFill/>
         </p:spPr>
         <p:txBody>
-          <a:bodyPr wrap="none" lIns="0" rIns="0" tIns="0" bIns="0" anchor="t">
+          <a:bodyPr wrap="none" lIns="0" tIns="0" rIns="0" bIns="0" anchor="t">
             <a:noAutofit/>
           </a:bodyPr>
           <a:lstStyle/>
@@ -19589,7 +19584,7 @@
           <a:noFill/>
         </p:spPr>
         <p:txBody>
-          <a:bodyPr wrap="none" lIns="0" rIns="0" tIns="0" bIns="0" anchor="t">
+          <a:bodyPr wrap="none" lIns="0" tIns="0" rIns="0" bIns="0" anchor="t">
             <a:noAutofit/>
           </a:bodyPr>
           <a:lstStyle/>
@@ -19697,6 +19692,7 @@
           <a:lstStyle/>
           <a:p>
             <a:pPr algn="ctr"/>
+            <a:endParaRPr/>
           </a:p>
         </p:txBody>
       </p:sp>
@@ -20013,7 +20009,7 @@
           <a:noFill/>
         </p:spPr>
         <p:txBody>
-          <a:bodyPr wrap="none" lIns="0" rIns="0" tIns="0" bIns="0" anchor="t">
+          <a:bodyPr wrap="none" lIns="0" tIns="0" rIns="0" bIns="0" anchor="t">
             <a:noAutofit/>
           </a:bodyPr>
           <a:lstStyle/>
@@ -20058,7 +20054,7 @@
           <a:noFill/>
         </p:spPr>
         <p:txBody>
-          <a:bodyPr wrap="none" lIns="0" rIns="0" tIns="0" bIns="0" anchor="t">
+          <a:bodyPr wrap="none" lIns="0" tIns="0" rIns="0" bIns="0" anchor="t">
             <a:noAutofit/>
           </a:bodyPr>
           <a:lstStyle/>
@@ -20153,6 +20149,7 @@
           <a:lstStyle/>
           <a:p>
             <a:pPr algn="ctr"/>
+            <a:endParaRPr/>
           </a:p>
         </p:txBody>
       </p:sp>
@@ -20197,6 +20194,7 @@
           <a:lstStyle/>
           <a:p>
             <a:pPr algn="ctr"/>
+            <a:endParaRPr/>
           </a:p>
         </p:txBody>
       </p:sp>
@@ -20217,7 +20215,7 @@
           <a:noFill/>
         </p:spPr>
         <p:txBody>
-          <a:bodyPr wrap="none" lIns="0" rIns="0" tIns="0" bIns="0" anchor="t">
+          <a:bodyPr wrap="none" lIns="0" tIns="0" rIns="0" bIns="0" anchor="t">
             <a:noAutofit/>
           </a:bodyPr>
           <a:lstStyle/>
@@ -20262,7 +20260,7 @@
           <a:noFill/>
         </p:spPr>
         <p:txBody>
-          <a:bodyPr wrap="none" lIns="0" rIns="0" tIns="0" bIns="0" anchor="t">
+          <a:bodyPr wrap="none" lIns="0" tIns="0" rIns="0" bIns="0" anchor="t">
             <a:noAutofit/>
           </a:bodyPr>
           <a:lstStyle/>
@@ -20423,6 +20421,7 @@
           <a:lstStyle/>
           <a:p>
             <a:pPr algn="ctr"/>
+            <a:endParaRPr/>
           </a:p>
         </p:txBody>
       </p:sp>
@@ -20467,6 +20466,7 @@
           <a:lstStyle/>
           <a:p>
             <a:pPr algn="ctr"/>
+            <a:endParaRPr/>
           </a:p>
         </p:txBody>
       </p:sp>
@@ -20487,7 +20487,7 @@
           <a:noFill/>
         </p:spPr>
         <p:txBody>
-          <a:bodyPr wrap="none" lIns="0" rIns="0" tIns="0" bIns="0" anchor="t">
+          <a:bodyPr wrap="none" lIns="0" tIns="0" rIns="0" bIns="0" anchor="t">
             <a:noAutofit/>
           </a:bodyPr>
           <a:lstStyle/>
@@ -20554,7 +20554,7 @@
           <a:noFill/>
         </p:spPr>
         <p:txBody>
-          <a:bodyPr wrap="none" lIns="0" rIns="0" tIns="0" bIns="0" anchor="t">
+          <a:bodyPr wrap="none" lIns="0" tIns="0" rIns="0" bIns="0" anchor="t">
             <a:noAutofit/>
           </a:bodyPr>
           <a:lstStyle/>
@@ -20715,6 +20715,7 @@
           <a:lstStyle/>
           <a:p>
             <a:pPr algn="ctr"/>
+            <a:endParaRPr/>
           </a:p>
         </p:txBody>
       </p:sp>
@@ -20759,6 +20760,7 @@
           <a:lstStyle/>
           <a:p>
             <a:pPr algn="ctr"/>
+            <a:endParaRPr/>
           </a:p>
         </p:txBody>
       </p:sp>
@@ -20779,7 +20781,7 @@
           <a:noFill/>
         </p:spPr>
         <p:txBody>
-          <a:bodyPr wrap="none" lIns="0" rIns="0" tIns="0" bIns="0" anchor="t">
+          <a:bodyPr wrap="none" lIns="0" tIns="0" rIns="0" bIns="0" anchor="t">
             <a:noAutofit/>
           </a:bodyPr>
           <a:lstStyle/>
@@ -20824,7 +20826,7 @@
           <a:noFill/>
         </p:spPr>
         <p:txBody>
-          <a:bodyPr wrap="none" lIns="0" rIns="0" tIns="0" bIns="0" anchor="t">
+          <a:bodyPr wrap="none" lIns="0" tIns="0" rIns="0" bIns="0" anchor="t">
             <a:noAutofit/>
           </a:bodyPr>
           <a:lstStyle/>
@@ -20985,6 +20987,7 @@
           <a:lstStyle/>
           <a:p>
             <a:pPr algn="ctr"/>
+            <a:endParaRPr/>
           </a:p>
         </p:txBody>
       </p:sp>
@@ -21029,6 +21032,7 @@
           <a:lstStyle/>
           <a:p>
             <a:pPr algn="ctr"/>
+            <a:endParaRPr/>
           </a:p>
         </p:txBody>
       </p:sp>
@@ -21049,7 +21053,7 @@
           <a:noFill/>
         </p:spPr>
         <p:txBody>
-          <a:bodyPr wrap="none" lIns="0" rIns="0" tIns="0" bIns="0" anchor="t">
+          <a:bodyPr wrap="none" lIns="0" tIns="0" rIns="0" bIns="0" anchor="t">
             <a:noAutofit/>
           </a:bodyPr>
           <a:lstStyle/>
@@ -21094,7 +21098,7 @@
           <a:noFill/>
         </p:spPr>
         <p:txBody>
-          <a:bodyPr wrap="none" lIns="0" rIns="0" tIns="0" bIns="0" anchor="t">
+          <a:bodyPr wrap="none" lIns="0" tIns="0" rIns="0" bIns="0" anchor="t">
             <a:noAutofit/>
           </a:bodyPr>
           <a:lstStyle/>
@@ -21227,7 +21231,7 @@
           <a:noFill/>
         </p:spPr>
         <p:txBody>
-          <a:bodyPr wrap="none" lIns="0" rIns="0" tIns="0" bIns="0" anchor="t">
+          <a:bodyPr wrap="none" lIns="0" tIns="0" rIns="0" bIns="0" anchor="t">
             <a:noAutofit/>
           </a:bodyPr>
           <a:lstStyle/>
@@ -21329,7 +21333,7 @@
           <a:noFill/>
         </p:spPr>
         <p:txBody>
-          <a:bodyPr wrap="none" lIns="0" rIns="0" tIns="0" bIns="0" anchor="t">
+          <a:bodyPr wrap="none" lIns="0" tIns="0" rIns="0" bIns="0" anchor="t">
             <a:noAutofit/>
           </a:bodyPr>
           <a:lstStyle/>
@@ -21374,7 +21378,7 @@
           <a:noFill/>
         </p:spPr>
         <p:txBody>
-          <a:bodyPr wrap="none" lIns="0" rIns="0" tIns="0" bIns="0" anchor="t">
+          <a:bodyPr wrap="none" lIns="0" tIns="0" rIns="0" bIns="0" anchor="t">
             <a:noAutofit/>
           </a:bodyPr>
           <a:lstStyle/>
@@ -21411,7 +21415,7 @@
 </file>
 
 <file path=ppt/slides/slide5.xml><?xml version="1.0" encoding="utf-8"?>
-<p:sld xmlns:a="http://schemas.openxmlformats.org/drawingml/2006/main" xmlns:p="http://schemas.openxmlformats.org/presentationml/2006/main" xmlns:r="http://schemas.openxmlformats.org/officeDocument/2006/relationships">
+<p:sld xmlns:a="http://schemas.openxmlformats.org/drawingml/2006/main" xmlns:r="http://schemas.openxmlformats.org/officeDocument/2006/relationships" xmlns:p="http://schemas.openxmlformats.org/presentationml/2006/main">
   <p:cSld>
     <p:bg>
       <p:bgPr>
@@ -21427,7 +21431,14 @@
         <p:cNvGrpSpPr/>
         <p:nvPr/>
       </p:nvGrpSpPr>
-      <p:grpSpPr/>
+      <p:grpSpPr>
+        <a:xfrm>
+          <a:off x="0" y="0"/>
+          <a:ext cx="0" cy="0"/>
+          <a:chOff x="0" y="0"/>
+          <a:chExt cx="0" cy="0"/>
+        </a:xfrm>
+      </p:grpSpPr>
       <p:sp>
         <p:nvSpPr>
           <p:cNvPr id="2" name="TextBox 1"/>
@@ -21445,7 +21456,7 @@
           <a:noFill/>
         </p:spPr>
         <p:txBody>
-          <a:bodyPr wrap="none" lIns="0" rIns="0" tIns="0" bIns="0" anchor="t">
+          <a:bodyPr wrap="none" lIns="0" tIns="0" rIns="0" bIns="0" anchor="t">
             <a:noAutofit/>
           </a:bodyPr>
           <a:lstStyle/>
@@ -21490,7 +21501,7 @@
           <a:noFill/>
         </p:spPr>
         <p:txBody>
-          <a:bodyPr wrap="none" lIns="0" rIns="0" tIns="0" bIns="0" anchor="t">
+          <a:bodyPr wrap="none" lIns="0" tIns="0" rIns="0" bIns="0" anchor="t">
             <a:noAutofit/>
           </a:bodyPr>
           <a:lstStyle/>
@@ -21535,7 +21546,7 @@
           <a:noFill/>
         </p:spPr>
         <p:txBody>
-          <a:bodyPr wrap="none" lIns="0" rIns="0" tIns="0" bIns="0" anchor="t">
+          <a:bodyPr wrap="none" lIns="0" tIns="0" rIns="0" bIns="0" anchor="t">
             <a:noAutofit/>
           </a:bodyPr>
           <a:lstStyle/>
@@ -21643,6 +21654,7 @@
           <a:lstStyle/>
           <a:p>
             <a:pPr algn="ctr"/>
+            <a:endParaRPr/>
           </a:p>
         </p:txBody>
       </p:sp>
@@ -21663,7 +21675,7 @@
           <a:noFill/>
         </p:spPr>
         <p:txBody>
-          <a:bodyPr wrap="none" lIns="0" rIns="0" tIns="0" bIns="0" anchor="t">
+          <a:bodyPr wrap="none" lIns="0" tIns="0" rIns="0" bIns="0" anchor="t">
             <a:noAutofit/>
           </a:bodyPr>
           <a:lstStyle/>
@@ -21743,7 +21755,7 @@
           <a:noFill/>
         </p:spPr>
         <p:txBody>
-          <a:bodyPr wrap="none" lIns="0" rIns="0" tIns="0" bIns="0" anchor="t">
+          <a:bodyPr wrap="none" lIns="0" tIns="0" rIns="0" bIns="0" anchor="t">
             <a:noAutofit/>
           </a:bodyPr>
           <a:lstStyle/>
@@ -21788,7 +21800,7 @@
           <a:noFill/>
         </p:spPr>
         <p:txBody>
-          <a:bodyPr wrap="none" lIns="0" rIns="0" tIns="0" bIns="0" anchor="t">
+          <a:bodyPr wrap="none" lIns="0" tIns="0" rIns="0" bIns="0" anchor="t">
             <a:noAutofit/>
           </a:bodyPr>
           <a:lstStyle/>
@@ -21868,7 +21880,7 @@
           <a:noFill/>
         </p:spPr>
         <p:txBody>
-          <a:bodyPr wrap="none" lIns="0" rIns="0" tIns="0" bIns="0" anchor="t">
+          <a:bodyPr wrap="none" lIns="0" tIns="0" rIns="0" bIns="0" anchor="t">
             <a:noAutofit/>
           </a:bodyPr>
           <a:lstStyle/>
@@ -21913,7 +21925,7 @@
           <a:noFill/>
         </p:spPr>
         <p:txBody>
-          <a:bodyPr wrap="none" lIns="0" rIns="0" tIns="0" bIns="0" anchor="t">
+          <a:bodyPr wrap="none" lIns="0" tIns="0" rIns="0" bIns="0" anchor="t">
             <a:noAutofit/>
           </a:bodyPr>
           <a:lstStyle/>
@@ -21993,7 +22005,7 @@
           <a:noFill/>
         </p:spPr>
         <p:txBody>
-          <a:bodyPr wrap="none" lIns="0" rIns="0" tIns="0" bIns="0" anchor="t">
+          <a:bodyPr wrap="none" lIns="0" tIns="0" rIns="0" bIns="0" anchor="t">
             <a:noAutofit/>
           </a:bodyPr>
           <a:lstStyle/>
@@ -22038,7 +22050,7 @@
           <a:noFill/>
         </p:spPr>
         <p:txBody>
-          <a:bodyPr wrap="none" lIns="0" rIns="0" tIns="0" bIns="0" anchor="t">
+          <a:bodyPr wrap="none" lIns="0" tIns="0" rIns="0" bIns="0" anchor="t">
             <a:noAutofit/>
           </a:bodyPr>
           <a:lstStyle/>
@@ -22118,7 +22130,7 @@
           <a:noFill/>
         </p:spPr>
         <p:txBody>
-          <a:bodyPr wrap="none" lIns="0" rIns="0" tIns="0" bIns="0" anchor="t">
+          <a:bodyPr wrap="none" lIns="0" tIns="0" rIns="0" bIns="0" anchor="t">
             <a:noAutofit/>
           </a:bodyPr>
           <a:lstStyle/>
@@ -22163,7 +22175,7 @@
           <a:noFill/>
         </p:spPr>
         <p:txBody>
-          <a:bodyPr wrap="none" lIns="0" rIns="0" tIns="0" bIns="0" anchor="t">
+          <a:bodyPr wrap="none" lIns="0" tIns="0" rIns="0" bIns="0" anchor="t">
             <a:noAutofit/>
           </a:bodyPr>
           <a:lstStyle/>
@@ -22243,7 +22255,7 @@
           <a:noFill/>
         </p:spPr>
         <p:txBody>
-          <a:bodyPr wrap="none" lIns="0" rIns="0" tIns="0" bIns="0" anchor="t">
+          <a:bodyPr wrap="none" lIns="0" tIns="0" rIns="0" bIns="0" anchor="t">
             <a:noAutofit/>
           </a:bodyPr>
           <a:lstStyle/>
@@ -22316,6 +22328,7 @@
           <a:lstStyle/>
           <a:p>
             <a:pPr algn="ctr"/>
+            <a:endParaRPr/>
           </a:p>
         </p:txBody>
       </p:sp>
@@ -22632,7 +22645,7 @@
           <a:noFill/>
         </p:spPr>
         <p:txBody>
-          <a:bodyPr wrap="none" lIns="0" rIns="0" tIns="0" bIns="0" anchor="t">
+          <a:bodyPr wrap="none" lIns="0" tIns="0" rIns="0" bIns="0" anchor="t">
             <a:noAutofit/>
           </a:bodyPr>
           <a:lstStyle/>
@@ -22712,7 +22725,7 @@
           <a:noFill/>
         </p:spPr>
         <p:txBody>
-          <a:bodyPr wrap="none" lIns="0" rIns="0" tIns="0" bIns="0" anchor="t">
+          <a:bodyPr wrap="none" lIns="0" tIns="0" rIns="0" bIns="0" anchor="t">
             <a:noAutofit/>
           </a:bodyPr>
           <a:lstStyle/>
@@ -22757,7 +22770,7 @@
           <a:noFill/>
         </p:spPr>
         <p:txBody>
-          <a:bodyPr wrap="none" lIns="0" rIns="0" tIns="0" bIns="0" anchor="t">
+          <a:bodyPr wrap="none" lIns="0" tIns="0" rIns="0" bIns="0" anchor="t">
             <a:noAutofit/>
           </a:bodyPr>
           <a:lstStyle/>
@@ -22859,7 +22872,7 @@
           <a:noFill/>
         </p:spPr>
         <p:txBody>
-          <a:bodyPr wrap="none" lIns="0" rIns="0" tIns="0" bIns="0" anchor="t">
+          <a:bodyPr wrap="none" lIns="0" tIns="0" rIns="0" bIns="0" anchor="t">
             <a:noAutofit/>
           </a:bodyPr>
           <a:lstStyle/>
@@ -22904,7 +22917,7 @@
           <a:noFill/>
         </p:spPr>
         <p:txBody>
-          <a:bodyPr wrap="none" lIns="0" rIns="0" tIns="0" bIns="0" anchor="t">
+          <a:bodyPr wrap="none" lIns="0" tIns="0" rIns="0" bIns="0" anchor="t">
             <a:noAutofit/>
           </a:bodyPr>
           <a:lstStyle/>
@@ -22984,7 +22997,7 @@
           <a:noFill/>
         </p:spPr>
         <p:txBody>
-          <a:bodyPr wrap="none" lIns="0" rIns="0" tIns="0" bIns="0" anchor="t">
+          <a:bodyPr wrap="none" lIns="0" tIns="0" rIns="0" bIns="0" anchor="t">
             <a:noAutofit/>
           </a:bodyPr>
           <a:lstStyle/>
@@ -23029,7 +23042,7 @@
           <a:noFill/>
         </p:spPr>
         <p:txBody>
-          <a:bodyPr wrap="none" lIns="0" rIns="0" tIns="0" bIns="0" anchor="t">
+          <a:bodyPr wrap="none" lIns="0" tIns="0" rIns="0" bIns="0" anchor="t">
             <a:noAutofit/>
           </a:bodyPr>
           <a:lstStyle/>
@@ -23109,7 +23122,7 @@
           <a:noFill/>
         </p:spPr>
         <p:txBody>
-          <a:bodyPr wrap="none" lIns="0" rIns="0" tIns="0" bIns="0" anchor="t">
+          <a:bodyPr wrap="none" lIns="0" tIns="0" rIns="0" bIns="0" anchor="t">
             <a:noAutofit/>
           </a:bodyPr>
           <a:lstStyle/>
@@ -23182,6 +23195,7 @@
           <a:lstStyle/>
           <a:p>
             <a:pPr algn="ctr"/>
+            <a:endParaRPr/>
           </a:p>
         </p:txBody>
       </p:sp>
@@ -23226,6 +23240,7 @@
           <a:lstStyle/>
           <a:p>
             <a:pPr algn="ctr"/>
+            <a:endParaRPr/>
           </a:p>
         </p:txBody>
       </p:sp>
@@ -23246,7 +23261,7 @@
           <a:noFill/>
         </p:spPr>
         <p:txBody>
-          <a:bodyPr wrap="none" lIns="0" rIns="0" tIns="0" bIns="0" anchor="t">
+          <a:bodyPr wrap="none" lIns="0" tIns="0" rIns="0" bIns="0" anchor="t">
             <a:noAutofit/>
           </a:bodyPr>
           <a:lstStyle/>
@@ -23291,7 +23306,7 @@
           <a:noFill/>
         </p:spPr>
         <p:txBody>
-          <a:bodyPr wrap="none" lIns="0" rIns="0" tIns="0" bIns="0" anchor="t">
+          <a:bodyPr wrap="none" lIns="0" tIns="0" rIns="0" bIns="0" anchor="t">
             <a:noAutofit/>
           </a:bodyPr>
           <a:lstStyle/>
@@ -23393,7 +23408,7 @@
           <a:noFill/>
         </p:spPr>
         <p:txBody>
-          <a:bodyPr wrap="none" lIns="0" rIns="0" tIns="0" bIns="0" anchor="t">
+          <a:bodyPr wrap="none" lIns="0" tIns="0" rIns="0" bIns="0" anchor="t">
             <a:noAutofit/>
           </a:bodyPr>
           <a:lstStyle/>
@@ -23438,7 +23453,7 @@
           <a:noFill/>
         </p:spPr>
         <p:txBody>
-          <a:bodyPr wrap="none" lIns="0" rIns="0" tIns="0" bIns="0" anchor="t">
+          <a:bodyPr wrap="none" lIns="0" tIns="0" rIns="0" bIns="0" anchor="t">
             <a:noAutofit/>
           </a:bodyPr>
           <a:lstStyle/>
@@ -23475,7 +23490,7 @@
 </file>
 
 <file path=ppt/slides/slide6.xml><?xml version="1.0" encoding="utf-8"?>
-<p:sld xmlns:a="http://schemas.openxmlformats.org/drawingml/2006/main" xmlns:p="http://schemas.openxmlformats.org/presentationml/2006/main" xmlns:r="http://schemas.openxmlformats.org/officeDocument/2006/relationships">
+<p:sld xmlns:a="http://schemas.openxmlformats.org/drawingml/2006/main" xmlns:r="http://schemas.openxmlformats.org/officeDocument/2006/relationships" xmlns:p="http://schemas.openxmlformats.org/presentationml/2006/main">
   <p:cSld>
     <p:bg>
       <p:bgPr>
@@ -23491,7 +23506,14 @@
         <p:cNvGrpSpPr/>
         <p:nvPr/>
       </p:nvGrpSpPr>
-      <p:grpSpPr/>
+      <p:grpSpPr>
+        <a:xfrm>
+          <a:off x="0" y="0"/>
+          <a:ext cx="0" cy="0"/>
+          <a:chOff x="0" y="0"/>
+          <a:chExt cx="0" cy="0"/>
+        </a:xfrm>
+      </p:grpSpPr>
       <p:sp>
         <p:nvSpPr>
           <p:cNvPr id="2" name="TextBox 1"/>
@@ -23509,7 +23531,7 @@
           <a:noFill/>
         </p:spPr>
         <p:txBody>
-          <a:bodyPr wrap="none" lIns="0" rIns="0" tIns="0" bIns="0" anchor="t">
+          <a:bodyPr wrap="none" lIns="0" tIns="0" rIns="0" bIns="0" anchor="t">
             <a:noAutofit/>
           </a:bodyPr>
           <a:lstStyle/>
@@ -23554,7 +23576,7 @@
           <a:noFill/>
         </p:spPr>
         <p:txBody>
-          <a:bodyPr wrap="none" lIns="0" rIns="0" tIns="0" bIns="0" anchor="t">
+          <a:bodyPr wrap="none" lIns="0" tIns="0" rIns="0" bIns="0" anchor="t">
             <a:noAutofit/>
           </a:bodyPr>
           <a:lstStyle/>
@@ -23599,7 +23621,7 @@
           <a:noFill/>
         </p:spPr>
         <p:txBody>
-          <a:bodyPr wrap="none" lIns="0" rIns="0" tIns="0" bIns="0" anchor="t">
+          <a:bodyPr wrap="none" lIns="0" tIns="0" rIns="0" bIns="0" anchor="t">
             <a:noAutofit/>
           </a:bodyPr>
           <a:lstStyle/>
@@ -23707,6 +23729,7 @@
           <a:lstStyle/>
           <a:p>
             <a:pPr algn="ctr"/>
+            <a:endParaRPr/>
           </a:p>
         </p:txBody>
       </p:sp>
@@ -23727,7 +23750,7 @@
           <a:noFill/>
         </p:spPr>
         <p:txBody>
-          <a:bodyPr wrap="none" lIns="0" rIns="0" tIns="0" bIns="0" anchor="t">
+          <a:bodyPr wrap="none" lIns="0" tIns="0" rIns="0" bIns="0" anchor="t">
             <a:noAutofit/>
           </a:bodyPr>
           <a:lstStyle/>
@@ -23772,7 +23795,7 @@
           <a:noFill/>
         </p:spPr>
         <p:txBody>
-          <a:bodyPr wrap="none" lIns="0" rIns="0" tIns="0" bIns="0" anchor="t">
+          <a:bodyPr wrap="none" lIns="0" tIns="0" rIns="0" bIns="0" anchor="t">
             <a:noAutofit/>
           </a:bodyPr>
           <a:lstStyle/>
@@ -23845,6 +23868,7 @@
           <a:lstStyle/>
           <a:p>
             <a:pPr algn="ctr"/>
+            <a:endParaRPr/>
           </a:p>
         </p:txBody>
       </p:sp>
@@ -23865,7 +23889,7 @@
           <a:noFill/>
         </p:spPr>
         <p:txBody>
-          <a:bodyPr wrap="none" lIns="0" rIns="0" tIns="0" bIns="0" anchor="t">
+          <a:bodyPr wrap="none" lIns="0" tIns="0" rIns="0" bIns="0" anchor="t">
             <a:noAutofit/>
           </a:bodyPr>
           <a:lstStyle/>
@@ -23910,7 +23934,7 @@
           <a:noFill/>
         </p:spPr>
         <p:txBody>
-          <a:bodyPr wrap="none" lIns="0" rIns="0" tIns="0" bIns="0" anchor="t">
+          <a:bodyPr wrap="none" lIns="0" tIns="0" rIns="0" bIns="0" anchor="t">
             <a:noAutofit/>
           </a:bodyPr>
           <a:lstStyle/>
@@ -23985,6 +24009,7 @@
           <a:lstStyle/>
           <a:p>
             <a:pPr algn="ctr"/>
+            <a:endParaRPr/>
           </a:p>
         </p:txBody>
       </p:sp>
@@ -24005,7 +24030,7 @@
           <a:noFill/>
         </p:spPr>
         <p:txBody>
-          <a:bodyPr wrap="none" lIns="0" rIns="0" tIns="0" bIns="0" anchor="t">
+          <a:bodyPr wrap="none" lIns="0" tIns="0" rIns="0" bIns="0" anchor="t">
             <a:noAutofit/>
           </a:bodyPr>
           <a:lstStyle/>
@@ -24078,6 +24103,7 @@
           <a:lstStyle/>
           <a:p>
             <a:pPr algn="ctr"/>
+            <a:endParaRPr/>
           </a:p>
         </p:txBody>
       </p:sp>
@@ -24098,7 +24124,7 @@
           <a:noFill/>
         </p:spPr>
         <p:txBody>
-          <a:bodyPr wrap="none" lIns="0" rIns="0" tIns="0" bIns="0" anchor="t">
+          <a:bodyPr wrap="none" lIns="0" tIns="0" rIns="0" bIns="0" anchor="t">
             <a:noAutofit/>
           </a:bodyPr>
           <a:lstStyle/>
@@ -24143,7 +24169,7 @@
           <a:noFill/>
         </p:spPr>
         <p:txBody>
-          <a:bodyPr wrap="none" lIns="0" rIns="0" tIns="0" bIns="0" anchor="t">
+          <a:bodyPr wrap="none" lIns="0" tIns="0" rIns="0" bIns="0" anchor="t">
             <a:noAutofit/>
           </a:bodyPr>
           <a:lstStyle/>
@@ -24214,6 +24240,7 @@
           <a:lstStyle/>
           <a:p>
             <a:pPr algn="ctr"/>
+            <a:endParaRPr/>
           </a:p>
         </p:txBody>
       </p:sp>
@@ -24234,7 +24261,7 @@
           <a:noFill/>
         </p:spPr>
         <p:txBody>
-          <a:bodyPr wrap="none" lIns="0" rIns="0" tIns="0" bIns="0" anchor="t">
+          <a:bodyPr wrap="none" lIns="0" tIns="0" rIns="0" bIns="0" anchor="t">
             <a:noAutofit/>
           </a:bodyPr>
           <a:lstStyle/>
@@ -24279,7 +24306,7 @@
           <a:noFill/>
         </p:spPr>
         <p:txBody>
-          <a:bodyPr wrap="none" lIns="0" rIns="0" tIns="0" bIns="0" anchor="t">
+          <a:bodyPr wrap="none" lIns="0" tIns="0" rIns="0" bIns="0" anchor="t">
             <a:noAutofit/>
           </a:bodyPr>
           <a:lstStyle/>
@@ -24352,6 +24379,7 @@
           <a:lstStyle/>
           <a:p>
             <a:pPr algn="ctr"/>
+            <a:endParaRPr/>
           </a:p>
         </p:txBody>
       </p:sp>
@@ -24372,7 +24400,7 @@
           <a:noFill/>
         </p:spPr>
         <p:txBody>
-          <a:bodyPr wrap="none" lIns="0" rIns="0" tIns="0" bIns="0" anchor="t">
+          <a:bodyPr wrap="none" lIns="0" tIns="0" rIns="0" bIns="0" anchor="t">
             <a:noAutofit/>
           </a:bodyPr>
           <a:lstStyle/>
@@ -24417,7 +24445,7 @@
           <a:noFill/>
         </p:spPr>
         <p:txBody>
-          <a:bodyPr wrap="none" lIns="0" rIns="0" tIns="0" bIns="0" anchor="t">
+          <a:bodyPr wrap="none" lIns="0" tIns="0" rIns="0" bIns="0" anchor="t">
             <a:noAutofit/>
           </a:bodyPr>
           <a:lstStyle/>
@@ -24462,7 +24490,7 @@
           <a:noFill/>
         </p:spPr>
         <p:txBody>
-          <a:bodyPr wrap="none" lIns="0" rIns="0" tIns="0" bIns="0" anchor="t">
+          <a:bodyPr wrap="none" lIns="0" tIns="0" rIns="0" bIns="0" anchor="t">
             <a:noAutofit/>
           </a:bodyPr>
           <a:lstStyle/>
@@ -24535,6 +24563,7 @@
           <a:lstStyle/>
           <a:p>
             <a:pPr algn="ctr"/>
+            <a:endParaRPr/>
           </a:p>
         </p:txBody>
       </p:sp>
@@ -24555,7 +24584,7 @@
           <a:noFill/>
         </p:spPr>
         <p:txBody>
-          <a:bodyPr wrap="none" lIns="0" rIns="0" tIns="0" bIns="0" anchor="t">
+          <a:bodyPr wrap="none" lIns="0" tIns="0" rIns="0" bIns="0" anchor="t">
             <a:noAutofit/>
           </a:bodyPr>
           <a:lstStyle/>
@@ -24600,7 +24629,7 @@
           <a:noFill/>
         </p:spPr>
         <p:txBody>
-          <a:bodyPr wrap="none" lIns="0" rIns="0" tIns="0" bIns="0" anchor="t">
+          <a:bodyPr wrap="none" lIns="0" tIns="0" rIns="0" bIns="0" anchor="t">
             <a:noAutofit/>
           </a:bodyPr>
           <a:lstStyle/>
@@ -24645,7 +24674,7 @@
           <a:noFill/>
         </p:spPr>
         <p:txBody>
-          <a:bodyPr wrap="none" lIns="0" rIns="0" tIns="0" bIns="0" anchor="t">
+          <a:bodyPr wrap="none" lIns="0" tIns="0" rIns="0" bIns="0" anchor="t">
             <a:noAutofit/>
           </a:bodyPr>
           <a:lstStyle/>
@@ -24936,6 +24965,7 @@
           <a:lstStyle/>
           <a:p>
             <a:pPr algn="ctr"/>
+            <a:endParaRPr/>
           </a:p>
         </p:txBody>
       </p:sp>
@@ -24956,7 +24986,7 @@
           <a:noFill/>
         </p:spPr>
         <p:txBody>
-          <a:bodyPr wrap="none" lIns="0" rIns="0" tIns="0" bIns="0" anchor="t">
+          <a:bodyPr wrap="none" lIns="0" tIns="0" rIns="0" bIns="0" anchor="t">
             <a:noAutofit/>
           </a:bodyPr>
           <a:lstStyle/>
@@ -25037,7 +25067,7 @@
           <a:noFill/>
         </p:spPr>
         <p:txBody>
-          <a:bodyPr wrap="none" lIns="0" rIns="0" tIns="0" bIns="0" anchor="t">
+          <a:bodyPr wrap="none" lIns="0" tIns="0" rIns="0" bIns="0" anchor="t">
             <a:noAutofit/>
           </a:bodyPr>
           <a:lstStyle/>
@@ -25161,7 +25191,7 @@
           <a:noFill/>
         </p:spPr>
         <p:txBody>
-          <a:bodyPr wrap="none" lIns="0" rIns="0" tIns="0" bIns="0" anchor="t">
+          <a:bodyPr wrap="none" lIns="0" tIns="0" rIns="0" bIns="0" anchor="t">
             <a:noAutofit/>
           </a:bodyPr>
           <a:lstStyle/>
@@ -25206,7 +25236,7 @@
           <a:noFill/>
         </p:spPr>
         <p:txBody>
-          <a:bodyPr wrap="none" lIns="0" rIns="0" tIns="0" bIns="0" anchor="t">
+          <a:bodyPr wrap="none" lIns="0" tIns="0" rIns="0" bIns="0" anchor="t">
             <a:noAutofit/>
           </a:bodyPr>
           <a:lstStyle/>
@@ -25243,7 +25273,7 @@
 </file>
 
 <file path=ppt/slides/slide7.xml><?xml version="1.0" encoding="utf-8"?>
-<p:sld xmlns:a="http://schemas.openxmlformats.org/drawingml/2006/main" xmlns:p="http://schemas.openxmlformats.org/presentationml/2006/main" xmlns:r="http://schemas.openxmlformats.org/officeDocument/2006/relationships">
+<p:sld xmlns:a="http://schemas.openxmlformats.org/drawingml/2006/main" xmlns:r="http://schemas.openxmlformats.org/officeDocument/2006/relationships" xmlns:p="http://schemas.openxmlformats.org/presentationml/2006/main">
   <p:cSld>
     <p:bg>
       <p:bgPr>
@@ -25259,7 +25289,14 @@
         <p:cNvGrpSpPr/>
         <p:nvPr/>
       </p:nvGrpSpPr>
-      <p:grpSpPr/>
+      <p:grpSpPr>
+        <a:xfrm>
+          <a:off x="0" y="0"/>
+          <a:ext cx="0" cy="0"/>
+          <a:chOff x="0" y="0"/>
+          <a:chExt cx="0" cy="0"/>
+        </a:xfrm>
+      </p:grpSpPr>
       <p:sp>
         <p:nvSpPr>
           <p:cNvPr id="2" name="TextBox 1"/>
@@ -25277,7 +25314,7 @@
           <a:noFill/>
         </p:spPr>
         <p:txBody>
-          <a:bodyPr wrap="none" lIns="0" rIns="0" tIns="0" bIns="0" anchor="t">
+          <a:bodyPr wrap="none" lIns="0" tIns="0" rIns="0" bIns="0" anchor="t">
             <a:noAutofit/>
           </a:bodyPr>
           <a:lstStyle/>
@@ -25322,7 +25359,7 @@
           <a:noFill/>
         </p:spPr>
         <p:txBody>
-          <a:bodyPr wrap="none" lIns="0" rIns="0" tIns="0" bIns="0" anchor="t">
+          <a:bodyPr wrap="none" lIns="0" tIns="0" rIns="0" bIns="0" anchor="t">
             <a:noAutofit/>
           </a:bodyPr>
           <a:lstStyle/>
@@ -25367,7 +25404,7 @@
           <a:noFill/>
         </p:spPr>
         <p:txBody>
-          <a:bodyPr wrap="none" lIns="0" rIns="0" tIns="0" bIns="0" anchor="t">
+          <a:bodyPr wrap="none" lIns="0" tIns="0" rIns="0" bIns="0" anchor="t">
             <a:noAutofit/>
           </a:bodyPr>
           <a:lstStyle/>
@@ -25475,6 +25512,7 @@
           <a:lstStyle/>
           <a:p>
             <a:pPr algn="ctr"/>
+            <a:endParaRPr/>
           </a:p>
         </p:txBody>
       </p:sp>
@@ -25495,7 +25533,7 @@
           <a:noFill/>
         </p:spPr>
         <p:txBody>
-          <a:bodyPr wrap="none" lIns="0" rIns="0" tIns="0" bIns="0" anchor="t">
+          <a:bodyPr wrap="none" lIns="0" tIns="0" rIns="0" bIns="0" anchor="t">
             <a:noAutofit/>
           </a:bodyPr>
           <a:lstStyle/>
@@ -25575,7 +25613,7 @@
           <a:noFill/>
         </p:spPr>
         <p:txBody>
-          <a:bodyPr wrap="none" lIns="0" rIns="0" tIns="0" bIns="0" anchor="t">
+          <a:bodyPr wrap="none" lIns="0" tIns="0" rIns="0" bIns="0" anchor="t">
             <a:noAutofit/>
           </a:bodyPr>
           <a:lstStyle/>
@@ -25620,7 +25658,7 @@
           <a:noFill/>
         </p:spPr>
         <p:txBody>
-          <a:bodyPr wrap="none" lIns="0" rIns="0" tIns="0" bIns="0" anchor="t">
+          <a:bodyPr wrap="none" lIns="0" tIns="0" rIns="0" bIns="0" anchor="t">
             <a:noAutofit/>
           </a:bodyPr>
           <a:lstStyle/>
@@ -25665,7 +25703,7 @@
           <a:noFill/>
         </p:spPr>
         <p:txBody>
-          <a:bodyPr wrap="none" lIns="0" rIns="0" tIns="0" bIns="0" anchor="t">
+          <a:bodyPr wrap="none" lIns="0" tIns="0" rIns="0" bIns="0" anchor="t">
             <a:noAutofit/>
           </a:bodyPr>
           <a:lstStyle/>
@@ -25682,7 +25720,7 @@
               </a:spcAft>
             </a:pPr>
             <a:r>
-              <a:rPr sz="1200">
+              <a:rPr sz="1200" dirty="0">
                 <a:solidFill>
                   <a:srgbClr val="AAB3BD"/>
                 </a:solidFill>
@@ -25704,7 +25742,7 @@
               </a:spcAft>
             </a:pPr>
             <a:r>
-              <a:rPr sz="1200">
+              <a:rPr sz="1200" dirty="0">
                 <a:solidFill>
                   <a:srgbClr val="AAB3BD"/>
                 </a:solidFill>
@@ -25767,7 +25805,7 @@
           <a:noFill/>
         </p:spPr>
         <p:txBody>
-          <a:bodyPr wrap="none" lIns="0" rIns="0" tIns="0" bIns="0" anchor="t">
+          <a:bodyPr wrap="none" lIns="0" tIns="0" rIns="0" bIns="0" anchor="t">
             <a:noAutofit/>
           </a:bodyPr>
           <a:lstStyle/>
@@ -25812,7 +25850,7 @@
           <a:noFill/>
         </p:spPr>
         <p:txBody>
-          <a:bodyPr wrap="none" lIns="0" rIns="0" tIns="0" bIns="0" anchor="t">
+          <a:bodyPr wrap="none" lIns="0" tIns="0" rIns="0" bIns="0" anchor="t">
             <a:noAutofit/>
           </a:bodyPr>
           <a:lstStyle/>
@@ -25857,7 +25895,7 @@
           <a:noFill/>
         </p:spPr>
         <p:txBody>
-          <a:bodyPr wrap="none" lIns="0" rIns="0" tIns="0" bIns="0" anchor="t">
+          <a:bodyPr wrap="none" lIns="0" tIns="0" rIns="0" bIns="0" anchor="t">
             <a:noAutofit/>
           </a:bodyPr>
           <a:lstStyle/>
@@ -25937,7 +25975,7 @@
           <a:noFill/>
         </p:spPr>
         <p:txBody>
-          <a:bodyPr wrap="none" lIns="0" rIns="0" tIns="0" bIns="0" anchor="t">
+          <a:bodyPr wrap="none" lIns="0" tIns="0" rIns="0" bIns="0" anchor="t">
             <a:noAutofit/>
           </a:bodyPr>
           <a:lstStyle/>
@@ -25982,7 +26020,7 @@
           <a:noFill/>
         </p:spPr>
         <p:txBody>
-          <a:bodyPr wrap="none" lIns="0" rIns="0" tIns="0" bIns="0" anchor="t">
+          <a:bodyPr wrap="none" lIns="0" tIns="0" rIns="0" bIns="0" anchor="t">
             <a:noAutofit/>
           </a:bodyPr>
           <a:lstStyle/>
@@ -26027,7 +26065,7 @@
           <a:noFill/>
         </p:spPr>
         <p:txBody>
-          <a:bodyPr wrap="none" lIns="0" rIns="0" tIns="0" bIns="0" anchor="t">
+          <a:bodyPr wrap="none" lIns="0" tIns="0" rIns="0" bIns="0" anchor="t">
             <a:noAutofit/>
           </a:bodyPr>
           <a:lstStyle/>
@@ -26129,7 +26167,7 @@
           <a:noFill/>
         </p:spPr>
         <p:txBody>
-          <a:bodyPr wrap="none" lIns="0" rIns="0" tIns="0" bIns="0" anchor="t">
+          <a:bodyPr wrap="none" lIns="0" tIns="0" rIns="0" bIns="0" anchor="t">
             <a:noAutofit/>
           </a:bodyPr>
           <a:lstStyle/>
@@ -26174,7 +26212,7 @@
           <a:noFill/>
         </p:spPr>
         <p:txBody>
-          <a:bodyPr wrap="none" lIns="0" rIns="0" tIns="0" bIns="0" anchor="t">
+          <a:bodyPr wrap="none" lIns="0" tIns="0" rIns="0" bIns="0" anchor="t">
             <a:noAutofit/>
           </a:bodyPr>
           <a:lstStyle/>
@@ -26219,7 +26257,7 @@
           <a:noFill/>
         </p:spPr>
         <p:txBody>
-          <a:bodyPr wrap="none" lIns="0" rIns="0" tIns="0" bIns="0" anchor="t">
+          <a:bodyPr wrap="none" lIns="0" tIns="0" rIns="0" bIns="0" anchor="t">
             <a:noAutofit/>
           </a:bodyPr>
           <a:lstStyle/>
@@ -26321,7 +26359,7 @@
           <a:noFill/>
         </p:spPr>
         <p:txBody>
-          <a:bodyPr wrap="none" lIns="0" rIns="0" tIns="0" bIns="0" anchor="t">
+          <a:bodyPr wrap="none" lIns="0" tIns="0" rIns="0" bIns="0" anchor="t">
             <a:noAutofit/>
           </a:bodyPr>
           <a:lstStyle/>
@@ -26416,6 +26454,7 @@
           <a:lstStyle/>
           <a:p>
             <a:pPr algn="ctr"/>
+            <a:endParaRPr/>
           </a:p>
         </p:txBody>
       </p:sp>
@@ -26732,7 +26771,7 @@
           <a:noFill/>
         </p:spPr>
         <p:txBody>
-          <a:bodyPr wrap="none" lIns="0" rIns="0" tIns="0" bIns="0" anchor="t">
+          <a:bodyPr wrap="none" lIns="0" tIns="0" rIns="0" bIns="0" anchor="t">
             <a:noAutofit/>
           </a:bodyPr>
           <a:lstStyle/>
@@ -26777,7 +26816,7 @@
           <a:noFill/>
         </p:spPr>
         <p:txBody>
-          <a:bodyPr wrap="none" lIns="0" rIns="0" tIns="0" bIns="0" anchor="t">
+          <a:bodyPr wrap="none" lIns="0" tIns="0" rIns="0" bIns="0" anchor="t">
             <a:noAutofit/>
           </a:bodyPr>
           <a:lstStyle/>
@@ -26844,7 +26883,7 @@
           <a:noFill/>
         </p:spPr>
         <p:txBody>
-          <a:bodyPr wrap="none" lIns="0" rIns="0" tIns="0" bIns="0" anchor="t">
+          <a:bodyPr wrap="none" lIns="0" tIns="0" rIns="0" bIns="0" anchor="t">
             <a:noAutofit/>
           </a:bodyPr>
           <a:lstStyle/>
@@ -26939,6 +26978,7 @@
           <a:lstStyle/>
           <a:p>
             <a:pPr algn="ctr"/>
+            <a:endParaRPr/>
           </a:p>
         </p:txBody>
       </p:sp>
@@ -26959,7 +26999,7 @@
           <a:noFill/>
         </p:spPr>
         <p:txBody>
-          <a:bodyPr wrap="none" lIns="0" rIns="0" tIns="0" bIns="0" anchor="t">
+          <a:bodyPr wrap="none" lIns="0" tIns="0" rIns="0" bIns="0" anchor="t">
             <a:noAutofit/>
           </a:bodyPr>
           <a:lstStyle/>
@@ -27004,7 +27044,7 @@
           <a:noFill/>
         </p:spPr>
         <p:txBody>
-          <a:bodyPr wrap="none" lIns="0" rIns="0" tIns="0" bIns="0" anchor="t">
+          <a:bodyPr wrap="none" lIns="0" tIns="0" rIns="0" bIns="0" anchor="t">
             <a:noAutofit/>
           </a:bodyPr>
           <a:lstStyle/>
@@ -27049,7 +27089,7 @@
           <a:noFill/>
         </p:spPr>
         <p:txBody>
-          <a:bodyPr wrap="none" lIns="0" rIns="0" tIns="0" bIns="0" anchor="t">
+          <a:bodyPr wrap="none" lIns="0" tIns="0" rIns="0" bIns="0" anchor="t">
             <a:noAutofit/>
           </a:bodyPr>
           <a:lstStyle/>
@@ -27138,7 +27178,7 @@
           <a:noFill/>
         </p:spPr>
         <p:txBody>
-          <a:bodyPr wrap="none" lIns="0" rIns="0" tIns="0" bIns="0" anchor="t">
+          <a:bodyPr wrap="none" lIns="0" tIns="0" rIns="0" bIns="0" anchor="t">
             <a:noAutofit/>
           </a:bodyPr>
           <a:lstStyle/>
@@ -27240,7 +27280,7 @@
           <a:noFill/>
         </p:spPr>
         <p:txBody>
-          <a:bodyPr wrap="none" lIns="0" rIns="0" tIns="0" bIns="0" anchor="t">
+          <a:bodyPr wrap="none" lIns="0" tIns="0" rIns="0" bIns="0" anchor="t">
             <a:noAutofit/>
           </a:bodyPr>
           <a:lstStyle/>
@@ -27285,7 +27325,7 @@
           <a:noFill/>
         </p:spPr>
         <p:txBody>
-          <a:bodyPr wrap="none" lIns="0" rIns="0" tIns="0" bIns="0" anchor="t">
+          <a:bodyPr wrap="none" lIns="0" tIns="0" rIns="0" bIns="0" anchor="t">
             <a:noAutofit/>
           </a:bodyPr>
           <a:lstStyle/>
@@ -27322,7 +27362,7 @@
 </file>
 
 <file path=ppt/slides/slide8.xml><?xml version="1.0" encoding="utf-8"?>
-<p:sld xmlns:a="http://schemas.openxmlformats.org/drawingml/2006/main" xmlns:p="http://schemas.openxmlformats.org/presentationml/2006/main" xmlns:r="http://schemas.openxmlformats.org/officeDocument/2006/relationships">
+<p:sld xmlns:a="http://schemas.openxmlformats.org/drawingml/2006/main" xmlns:r="http://schemas.openxmlformats.org/officeDocument/2006/relationships" xmlns:p="http://schemas.openxmlformats.org/presentationml/2006/main">
   <p:cSld>
     <p:bg>
       <p:bgPr>
@@ -27338,7 +27378,14 @@
         <p:cNvGrpSpPr/>
         <p:nvPr/>
       </p:nvGrpSpPr>
-      <p:grpSpPr/>
+      <p:grpSpPr>
+        <a:xfrm>
+          <a:off x="0" y="0"/>
+          <a:ext cx="0" cy="0"/>
+          <a:chOff x="0" y="0"/>
+          <a:chExt cx="0" cy="0"/>
+        </a:xfrm>
+      </p:grpSpPr>
       <p:sp>
         <p:nvSpPr>
           <p:cNvPr id="2" name="TextBox 1"/>
@@ -27356,7 +27403,7 @@
           <a:noFill/>
         </p:spPr>
         <p:txBody>
-          <a:bodyPr wrap="none" lIns="0" rIns="0" tIns="0" bIns="0" anchor="t">
+          <a:bodyPr wrap="none" lIns="0" tIns="0" rIns="0" bIns="0" anchor="t">
             <a:noAutofit/>
           </a:bodyPr>
           <a:lstStyle/>
@@ -27401,7 +27448,7 @@
           <a:noFill/>
         </p:spPr>
         <p:txBody>
-          <a:bodyPr wrap="none" lIns="0" rIns="0" tIns="0" bIns="0" anchor="t">
+          <a:bodyPr wrap="none" lIns="0" tIns="0" rIns="0" bIns="0" anchor="t">
             <a:noAutofit/>
           </a:bodyPr>
           <a:lstStyle/>
@@ -27446,7 +27493,7 @@
           <a:noFill/>
         </p:spPr>
         <p:txBody>
-          <a:bodyPr wrap="none" lIns="0" rIns="0" tIns="0" bIns="0" anchor="t">
+          <a:bodyPr wrap="none" lIns="0" tIns="0" rIns="0" bIns="0" anchor="t">
             <a:noAutofit/>
           </a:bodyPr>
           <a:lstStyle/>
@@ -27534,7 +27581,7 @@
                 <a:srgbClr val="0B1118"/>
               </a:gs>
             </a:gsLst>
-            <a:lin scaled="0" ang="16200000"/>
+            <a:lin ang="16200000" scaled="0"/>
           </a:gradFill>
           <a:ln w="9525">
             <a:solidFill>
@@ -27562,6 +27609,7 @@
           <a:lstStyle/>
           <a:p>
             <a:pPr algn="ctr"/>
+            <a:endParaRPr/>
           </a:p>
         </p:txBody>
       </p:sp>
@@ -27902,6 +27950,7 @@
           <a:lstStyle/>
           <a:p>
             <a:pPr algn="ctr"/>
+            <a:endParaRPr/>
           </a:p>
         </p:txBody>
       </p:sp>
@@ -27922,7 +27971,7 @@
           <a:noFill/>
         </p:spPr>
         <p:txBody>
-          <a:bodyPr wrap="none" lIns="0" rIns="0" tIns="0" bIns="0" anchor="t">
+          <a:bodyPr wrap="none" lIns="0" tIns="0" rIns="0" bIns="0" anchor="t">
             <a:noAutofit/>
           </a:bodyPr>
           <a:lstStyle/>
@@ -27967,7 +28016,7 @@
           <a:noFill/>
         </p:spPr>
         <p:txBody>
-          <a:bodyPr wrap="none" lIns="0" rIns="0" tIns="0" bIns="0" anchor="t">
+          <a:bodyPr wrap="none" lIns="0" tIns="0" rIns="0" bIns="0" anchor="t">
             <a:noAutofit/>
           </a:bodyPr>
           <a:lstStyle/>
@@ -28012,7 +28061,7 @@
           <a:noFill/>
         </p:spPr>
         <p:txBody>
-          <a:bodyPr wrap="none" lIns="0" rIns="0" tIns="0" bIns="0" anchor="t">
+          <a:bodyPr wrap="none" lIns="0" tIns="0" rIns="0" bIns="0" anchor="t">
             <a:noAutofit/>
           </a:bodyPr>
           <a:lstStyle/>
@@ -28079,7 +28128,7 @@
           <a:noFill/>
         </p:spPr>
         <p:txBody>
-          <a:bodyPr wrap="none" lIns="0" rIns="0" tIns="0" bIns="0" anchor="t">
+          <a:bodyPr wrap="none" lIns="0" tIns="0" rIns="0" bIns="0" anchor="t">
             <a:noAutofit/>
           </a:bodyPr>
           <a:lstStyle/>
@@ -28183,6 +28232,7 @@
           <a:lstStyle/>
           <a:p>
             <a:pPr algn="ctr"/>
+            <a:endParaRPr/>
           </a:p>
         </p:txBody>
       </p:sp>
@@ -28203,7 +28253,7 @@
           <a:noFill/>
         </p:spPr>
         <p:txBody>
-          <a:bodyPr wrap="none" lIns="0" rIns="0" tIns="0" bIns="0" anchor="t">
+          <a:bodyPr wrap="none" lIns="0" tIns="0" rIns="0" bIns="0" anchor="t">
             <a:noAutofit/>
           </a:bodyPr>
           <a:lstStyle/>
@@ -28248,7 +28298,7 @@
           <a:noFill/>
         </p:spPr>
         <p:txBody>
-          <a:bodyPr wrap="none" lIns="0" rIns="0" tIns="0" bIns="0" anchor="t">
+          <a:bodyPr wrap="none" lIns="0" tIns="0" rIns="0" bIns="0" anchor="t">
             <a:noAutofit/>
           </a:bodyPr>
           <a:lstStyle/>
@@ -28293,7 +28343,7 @@
           <a:noFill/>
         </p:spPr>
         <p:txBody>
-          <a:bodyPr wrap="none" lIns="0" rIns="0" tIns="0" bIns="0" anchor="t">
+          <a:bodyPr wrap="none" lIns="0" tIns="0" rIns="0" bIns="0" anchor="t">
             <a:noAutofit/>
           </a:bodyPr>
           <a:lstStyle/>
@@ -28360,7 +28410,7 @@
           <a:noFill/>
         </p:spPr>
         <p:txBody>
-          <a:bodyPr wrap="none" lIns="0" rIns="0" tIns="0" bIns="0" anchor="t">
+          <a:bodyPr wrap="none" lIns="0" tIns="0" rIns="0" bIns="0" anchor="t">
             <a:noAutofit/>
           </a:bodyPr>
           <a:lstStyle/>
@@ -28486,6 +28536,7 @@
           <a:lstStyle/>
           <a:p>
             <a:pPr algn="ctr"/>
+            <a:endParaRPr/>
           </a:p>
         </p:txBody>
       </p:sp>
@@ -28506,7 +28557,7 @@
           <a:noFill/>
         </p:spPr>
         <p:txBody>
-          <a:bodyPr wrap="none" lIns="0" rIns="0" tIns="0" bIns="0" anchor="t">
+          <a:bodyPr wrap="none" lIns="0" tIns="0" rIns="0" bIns="0" anchor="t">
             <a:noAutofit/>
           </a:bodyPr>
           <a:lstStyle/>
@@ -28551,7 +28602,7 @@
           <a:noFill/>
         </p:spPr>
         <p:txBody>
-          <a:bodyPr wrap="none" lIns="0" rIns="0" tIns="0" bIns="0" anchor="t">
+          <a:bodyPr wrap="none" lIns="0" tIns="0" rIns="0" bIns="0" anchor="t">
             <a:noAutofit/>
           </a:bodyPr>
           <a:lstStyle/>
@@ -28596,7 +28647,7 @@
           <a:noFill/>
         </p:spPr>
         <p:txBody>
-          <a:bodyPr wrap="none" lIns="0" rIns="0" tIns="0" bIns="0" anchor="t">
+          <a:bodyPr wrap="none" lIns="0" tIns="0" rIns="0" bIns="0" anchor="t">
             <a:noAutofit/>
           </a:bodyPr>
           <a:lstStyle/>
@@ -28663,7 +28714,7 @@
           <a:noFill/>
         </p:spPr>
         <p:txBody>
-          <a:bodyPr wrap="none" lIns="0" rIns="0" tIns="0" bIns="0" anchor="t">
+          <a:bodyPr wrap="none" lIns="0" tIns="0" rIns="0" bIns="0" anchor="t">
             <a:noAutofit/>
           </a:bodyPr>
           <a:lstStyle/>
@@ -28789,6 +28840,7 @@
           <a:lstStyle/>
           <a:p>
             <a:pPr algn="ctr"/>
+            <a:endParaRPr/>
           </a:p>
         </p:txBody>
       </p:sp>
@@ -28809,7 +28861,7 @@
           <a:noFill/>
         </p:spPr>
         <p:txBody>
-          <a:bodyPr wrap="none" lIns="0" rIns="0" tIns="0" bIns="0" anchor="t">
+          <a:bodyPr wrap="none" lIns="0" tIns="0" rIns="0" bIns="0" anchor="t">
             <a:noAutofit/>
           </a:bodyPr>
           <a:lstStyle/>
@@ -28854,7 +28906,7 @@
           <a:noFill/>
         </p:spPr>
         <p:txBody>
-          <a:bodyPr wrap="none" lIns="0" rIns="0" tIns="0" bIns="0" anchor="t">
+          <a:bodyPr wrap="none" lIns="0" tIns="0" rIns="0" bIns="0" anchor="t">
             <a:noAutofit/>
           </a:bodyPr>
           <a:lstStyle/>
@@ -28899,7 +28951,7 @@
           <a:noFill/>
         </p:spPr>
         <p:txBody>
-          <a:bodyPr wrap="none" lIns="0" rIns="0" tIns="0" bIns="0" anchor="t">
+          <a:bodyPr wrap="none" lIns="0" tIns="0" rIns="0" bIns="0" anchor="t">
             <a:noAutofit/>
           </a:bodyPr>
           <a:lstStyle/>
@@ -28944,7 +28996,7 @@
           <a:noFill/>
         </p:spPr>
         <p:txBody>
-          <a:bodyPr wrap="none" lIns="0" rIns="0" tIns="0" bIns="0" anchor="t">
+          <a:bodyPr wrap="none" lIns="0" tIns="0" rIns="0" bIns="0" anchor="t">
             <a:noAutofit/>
           </a:bodyPr>
           <a:lstStyle/>
@@ -29070,6 +29122,7 @@
           <a:lstStyle/>
           <a:p>
             <a:pPr algn="ctr"/>
+            <a:endParaRPr/>
           </a:p>
         </p:txBody>
       </p:sp>
@@ -29090,7 +29143,7 @@
           <a:noFill/>
         </p:spPr>
         <p:txBody>
-          <a:bodyPr wrap="none" lIns="0" rIns="0" tIns="0" bIns="0" anchor="t">
+          <a:bodyPr wrap="none" lIns="0" tIns="0" rIns="0" bIns="0" anchor="t">
             <a:noAutofit/>
           </a:bodyPr>
           <a:lstStyle/>
@@ -29135,7 +29188,7 @@
           <a:noFill/>
         </p:spPr>
         <p:txBody>
-          <a:bodyPr wrap="none" lIns="0" rIns="0" tIns="0" bIns="0" anchor="t">
+          <a:bodyPr wrap="none" lIns="0" tIns="0" rIns="0" bIns="0" anchor="t">
             <a:noAutofit/>
           </a:bodyPr>
           <a:lstStyle/>
@@ -29180,7 +29233,7 @@
           <a:noFill/>
         </p:spPr>
         <p:txBody>
-          <a:bodyPr wrap="none" lIns="0" rIns="0" tIns="0" bIns="0" anchor="t">
+          <a:bodyPr wrap="none" lIns="0" tIns="0" rIns="0" bIns="0" anchor="t">
             <a:noAutofit/>
           </a:bodyPr>
           <a:lstStyle/>
@@ -29225,7 +29278,7 @@
           <a:noFill/>
         </p:spPr>
         <p:txBody>
-          <a:bodyPr wrap="none" lIns="0" rIns="0" tIns="0" bIns="0" anchor="t">
+          <a:bodyPr wrap="none" lIns="0" tIns="0" rIns="0" bIns="0" anchor="t">
             <a:noAutofit/>
           </a:bodyPr>
           <a:lstStyle/>
@@ -29292,7 +29345,7 @@
           <a:noFill/>
         </p:spPr>
         <p:txBody>
-          <a:bodyPr wrap="none" lIns="0" rIns="0" tIns="0" bIns="0" anchor="t">
+          <a:bodyPr wrap="none" lIns="0" tIns="0" rIns="0" bIns="0" anchor="t">
             <a:noAutofit/>
           </a:bodyPr>
           <a:lstStyle/>
@@ -29309,35 +29362,13 @@
               </a:spcAft>
             </a:pPr>
             <a:r>
-              <a:rPr sz="1200">
+              <a:rPr sz="1200" dirty="0">
                 <a:solidFill>
                   <a:srgbClr val="AAB3BD"/>
                 </a:solidFill>
                 <a:latin typeface="Geist"/>
               </a:rPr>
-              <a:t>Every stage exchanges work through the same propagating effect, and the audit log accumulates across all five. You can enter at any layer and leave</a:t>
-            </a:r>
-          </a:p>
-          <a:p>
-            <a:pPr algn="l">
-              <a:lnSpc>
-                <a:spcPts val="1632"/>
-              </a:lnSpc>
-              <a:spcBef>
-                <a:spcPts val="0"/>
-              </a:spcBef>
-              <a:spcAft>
-                <a:spcPts val="0"/>
-              </a:spcAft>
-            </a:pPr>
-            <a:r>
-              <a:rPr sz="1200">
-                <a:solidFill>
-                  <a:srgbClr val="AAB3BD"/>
-                </a:solidFill>
-                <a:latin typeface="Geist"/>
-              </a:rPr>
-              <a:t>at any layer.</a:t>
+              <a:t>Every stage exchanges work through the same propagating effect, and the audit log accumulates across all five. </a:t>
             </a:r>
           </a:p>
         </p:txBody>
@@ -29394,7 +29425,7 @@
           <a:noFill/>
         </p:spPr>
         <p:txBody>
-          <a:bodyPr wrap="none" lIns="0" rIns="0" tIns="0" bIns="0" anchor="t">
+          <a:bodyPr wrap="none" lIns="0" tIns="0" rIns="0" bIns="0" anchor="t">
             <a:noAutofit/>
           </a:bodyPr>
           <a:lstStyle/>
@@ -29439,7 +29470,7 @@
           <a:noFill/>
         </p:spPr>
         <p:txBody>
-          <a:bodyPr wrap="none" lIns="0" rIns="0" tIns="0" bIns="0" anchor="t">
+          <a:bodyPr wrap="none" lIns="0" tIns="0" rIns="0" bIns="0" anchor="t">
             <a:noAutofit/>
           </a:bodyPr>
           <a:lstStyle/>
@@ -29476,7 +29507,7 @@
 </file>
 
 <file path=ppt/slides/slide9.xml><?xml version="1.0" encoding="utf-8"?>
-<p:sld xmlns:a="http://schemas.openxmlformats.org/drawingml/2006/main" xmlns:p="http://schemas.openxmlformats.org/presentationml/2006/main" xmlns:r="http://schemas.openxmlformats.org/officeDocument/2006/relationships">
+<p:sld xmlns:a="http://schemas.openxmlformats.org/drawingml/2006/main" xmlns:r="http://schemas.openxmlformats.org/officeDocument/2006/relationships" xmlns:p="http://schemas.openxmlformats.org/presentationml/2006/main">
   <p:cSld>
     <p:bg>
       <p:bgPr>
@@ -29492,7 +29523,14 @@
         <p:cNvGrpSpPr/>
         <p:nvPr/>
       </p:nvGrpSpPr>
-      <p:grpSpPr/>
+      <p:grpSpPr>
+        <a:xfrm>
+          <a:off x="0" y="0"/>
+          <a:ext cx="0" cy="0"/>
+          <a:chOff x="0" y="0"/>
+          <a:chExt cx="0" cy="0"/>
+        </a:xfrm>
+      </p:grpSpPr>
       <p:sp>
         <p:nvSpPr>
           <p:cNvPr id="2" name="TextBox 1"/>
@@ -29510,7 +29548,7 @@
           <a:noFill/>
         </p:spPr>
         <p:txBody>
-          <a:bodyPr wrap="none" lIns="0" rIns="0" tIns="0" bIns="0" anchor="t">
+          <a:bodyPr wrap="none" lIns="0" tIns="0" rIns="0" bIns="0" anchor="t">
             <a:noAutofit/>
           </a:bodyPr>
           <a:lstStyle/>
@@ -29555,7 +29593,7 @@
           <a:noFill/>
         </p:spPr>
         <p:txBody>
-          <a:bodyPr wrap="none" lIns="0" rIns="0" tIns="0" bIns="0" anchor="t">
+          <a:bodyPr wrap="none" lIns="0" tIns="0" rIns="0" bIns="0" anchor="t">
             <a:noAutofit/>
           </a:bodyPr>
           <a:lstStyle/>
@@ -29600,7 +29638,7 @@
           <a:noFill/>
         </p:spPr>
         <p:txBody>
-          <a:bodyPr wrap="none" lIns="0" rIns="0" tIns="0" bIns="0" anchor="t">
+          <a:bodyPr wrap="none" lIns="0" tIns="0" rIns="0" bIns="0" anchor="t">
             <a:noAutofit/>
           </a:bodyPr>
           <a:lstStyle/>
@@ -29708,6 +29746,7 @@
           <a:lstStyle/>
           <a:p>
             <a:pPr algn="ctr"/>
+            <a:endParaRPr/>
           </a:p>
         </p:txBody>
       </p:sp>
@@ -30024,7 +30063,7 @@
           <a:noFill/>
         </p:spPr>
         <p:txBody>
-          <a:bodyPr wrap="none" lIns="0" rIns="0" tIns="0" bIns="0" anchor="t">
+          <a:bodyPr wrap="none" lIns="0" tIns="0" rIns="0" bIns="0" anchor="t">
             <a:noAutofit/>
           </a:bodyPr>
           <a:lstStyle/>
@@ -30093,6 +30132,7 @@
           <a:lstStyle/>
           <a:p>
             <a:pPr algn="ctr"/>
+            <a:endParaRPr/>
           </a:p>
         </p:txBody>
       </p:sp>
@@ -30113,7 +30153,7 @@
           <a:noFill/>
         </p:spPr>
         <p:txBody>
-          <a:bodyPr wrap="none" lIns="0" rIns="0" tIns="0" bIns="0" anchor="t">
+          <a:bodyPr wrap="none" lIns="0" tIns="0" rIns="0" bIns="0" anchor="t">
             <a:noAutofit/>
           </a:bodyPr>
           <a:lstStyle/>
@@ -30158,7 +30198,7 @@
           <a:noFill/>
         </p:spPr>
         <p:txBody>
-          <a:bodyPr wrap="none" lIns="0" rIns="0" tIns="0" bIns="0" anchor="t">
+          <a:bodyPr wrap="none" lIns="0" tIns="0" rIns="0" bIns="0" anchor="t">
             <a:noAutofit/>
           </a:bodyPr>
           <a:lstStyle/>
@@ -30249,6 +30289,7 @@
           <a:lstStyle/>
           <a:p>
             <a:pPr algn="ctr"/>
+            <a:endParaRPr/>
           </a:p>
         </p:txBody>
       </p:sp>
@@ -30269,7 +30310,7 @@
           <a:noFill/>
         </p:spPr>
         <p:txBody>
-          <a:bodyPr wrap="none" lIns="0" rIns="0" tIns="0" bIns="0" anchor="t">
+          <a:bodyPr wrap="none" lIns="0" tIns="0" rIns="0" bIns="0" anchor="t">
             <a:noAutofit/>
           </a:bodyPr>
           <a:lstStyle/>
@@ -30314,7 +30355,7 @@
           <a:noFill/>
         </p:spPr>
         <p:txBody>
-          <a:bodyPr wrap="none" lIns="0" rIns="0" tIns="0" bIns="0" anchor="t">
+          <a:bodyPr wrap="none" lIns="0" tIns="0" rIns="0" bIns="0" anchor="t">
             <a:noAutofit/>
           </a:bodyPr>
           <a:lstStyle/>
@@ -30405,6 +30446,7 @@
           <a:lstStyle/>
           <a:p>
             <a:pPr algn="ctr"/>
+            <a:endParaRPr/>
           </a:p>
         </p:txBody>
       </p:sp>
@@ -30425,7 +30467,7 @@
           <a:noFill/>
         </p:spPr>
         <p:txBody>
-          <a:bodyPr wrap="none" lIns="0" rIns="0" tIns="0" bIns="0" anchor="t">
+          <a:bodyPr wrap="none" lIns="0" tIns="0" rIns="0" bIns="0" anchor="t">
             <a:noAutofit/>
           </a:bodyPr>
           <a:lstStyle/>
@@ -30470,7 +30512,7 @@
           <a:noFill/>
         </p:spPr>
         <p:txBody>
-          <a:bodyPr wrap="none" lIns="0" rIns="0" tIns="0" bIns="0" anchor="t">
+          <a:bodyPr wrap="none" lIns="0" tIns="0" rIns="0" bIns="0" anchor="t">
             <a:noAutofit/>
           </a:bodyPr>
           <a:lstStyle/>
@@ -30537,7 +30579,7 @@
           <a:noFill/>
         </p:spPr>
         <p:txBody>
-          <a:bodyPr wrap="none" lIns="0" rIns="0" tIns="0" bIns="0" anchor="t">
+          <a:bodyPr wrap="none" lIns="0" tIns="0" rIns="0" bIns="0" anchor="t">
             <a:noAutofit/>
           </a:bodyPr>
           <a:lstStyle/>
@@ -30610,6 +30652,7 @@
           <a:lstStyle/>
           <a:p>
             <a:pPr algn="ctr"/>
+            <a:endParaRPr/>
           </a:p>
         </p:txBody>
       </p:sp>
@@ -30630,7 +30673,7 @@
           <a:noFill/>
         </p:spPr>
         <p:txBody>
-          <a:bodyPr wrap="none" lIns="0" rIns="0" tIns="0" bIns="0" anchor="t">
+          <a:bodyPr wrap="none" lIns="0" tIns="0" rIns="0" bIns="0" anchor="t">
             <a:noAutofit/>
           </a:bodyPr>
           <a:lstStyle/>
@@ -30647,13 +30690,13 @@
               </a:spcAft>
             </a:pPr>
             <a:r>
-              <a:rPr sz="1100" spc="88">
+              <a:rPr sz="1100" spc="88" dirty="0">
                 <a:solidFill>
                   <a:srgbClr val="5CD4E1"/>
                 </a:solidFill>
                 <a:latin typeface="JetBrains Mono Medium"/>
               </a:rPr>
-              <a:t>MEASURED, NOT ASSERTED</a:t>
+              <a:t>MEASURED</a:t>
             </a:r>
           </a:p>
         </p:txBody>
@@ -30710,7 +30753,7 @@
           <a:noFill/>
         </p:spPr>
         <p:txBody>
-          <a:bodyPr wrap="none" lIns="0" rIns="0" tIns="0" bIns="0" anchor="t">
+          <a:bodyPr wrap="none" lIns="0" tIns="0" rIns="0" bIns="0" anchor="t">
             <a:noAutofit/>
           </a:bodyPr>
           <a:lstStyle/>
@@ -30755,7 +30798,7 @@
           <a:noFill/>
         </p:spPr>
         <p:txBody>
-          <a:bodyPr wrap="none" lIns="0" rIns="0" tIns="0" bIns="0" anchor="t">
+          <a:bodyPr wrap="none" lIns="0" tIns="0" rIns="0" bIns="0" anchor="t">
             <a:noAutofit/>
           </a:bodyPr>
           <a:lstStyle/>
@@ -30835,7 +30878,7 @@
           <a:noFill/>
         </p:spPr>
         <p:txBody>
-          <a:bodyPr wrap="none" lIns="0" rIns="0" tIns="0" bIns="0" anchor="t">
+          <a:bodyPr wrap="none" lIns="0" tIns="0" rIns="0" bIns="0" anchor="t">
             <a:noAutofit/>
           </a:bodyPr>
           <a:lstStyle/>
@@ -30880,7 +30923,7 @@
           <a:noFill/>
         </p:spPr>
         <p:txBody>
-          <a:bodyPr wrap="none" lIns="0" rIns="0" tIns="0" bIns="0" anchor="t">
+          <a:bodyPr wrap="none" lIns="0" tIns="0" rIns="0" bIns="0" anchor="t">
             <a:noAutofit/>
           </a:bodyPr>
           <a:lstStyle/>
@@ -30982,7 +31025,7 @@
           <a:noFill/>
         </p:spPr>
         <p:txBody>
-          <a:bodyPr wrap="none" lIns="0" rIns="0" tIns="0" bIns="0" anchor="t">
+          <a:bodyPr wrap="none" lIns="0" tIns="0" rIns="0" bIns="0" anchor="t">
             <a:noAutofit/>
           </a:bodyPr>
           <a:lstStyle/>
@@ -31027,7 +31070,7 @@
           <a:noFill/>
         </p:spPr>
         <p:txBody>
-          <a:bodyPr wrap="none" lIns="0" rIns="0" tIns="0" bIns="0" anchor="t">
+          <a:bodyPr wrap="none" lIns="0" tIns="0" rIns="0" bIns="0" anchor="t">
             <a:noAutofit/>
           </a:bodyPr>
           <a:lstStyle/>
@@ -31129,7 +31172,7 @@
           <a:noFill/>
         </p:spPr>
         <p:txBody>
-          <a:bodyPr wrap="none" lIns="0" rIns="0" tIns="0" bIns="0" anchor="t">
+          <a:bodyPr wrap="none" lIns="0" tIns="0" rIns="0" bIns="0" anchor="t">
             <a:noAutofit/>
           </a:bodyPr>
           <a:lstStyle/>
@@ -31174,7 +31217,7 @@
           <a:noFill/>
         </p:spPr>
         <p:txBody>
-          <a:bodyPr wrap="none" lIns="0" rIns="0" tIns="0" bIns="0" anchor="t">
+          <a:bodyPr wrap="none" lIns="0" tIns="0" rIns="0" bIns="0" anchor="t">
             <a:noAutofit/>
           </a:bodyPr>
           <a:lstStyle/>
@@ -31276,7 +31319,7 @@
           <a:noFill/>
         </p:spPr>
         <p:txBody>
-          <a:bodyPr wrap="none" lIns="0" rIns="0" tIns="0" bIns="0" anchor="t">
+          <a:bodyPr wrap="none" lIns="0" tIns="0" rIns="0" bIns="0" anchor="t">
             <a:noAutofit/>
           </a:bodyPr>
           <a:lstStyle/>
@@ -31343,7 +31386,7 @@
           <a:noFill/>
         </p:spPr>
         <p:txBody>
-          <a:bodyPr wrap="none" lIns="0" rIns="0" tIns="0" bIns="0" anchor="t">
+          <a:bodyPr wrap="none" lIns="0" tIns="0" rIns="0" bIns="0" anchor="t">
             <a:noAutofit/>
           </a:bodyPr>
           <a:lstStyle/>
@@ -31423,7 +31466,7 @@
           <a:noFill/>
         </p:spPr>
         <p:txBody>
-          <a:bodyPr wrap="none" lIns="0" rIns="0" tIns="0" bIns="0" anchor="t">
+          <a:bodyPr wrap="none" lIns="0" tIns="0" rIns="0" bIns="0" anchor="t">
             <a:noAutofit/>
           </a:bodyPr>
           <a:lstStyle/>
@@ -31468,7 +31511,7 @@
           <a:noFill/>
         </p:spPr>
         <p:txBody>
-          <a:bodyPr wrap="none" lIns="0" rIns="0" tIns="0" bIns="0" anchor="t">
+          <a:bodyPr wrap="none" lIns="0" tIns="0" rIns="0" bIns="0" anchor="t">
             <a:noAutofit/>
           </a:bodyPr>
           <a:lstStyle/>
@@ -31835,44 +31878,44 @@
         <a:sysClr val="window" lastClr="FFFFFF"/>
       </a:lt1>
       <a:dk2>
-        <a:srgbClr val="1F497D"/>
+        <a:srgbClr val="0E2841"/>
       </a:dk2>
       <a:lt2>
-        <a:srgbClr val="EEECE1"/>
+        <a:srgbClr val="E8E8E8"/>
       </a:lt2>
       <a:accent1>
-        <a:srgbClr val="4F81BD"/>
+        <a:srgbClr val="156082"/>
       </a:accent1>
       <a:accent2>
-        <a:srgbClr val="C0504D"/>
+        <a:srgbClr val="E97132"/>
       </a:accent2>
       <a:accent3>
-        <a:srgbClr val="9BBB59"/>
+        <a:srgbClr val="196B24"/>
       </a:accent3>
       <a:accent4>
-        <a:srgbClr val="8064A2"/>
+        <a:srgbClr val="0F9ED5"/>
       </a:accent4>
       <a:accent5>
-        <a:srgbClr val="4BACC6"/>
+        <a:srgbClr val="A02B93"/>
       </a:accent5>
       <a:accent6>
-        <a:srgbClr val="F79646"/>
+        <a:srgbClr val="4EA72E"/>
       </a:accent6>
       <a:hlink>
-        <a:srgbClr val="0000FF"/>
+        <a:srgbClr val="467886"/>
       </a:hlink>
       <a:folHlink>
-        <a:srgbClr val="800080"/>
+        <a:srgbClr val="96607D"/>
       </a:folHlink>
     </a:clrScheme>
     <a:fontScheme name="Office">
       <a:majorFont>
-        <a:latin typeface="Calibri"/>
+        <a:latin typeface="Aptos Display" panose="02110004020202020204"/>
         <a:ea typeface=""/>
         <a:cs typeface=""/>
-        <a:font script="Jpan" typeface="ＭＳ Ｐゴシック"/>
+        <a:font script="Jpan" typeface="游ゴシック Light"/>
         <a:font script="Hang" typeface="맑은 고딕"/>
-        <a:font script="Hans" typeface="宋体"/>
+        <a:font script="Hans" typeface="等线 Light"/>
         <a:font script="Hant" typeface="新細明體"/>
         <a:font script="Arab" typeface="Times New Roman"/>
         <a:font script="Hebr" typeface="Times New Roman"/>
@@ -31900,14 +31943,31 @@
         <a:font script="Viet" typeface="Times New Roman"/>
         <a:font script="Uigh" typeface="Microsoft Uighur"/>
         <a:font script="Geor" typeface="Sylfaen"/>
+        <a:font script="Armn" typeface="Arial"/>
+        <a:font script="Bugi" typeface="Leelawadee UI"/>
+        <a:font script="Bopo" typeface="Microsoft JhengHei"/>
+        <a:font script="Java" typeface="Javanese Text"/>
+        <a:font script="Lisu" typeface="Segoe UI"/>
+        <a:font script="Mymr" typeface="Myanmar Text"/>
+        <a:font script="Nkoo" typeface="Ebrima"/>
+        <a:font script="Olck" typeface="Nirmala UI"/>
+        <a:font script="Osma" typeface="Ebrima"/>
+        <a:font script="Phag" typeface="Phagspa"/>
+        <a:font script="Syrn" typeface="Estrangelo Edessa"/>
+        <a:font script="Syrj" typeface="Estrangelo Edessa"/>
+        <a:font script="Syre" typeface="Estrangelo Edessa"/>
+        <a:font script="Sora" typeface="Nirmala UI"/>
+        <a:font script="Tale" typeface="Microsoft Tai Le"/>
+        <a:font script="Talu" typeface="Microsoft New Tai Lue"/>
+        <a:font script="Tfng" typeface="Ebrima"/>
       </a:majorFont>
       <a:minorFont>
-        <a:latin typeface="Calibri"/>
+        <a:latin typeface="Aptos" panose="02110004020202020204"/>
         <a:ea typeface=""/>
         <a:cs typeface=""/>
-        <a:font script="Jpan" typeface="ＭＳ Ｐゴシック"/>
+        <a:font script="Jpan" typeface="游ゴシック"/>
         <a:font script="Hang" typeface="맑은 고딕"/>
-        <a:font script="Hans" typeface="宋体"/>
+        <a:font script="Hans" typeface="等线"/>
         <a:font script="Hant" typeface="新細明體"/>
         <a:font script="Arab" typeface="Arial"/>
         <a:font script="Hebr" typeface="Arial"/>
@@ -31935,6 +31995,23 @@
         <a:font script="Viet" typeface="Arial"/>
         <a:font script="Uigh" typeface="Microsoft Uighur"/>
         <a:font script="Geor" typeface="Sylfaen"/>
+        <a:font script="Armn" typeface="Arial"/>
+        <a:font script="Bugi" typeface="Leelawadee UI"/>
+        <a:font script="Bopo" typeface="Microsoft JhengHei"/>
+        <a:font script="Java" typeface="Javanese Text"/>
+        <a:font script="Lisu" typeface="Segoe UI"/>
+        <a:font script="Mymr" typeface="Myanmar Text"/>
+        <a:font script="Nkoo" typeface="Ebrima"/>
+        <a:font script="Olck" typeface="Nirmala UI"/>
+        <a:font script="Osma" typeface="Ebrima"/>
+        <a:font script="Phag" typeface="Phagspa"/>
+        <a:font script="Syrn" typeface="Estrangelo Edessa"/>
+        <a:font script="Syrj" typeface="Estrangelo Edessa"/>
+        <a:font script="Syre" typeface="Estrangelo Edessa"/>
+        <a:font script="Sora" typeface="Nirmala UI"/>
+        <a:font script="Tale" typeface="Microsoft Tai Le"/>
+        <a:font script="Talu" typeface="Microsoft New Tai Lue"/>
+        <a:font script="Tfng" typeface="Ebrima"/>
       </a:minorFont>
     </a:fontScheme>
     <a:fmtScheme name="Office">
@@ -31946,180 +32023,136 @@
           <a:gsLst>
             <a:gs pos="0">
               <a:schemeClr val="phClr">
-                <a:tint val="50000"/>
-                <a:satMod val="300000"/>
+                <a:lumMod val="110000"/>
+                <a:satMod val="105000"/>
+                <a:tint val="67000"/>
               </a:schemeClr>
             </a:gs>
-            <a:gs pos="35000">
+            <a:gs pos="50000">
               <a:schemeClr val="phClr">
-                <a:tint val="37000"/>
-                <a:satMod val="300000"/>
+                <a:lumMod val="105000"/>
+                <a:satMod val="103000"/>
+                <a:tint val="73000"/>
               </a:schemeClr>
             </a:gs>
             <a:gs pos="100000">
               <a:schemeClr val="phClr">
-                <a:tint val="15000"/>
-                <a:satMod val="350000"/>
+                <a:lumMod val="105000"/>
+                <a:satMod val="109000"/>
+                <a:tint val="81000"/>
               </a:schemeClr>
             </a:gs>
           </a:gsLst>
-          <a:lin ang="16200000" scaled="1"/>
+          <a:lin ang="5400000" scaled="0"/>
         </a:gradFill>
         <a:gradFill rotWithShape="1">
           <a:gsLst>
             <a:gs pos="0">
               <a:schemeClr val="phClr">
-                <a:tint val="100000"/>
+                <a:satMod val="103000"/>
+                <a:lumMod val="102000"/>
+                <a:tint val="94000"/>
+              </a:schemeClr>
+            </a:gs>
+            <a:gs pos="50000">
+              <a:schemeClr val="phClr">
+                <a:satMod val="110000"/>
+                <a:lumMod val="100000"/>
                 <a:shade val="100000"/>
-                <a:satMod val="130000"/>
               </a:schemeClr>
             </a:gs>
             <a:gs pos="100000">
               <a:schemeClr val="phClr">
-                <a:tint val="50000"/>
-                <a:shade val="100000"/>
-                <a:satMod val="350000"/>
+                <a:lumMod val="99000"/>
+                <a:satMod val="120000"/>
+                <a:shade val="78000"/>
               </a:schemeClr>
             </a:gs>
           </a:gsLst>
-          <a:lin ang="16200000" scaled="0"/>
+          <a:lin ang="5400000" scaled="0"/>
         </a:gradFill>
       </a:fillStyleLst>
       <a:lnStyleLst>
-        <a:ln w="9525" cap="flat" cmpd="sng" algn="ctr">
+        <a:ln w="12700" cap="flat" cmpd="sng" algn="ctr">
           <a:solidFill>
-            <a:schemeClr val="phClr">
-              <a:shade val="95000"/>
-              <a:satMod val="105000"/>
-            </a:schemeClr>
+            <a:schemeClr val="phClr"/>
           </a:solidFill>
           <a:prstDash val="solid"/>
+          <a:miter lim="800000"/>
+        </a:ln>
+        <a:ln w="19050" cap="flat" cmpd="sng" algn="ctr">
+          <a:solidFill>
+            <a:schemeClr val="phClr"/>
+          </a:solidFill>
+          <a:prstDash val="solid"/>
+          <a:miter lim="800000"/>
         </a:ln>
         <a:ln w="25400" cap="flat" cmpd="sng" algn="ctr">
           <a:solidFill>
             <a:schemeClr val="phClr"/>
           </a:solidFill>
           <a:prstDash val="solid"/>
-        </a:ln>
-        <a:ln w="38100" cap="flat" cmpd="sng" algn="ctr">
-          <a:solidFill>
-            <a:schemeClr val="phClr"/>
-          </a:solidFill>
-          <a:prstDash val="solid"/>
+          <a:miter lim="800000"/>
         </a:ln>
       </a:lnStyleLst>
       <a:effectStyleLst>
         <a:effectStyle>
+          <a:effectLst/>
+        </a:effectStyle>
+        <a:effectStyle>
+          <a:effectLst/>
+        </a:effectStyle>
+        <a:effectStyle>
           <a:effectLst>
-            <a:outerShdw blurRad="40000" dist="20000" dir="5400000" rotWithShape="0">
+            <a:outerShdw blurRad="57150" dist="19050" dir="5400000" algn="ctr" rotWithShape="0">
               <a:srgbClr val="000000">
-                <a:alpha val="38000"/>
+                <a:alpha val="63000"/>
               </a:srgbClr>
             </a:outerShdw>
           </a:effectLst>
-        </a:effectStyle>
-        <a:effectStyle>
-          <a:effectLst>
-            <a:outerShdw blurRad="40000" dist="23000" dir="5400000" rotWithShape="0">
-              <a:srgbClr val="000000">
-                <a:alpha val="35000"/>
-              </a:srgbClr>
-            </a:outerShdw>
-          </a:effectLst>
-        </a:effectStyle>
-        <a:effectStyle>
-          <a:effectLst>
-            <a:outerShdw blurRad="40000" dist="23000" dir="5400000" rotWithShape="0">
-              <a:srgbClr val="000000">
-                <a:alpha val="35000"/>
-              </a:srgbClr>
-            </a:outerShdw>
-          </a:effectLst>
-          <a:scene3d>
-            <a:camera prst="orthographicFront">
-              <a:rot lat="0" lon="0" rev="0"/>
-            </a:camera>
-            <a:lightRig rig="threePt" dir="t">
-              <a:rot lat="0" lon="0" rev="1200000"/>
-            </a:lightRig>
-          </a:scene3d>
-          <a:sp3d>
-            <a:bevelT w="63500" h="25400"/>
-          </a:sp3d>
         </a:effectStyle>
       </a:effectStyleLst>
       <a:bgFillStyleLst>
         <a:solidFill>
           <a:schemeClr val="phClr"/>
         </a:solidFill>
+        <a:solidFill>
+          <a:schemeClr val="phClr">
+            <a:tint val="95000"/>
+            <a:satMod val="170000"/>
+          </a:schemeClr>
+        </a:solidFill>
         <a:gradFill rotWithShape="1">
           <a:gsLst>
             <a:gs pos="0">
               <a:schemeClr val="phClr">
-                <a:tint val="40000"/>
-                <a:satMod val="350000"/>
+                <a:tint val="93000"/>
+                <a:satMod val="150000"/>
+                <a:shade val="98000"/>
+                <a:lumMod val="102000"/>
               </a:schemeClr>
             </a:gs>
-            <a:gs pos="40000">
+            <a:gs pos="50000">
               <a:schemeClr val="phClr">
-                <a:tint val="45000"/>
-                <a:shade val="99000"/>
-                <a:satMod val="350000"/>
+                <a:tint val="98000"/>
+                <a:satMod val="130000"/>
+                <a:shade val="90000"/>
+                <a:lumMod val="103000"/>
               </a:schemeClr>
             </a:gs>
             <a:gs pos="100000">
               <a:schemeClr val="phClr">
-                <a:shade val="20000"/>
-                <a:satMod val="255000"/>
+                <a:shade val="63000"/>
+                <a:satMod val="120000"/>
               </a:schemeClr>
             </a:gs>
           </a:gsLst>
-          <a:path path="circle">
-            <a:fillToRect l="50000" t="-80000" r="50000" b="180000"/>
-          </a:path>
-        </a:gradFill>
-        <a:gradFill rotWithShape="1">
-          <a:gsLst>
-            <a:gs pos="0">
-              <a:schemeClr val="phClr">
-                <a:tint val="80000"/>
-                <a:satMod val="300000"/>
-              </a:schemeClr>
-            </a:gs>
-            <a:gs pos="100000">
-              <a:schemeClr val="phClr">
-                <a:shade val="30000"/>
-                <a:satMod val="200000"/>
-              </a:schemeClr>
-            </a:gs>
-          </a:gsLst>
-          <a:path path="circle">
-            <a:fillToRect l="50000" t="50000" r="50000" b="50000"/>
-          </a:path>
+          <a:lin ang="5400000" scaled="0"/>
         </a:gradFill>
       </a:bgFillStyleLst>
     </a:fmtScheme>
   </a:themeElements>
   <a:objectDefaults>
-    <a:spDef>
-      <a:spPr/>
-      <a:bodyPr/>
-      <a:lstStyle/>
-      <a:style>
-        <a:lnRef idx="1">
-          <a:schemeClr val="accent1"/>
-        </a:lnRef>
-        <a:fillRef idx="3">
-          <a:schemeClr val="accent1"/>
-        </a:fillRef>
-        <a:effectRef idx="2">
-          <a:schemeClr val="accent1"/>
-        </a:effectRef>
-        <a:fontRef idx="minor">
-          <a:schemeClr val="lt1"/>
-        </a:fontRef>
-      </a:style>
-    </a:spDef>
     <a:lnDef>
       <a:spPr/>
       <a:bodyPr/>
@@ -32141,5 +32174,10 @@
     </a:lnDef>
   </a:objectDefaults>
   <a:extraClrSchemeLst/>
+  <a:extLst>
+    <a:ext uri="{05A4C25C-085E-4340-85A3-A5531E510DB2}">
+      <thm15:themeFamily xmlns:thm15="http://schemas.microsoft.com/office/thememl/2012/main" name="Office Theme" id="{2E142A2C-CD16-42D6-873A-C26D2A0506FA}" vid="{1BDDFF52-6CD6-40A5-AB3C-68EB2F1E4D0A}"/>
+    </a:ext>
+  </a:extLst>
 </a:theme>
 </file>
--- a/docs/LF/slides/LF_2026/DeepCausality_TAC_2026.pptx
+++ b/docs/LF/slides/LF_2026/DeepCausality_TAC_2026.pptx
@@ -25,7 +25,7 @@
     <p:sldId id="278" r:id="rId16"/>
   </p:sldIdLst>
   <p:sldSz cx="12192000" cy="6858000"/>
-  <p:notesSz cx="6858000" cy="9144000"/>
+  <p:notesSz cx="9144000" cy="6858000"/>
   <p:defaultTextStyle>
     <a:defPPr>
       <a:defRPr lang="en-US"/>
@@ -9622,7 +9622,43 @@
                 </a:solidFill>
                 <a:latin typeface="Geist"/>
               </a:rPr>
-              <a:t>In September 2023, at the point of the Sandbox proposal, the </a:t>
+              <a:t>In September 2023, at the </a:t>
+            </a:r>
+            <a:r>
+              <a:rPr lang="en-US" sz="1400" dirty="0">
+                <a:solidFill>
+                  <a:srgbClr val="AAB3BD"/>
+                </a:solidFill>
+                <a:latin typeface="Geist"/>
+              </a:rPr>
+              <a:t>LF </a:t>
+            </a:r>
+            <a:r>
+              <a:rPr sz="1400" dirty="0">
+                <a:solidFill>
+                  <a:srgbClr val="AAB3BD"/>
+                </a:solidFill>
+                <a:latin typeface="Geist"/>
+              </a:rPr>
+              <a:t>Sandbox </a:t>
+            </a:r>
+            <a:r>
+              <a:rPr lang="en-US" sz="1400" dirty="0">
+                <a:solidFill>
+                  <a:srgbClr val="AAB3BD"/>
+                </a:solidFill>
+                <a:latin typeface="Geist"/>
+              </a:rPr>
+              <a:t>admission</a:t>
+            </a:r>
+            <a:r>
+              <a:rPr sz="1400" dirty="0">
+                <a:solidFill>
+                  <a:srgbClr val="AAB3BD"/>
+                </a:solidFill>
+                <a:latin typeface="Geist"/>
+              </a:rPr>
+              <a:t>, the </a:t>
             </a:r>
             <a:r>
               <a:rPr lang="en-US" sz="1400" dirty="0">
@@ -11031,13 +11067,31 @@
               </a:spcAft>
             </a:pPr>
             <a:r>
-              <a:rPr sz="950" spc="76">
+              <a:rPr sz="950" spc="76" dirty="0">
                 <a:solidFill>
                   <a:srgbClr val="5CD4E1"/>
                 </a:solidFill>
                 <a:latin typeface="JetBrains Mono Medium"/>
               </a:rPr>
-              <a:t>ZERO-DEPENDENCY CRATES</a:t>
+              <a:t>ZERO-</a:t>
+            </a:r>
+            <a:r>
+              <a:rPr lang="en-US" sz="950" spc="76" dirty="0">
+                <a:solidFill>
+                  <a:srgbClr val="5CD4E1"/>
+                </a:solidFill>
+                <a:latin typeface="JetBrains Mono Medium"/>
+              </a:rPr>
+              <a:t>Ext. </a:t>
+            </a:r>
+            <a:r>
+              <a:rPr sz="950" spc="76" dirty="0">
+                <a:solidFill>
+                  <a:srgbClr val="5CD4E1"/>
+                </a:solidFill>
+                <a:latin typeface="JetBrains Mono Medium"/>
+              </a:rPr>
+              <a:t>DEPENDENCY CRATES</a:t>
             </a:r>
           </a:p>
         </p:txBody>

--- a/docs/LF/slides/LF_2026/DeepCausality_TAC_2026.pptx
+++ b/docs/LF/slides/LF_2026/DeepCausality_TAC_2026.pptx
@@ -1037,7 +1037,7 @@
           <a:p>
             <a:r>
               <a:rPr lang="en-US" dirty="0"/>
-              <a:t>Thank you to our sponsors </a:t>
+              <a:t>Thank you to our sponsors</a:t>
             </a:r>
             <a:endParaRPr dirty="0"/>
           </a:p>
@@ -5550,7 +5550,7 @@
                 </a:solidFill>
                 <a:latin typeface="Geist"/>
               </a:rPr>
-              <a:t> </a:t>
+              <a:t/>
             </a:r>
             <a:endParaRPr sz="1450" dirty="0">
               <a:solidFill>
@@ -5862,7 +5862,7 @@
                 </a:solidFill>
                 <a:latin typeface="Geist"/>
               </a:rPr>
-              <a:t>A shared foundation across projects: More details: </a:t>
+              <a:t>A shared foundation across projects. More details at </a:t>
             </a:r>
             <a:r>
               <a:rPr lang="en-US" sz="1400" dirty="0" err="1">
@@ -6665,7 +6665,7 @@
                 </a:solidFill>
                 <a:latin typeface="Geist"/>
               </a:rPr>
-              <a:t>via  </a:t>
+              <a:t>via </a:t>
             </a:r>
             <a:r>
               <a:rPr sz="1400" dirty="0" err="1">
@@ -7771,7 +7771,7 @@
                 </a:solidFill>
                 <a:latin typeface="Geist"/>
               </a:rPr>
-              <a:t>Real-Time Anomaly detection</a:t>
+              <a:t>Real-time anomaly detection</a:t>
             </a:r>
           </a:p>
           <a:p>
@@ -7804,7 +7804,7 @@
                 </a:solidFill>
                 <a:latin typeface="Geist"/>
               </a:rPr>
-              <a:t>mio</a:t>
+              <a:t>million</a:t>
             </a:r>
             <a:r>
               <a:rPr lang="en-US" sz="1200" dirty="0">
@@ -7880,7 +7880,7 @@
                 </a:solidFill>
                 <a:latin typeface="Geist"/>
               </a:rPr>
-              <a:t>Ultragraph</a:t>
+              <a:t>UltraGraph</a:t>
             </a:r>
           </a:p>
           <a:p>
@@ -7928,7 +7928,7 @@
                 </a:solidFill>
                 <a:latin typeface="Geist"/>
               </a:rPr>
-              <a:t>Dynamic Context </a:t>
+              <a:t>Dynamic Context</a:t>
             </a:r>
           </a:p>
         </p:txBody>
@@ -9041,7 +9041,7 @@
                 </a:solidFill>
                 <a:latin typeface="Geist"/>
               </a:rPr>
-              <a:t>Works towards:</a:t>
+              <a:t>Works toward:</a:t>
             </a:r>
           </a:p>
           <a:p>
@@ -9089,7 +9089,7 @@
                 </a:solidFill>
                 <a:latin typeface="Geist"/>
               </a:rPr>
-              <a:t>Cross domain diagnostic</a:t>
+              <a:t>Cross-domain diagnostics</a:t>
             </a:r>
           </a:p>
           <a:p>
@@ -9449,7 +9449,7 @@
                 </a:solidFill>
                 <a:latin typeface="Geist"/>
               </a:rPr>
-              <a:t> Ontology</a:t>
+              <a:t> ontology</a:t>
             </a:r>
           </a:p>
         </p:txBody>
@@ -11082,7 +11082,7 @@
                 </a:solidFill>
                 <a:latin typeface="JetBrains Mono Medium"/>
               </a:rPr>
-              <a:t>Ext. </a:t>
+              <a:t/>
             </a:r>
             <a:r>
               <a:rPr sz="950" spc="76" dirty="0">
@@ -11348,7 +11348,7 @@
                 </a:solidFill>
                 <a:latin typeface="Geist"/>
               </a:rPr>
-              <a:t>Research in advanced topics started only in mid 2026 and is structured to continue. </a:t>
+              <a:t>Research in advanced topics started only in mid-2026 and will continue.</a:t>
             </a:r>
             <a:endParaRPr sz="1150" dirty="0">
               <a:solidFill>
@@ -11857,7 +11857,7 @@
                 </a:solidFill>
                 <a:latin typeface="Geist"/>
               </a:rPr>
-              <a:t>domain </a:t>
+              <a:t>domain</a:t>
             </a:r>
             <a:endParaRPr lang="en-US" sz="1200" dirty="0">
               <a:solidFill>
@@ -11894,7 +11894,7 @@
                 </a:solidFill>
                 <a:latin typeface="Geist"/>
               </a:rPr>
-              <a:t>verification and an audit trail. If</a:t>
+              <a:t>verification and an audit trail. If </a:t>
             </a:r>
             <a:br>
               <a:rPr lang="en-US" sz="1200" dirty="0">
@@ -11911,7 +11911,7 @@
                 </a:solidFill>
                 <a:latin typeface="Geist"/>
               </a:rPr>
-              <a:t>your team struggles to meet verification</a:t>
+              <a:t>your team struggles to meet verification </a:t>
             </a:r>
             <a:br>
               <a:rPr lang="en-US" sz="1200" dirty="0">
@@ -11945,7 +11945,7 @@
                 </a:solidFill>
                 <a:latin typeface="Geist"/>
               </a:rPr>
-              <a:t>processes, dynamic causality may help. </a:t>
+              <a:t>processes, dynamic causality may help.</a:t>
             </a:r>
             <a:endParaRPr sz="1200" dirty="0">
               <a:solidFill>
@@ -12252,7 +12252,7 @@
                 </a:solidFill>
                 <a:latin typeface="Geist"/>
               </a:rPr>
-              <a:t>please explore</a:t>
+              <a:t>please explore </a:t>
             </a:r>
             <a:br>
               <a:rPr lang="en-US" sz="1200" dirty="0">
@@ -12492,7 +12492,7 @@
                 </a:solidFill>
                 <a:latin typeface="Geist"/>
               </a:rPr>
-              <a:t>LEAN</a:t>
+              <a:t>Lean</a:t>
             </a:r>
             <a:r>
               <a:rPr sz="1200" dirty="0">
@@ -12523,7 +12523,7 @@
                 </a:solidFill>
                 <a:latin typeface="Geist"/>
               </a:rPr>
-              <a:t>Extending the proved surface </a:t>
+              <a:t>Extending the proven surface </a:t>
             </a:r>
             <a:r>
               <a:rPr lang="en-US" sz="1200" dirty="0">
@@ -12532,7 +12532,7 @@
                 </a:solidFill>
                 <a:latin typeface="Geist"/>
               </a:rPr>
-              <a:t>is ongoing</a:t>
+              <a:t>is ongoing </a:t>
             </a:r>
             <a:br>
               <a:rPr lang="en-US" sz="1200" dirty="0">
@@ -12549,7 +12549,7 @@
                 </a:solidFill>
                 <a:latin typeface="Geist"/>
               </a:rPr>
-              <a:t>work and any help is welcome. </a:t>
+              <a:t>work and any help is welcome.</a:t>
             </a:r>
             <a:endParaRPr sz="1200" dirty="0">
               <a:solidFill>
@@ -13061,7 +13061,7 @@
                 </a:solidFill>
                 <a:latin typeface="Geist"/>
               </a:rPr>
-              <a:t>Dynamic Causality is new, has a learning </a:t>
+              <a:t>Dynamic Causality is new, has a learning</a:t>
             </a:r>
           </a:p>
           <a:p>
@@ -13083,7 +13083,7 @@
                 </a:solidFill>
                 <a:latin typeface="Geist"/>
               </a:rPr>
-              <a:t>curve and offers novel solutions. The</a:t>
+              <a:t>curve, and offers novel solutions. The </a:t>
             </a:r>
             <a:br>
               <a:rPr lang="en-US" sz="1200" dirty="0">
@@ -13117,7 +13117,7 @@
                 </a:solidFill>
                 <a:latin typeface="Geist"/>
               </a:rPr>
-              <a:t>help with large or complex projects. </a:t>
+              <a:t>help with large or complex projects.</a:t>
             </a:r>
             <a:endParaRPr sz="1200" dirty="0">
               <a:solidFill>
@@ -13337,7 +13337,7 @@
                 </a:solidFill>
                 <a:latin typeface="Geist"/>
               </a:rPr>
-              <a:t>The propagating effect is </a:t>
+              <a:t>The propagating effect is the foundation</a:t>
             </a:r>
             <a:r>
               <a:rPr lang="en-US" sz="1200" dirty="0">
@@ -13346,7 +13346,7 @@
                 </a:solidFill>
                 <a:latin typeface="Geist"/>
               </a:rPr>
-              <a:t>the foundation </a:t>
+              <a:t/>
             </a:r>
           </a:p>
           <a:p>
@@ -13368,7 +13368,7 @@
                 </a:solidFill>
                 <a:latin typeface="Geist"/>
               </a:rPr>
-              <a:t>of ongoing research in advanced fields </a:t>
+              <a:t>of ongoing research in advanced fields</a:t>
             </a:r>
           </a:p>
           <a:p>
@@ -13390,7 +13390,7 @@
                 </a:solidFill>
                 <a:latin typeface="Geist"/>
               </a:rPr>
-              <a:t>such as CFD and Quantum. All results</a:t>
+              <a:t>such as CFD and quantum causality.</a:t>
             </a:r>
           </a:p>
           <a:p>
@@ -13412,7 +13412,7 @@
                 </a:solidFill>
                 <a:latin typeface="Geist"/>
               </a:rPr>
-              <a:t>are open source. </a:t>
+              <a:t>All results are open source.</a:t>
             </a:r>
             <a:endParaRPr sz="1200" dirty="0">
               <a:solidFill>
@@ -13685,7 +13685,7 @@
                 </a:solidFill>
                 <a:latin typeface="Geist"/>
               </a:rPr>
-              <a:t> </a:t>
+              <a:t/>
             </a:r>
             <a:r>
               <a:rPr lang="en-US" sz="1200" dirty="0">
@@ -13694,7 +13694,7 @@
                 </a:solidFill>
                 <a:latin typeface="Geist"/>
               </a:rPr>
-              <a:t>ServiceRadar only scratches the surface</a:t>
+              <a:t>ServiceRadar only scratches the surface </a:t>
             </a:r>
             <a:br>
               <a:rPr lang="en-US" sz="1200" dirty="0">
@@ -13711,7 +13711,7 @@
                 </a:solidFill>
                 <a:latin typeface="Geist"/>
               </a:rPr>
-              <a:t>of what a product can do when augmented</a:t>
+              <a:t>of what a product can do when augmented </a:t>
             </a:r>
             <a:br>
               <a:rPr lang="en-US" sz="1200" dirty="0">
@@ -13728,7 +13728,7 @@
                 </a:solidFill>
                 <a:latin typeface="Geist"/>
               </a:rPr>
-              <a:t>with dynamic causality.  Deeper integrations</a:t>
+              <a:t>with dynamic causality. Deeper integrations </a:t>
             </a:r>
             <a:br>
               <a:rPr lang="en-US" sz="1200" dirty="0">
@@ -13745,7 +13745,7 @@
                 </a:solidFill>
                 <a:latin typeface="Geist"/>
               </a:rPr>
-              <a:t>will unlock advanced functionality. </a:t>
+              <a:t>will unlock advanced functionality.</a:t>
             </a:r>
             <a:endParaRPr sz="1200" dirty="0">
               <a:solidFill>
@@ -14665,7 +14665,7 @@
                 </a:solidFill>
                 <a:latin typeface="Geist"/>
               </a:rPr>
-              <a:t> </a:t>
+              <a:t/>
             </a:r>
             <a:endParaRPr sz="1450" dirty="0">
               <a:solidFill>
@@ -14859,7 +14859,7 @@
                 </a:solidFill>
                 <a:latin typeface="JetBrains Mono Medium"/>
               </a:rPr>
-              <a:t>Acknowledgement</a:t>
+              <a:t>Acknowledgment</a:t>
             </a:r>
             <a:endParaRPr sz="1100" spc="88" dirty="0">
               <a:solidFill>
@@ -15906,7 +15906,7 @@
                 </a:solidFill>
                 <a:latin typeface="Geist Medium"/>
               </a:rPr>
-              <a:t>The axiom </a:t>
+              <a:t>The axiom</a:t>
             </a:r>
           </a:p>
         </p:txBody>
@@ -16336,7 +16336,7 @@
                 </a:solidFill>
                 <a:latin typeface="Geist"/>
               </a:rPr>
-              <a:t>. </a:t>
+              <a:t>, and </a:t>
             </a:r>
             <a:r>
               <a:rPr lang="en-US" sz="1350" dirty="0" err="1">
@@ -16956,7 +16956,7 @@
                 </a:solidFill>
                 <a:latin typeface="Geist Medium"/>
               </a:rPr>
-              <a:t> </a:t>
+              <a:t/>
             </a:r>
           </a:p>
         </p:txBody>
@@ -17683,7 +17683,7 @@
                 </a:solidFill>
                 <a:latin typeface="Geist"/>
               </a:rPr>
-              <a:t>Sound on its own ground. </a:t>
+              <a:t>Sound on its own ground.</a:t>
             </a:r>
           </a:p>
         </p:txBody>
@@ -18270,7 +18270,7 @@
                 </a:solidFill>
                 <a:latin typeface="Geist"/>
               </a:rPr>
-              <a:t>s. </a:t>
+              <a:t>s.</a:t>
             </a:r>
             <a:endParaRPr sz="1250" dirty="0">
               <a:solidFill>
@@ -19555,7 +19555,7 @@
                 </a:solidFill>
                 <a:latin typeface="Geist"/>
               </a:rPr>
-              <a:t>An arity-5 </a:t>
+              <a:t>An arity-5 monad: value,</a:t>
             </a:r>
             <a:r>
               <a:rPr lang="en-US" sz="1200" dirty="0">
@@ -19564,7 +19564,7 @@
                 </a:solidFill>
                 <a:latin typeface="Geist"/>
               </a:rPr>
-              <a:t>monad</a:t>
+              <a:t/>
             </a:r>
             <a:r>
               <a:rPr sz="1200" dirty="0">
@@ -19573,7 +19573,7 @@
                 </a:solidFill>
                 <a:latin typeface="Geist"/>
               </a:rPr>
-              <a:t>: value,</a:t>
+              <a:t/>
             </a:r>
           </a:p>
           <a:p>
@@ -19595,7 +19595,7 @@
                 </a:solidFill>
                 <a:latin typeface="Geist"/>
               </a:rPr>
-              <a:t>state, context, error, audit</a:t>
+              <a:t>state, context, error, and</a:t>
             </a:r>
           </a:p>
           <a:p>
@@ -19617,7 +19617,7 @@
                 </a:solidFill>
                 <a:latin typeface="Geist"/>
               </a:rPr>
-              <a:t>log. The monad laws thread</a:t>
+              <a:t>audit log. The monad laws</a:t>
             </a:r>
           </a:p>
           <a:p>
@@ -19639,7 +19639,7 @@
                 </a:solidFill>
                 <a:latin typeface="Geist"/>
               </a:rPr>
-              <a:t>that bookkeeping through</a:t>
+              <a:t>thread that bookkeeping</a:t>
             </a:r>
           </a:p>
           <a:p>
@@ -19661,7 +19661,7 @@
                 </a:solidFill>
                 <a:latin typeface="Geist"/>
               </a:rPr>
-              <a:t>every step.</a:t>
+              <a:t>through every step.</a:t>
             </a:r>
           </a:p>
         </p:txBody>
@@ -20236,7 +20236,7 @@
                 </a:solidFill>
                 <a:latin typeface="Geist"/>
               </a:rPr>
-              <a:t>Minkowski, anything between.</a:t>
+              <a:t>Minkowski, anything in between.</a:t>
             </a:r>
           </a:p>
           <a:p>
@@ -20538,7 +20538,7 @@
                 </a:solidFill>
                 <a:latin typeface="Geist"/>
               </a:rPr>
-              <a:t> hypergraph </a:t>
+              <a:t> hypergraph.</a:t>
             </a:r>
           </a:p>
         </p:txBody>
@@ -26466,7 +26466,7 @@
                 </a:solidFill>
                 <a:latin typeface="Geist"/>
               </a:rPr>
-              <a:t>Run the model thread-safe and asynchronously at scale.</a:t>
+              <a:t>Run the model thread-safely and asynchronously at scale.</a:t>
             </a:r>
           </a:p>
         </p:txBody>
@@ -26825,7 +26825,7 @@
                 </a:solidFill>
                 <a:latin typeface="Geist"/>
               </a:rPr>
-              <a:t>Causal Discovery simplified </a:t>
+              <a:t>Causal discovery, simplified </a:t>
             </a:r>
             <a:r>
               <a:rPr sz="1400" dirty="0">
@@ -26843,7 +26843,7 @@
                 </a:solidFill>
                 <a:latin typeface="Geist"/>
               </a:rPr>
-              <a:t>CDL Language</a:t>
+              <a:t>CDL</a:t>
             </a:r>
             <a:endParaRPr sz="1400" dirty="0">
               <a:solidFill>
